--- a/examples/aurora-synthetic/output/paimon-36x48/aurora-synthetic-paimon-cape-gradient-visual-signature.pptx
+++ b/examples/aurora-synthetic/output/paimon-36x48/aurora-synthetic-paimon-cape-gradient-visual-signature.pptx
@@ -2,13 +2,13 @@
 <file path=ppt/presentation.xml><?xml version="1.0" encoding="utf-8"?>
 <p:presentation xmlns:p="http://schemas.openxmlformats.org/presentationml/2006/main">
   <p:sldMasterIdLst>
-    <p:sldMasterId xmlns:r="http://schemas.openxmlformats.org/officeDocument/2006/relationships" id="2147483648" r:id="R821fce167efc4ee6"/>
+    <p:sldMasterId xmlns:r="http://schemas.openxmlformats.org/officeDocument/2006/relationships" id="2147483648" r:id="Rf74045df4fe4455e"/>
   </p:sldMasterIdLst>
   <p:notesMasterIdLst>
-    <p:notesMasterId xmlns:r="http://schemas.openxmlformats.org/officeDocument/2006/relationships" r:id="R7d82fa76937640ab"/>
+    <p:notesMasterId xmlns:r="http://schemas.openxmlformats.org/officeDocument/2006/relationships" r:id="R71e95b2637b54281"/>
   </p:notesMasterIdLst>
   <p:sldIdLst>
-    <p:sldId xmlns:r="http://schemas.openxmlformats.org/officeDocument/2006/relationships" id="256" r:id="R577c8fc58d0d406b"/>
+    <p:sldId xmlns:r="http://schemas.openxmlformats.org/officeDocument/2006/relationships" id="256" r:id="Rfee42b08d4624615"/>
   </p:sldIdLst>
   <p:sldSz cx="43891200" cy="32918400"/>
   <p:notesSz cx="6858000" cy="9144000"/>
@@ -530,7 +530,7 @@
   </p:cSld>
   <p:clrMap bg1="lt1" tx1="dk1" bg2="lt2" tx2="dk2" accent1="accent1" accent2="accent2" accent3="accent3" accent4="accent4" accent5="accent5" accent6="accent6" hlink="hlink" folHlink="folHlink"/>
   <p:sldLayoutIdLst>
-    <p:sldLayoutId xmlns:r="http://schemas.openxmlformats.org/officeDocument/2006/relationships" id="2147483649" r:id="R504a840a995e400e"/>
+    <p:sldLayoutId xmlns:r="http://schemas.openxmlformats.org/officeDocument/2006/relationships" id="2147483649" r:id="R1be8764eb9154736"/>
   </p:sldLayoutIdLst>
   <p:txStyles>
     <p:titleStyle>
@@ -1078,10 +1078,10 @@
       </p:grpSpPr>
       <p:sp>
         <p:nvSpPr>
-          <p:cNvPr id="183" name="header-band">
-            <a:extLst xmlns:a="http://schemas.openxmlformats.org/drawingml/2006/main">
-              <a:ext uri="{FF2B5EF4-FFF2-40B4-BE49-F238E27FC236}">
-                <a16:creationId xmlns:a16="http://schemas.microsoft.com/office/drawing/2014/main" id="{354B29EB-8BE2-40F0-84F6-D0EE6E870B85}"/>
+          <p:cNvPr id="185" name="header-band">
+            <a:extLst xmlns:a="http://schemas.openxmlformats.org/drawingml/2006/main">
+              <a:ext uri="{FF2B5EF4-FFF2-40B4-BE49-F238E27FC236}">
+                <a16:creationId xmlns:a16="http://schemas.microsoft.com/office/drawing/2014/main" id="{494CE01B-EE0F-4955-8556-A28708EEC58D}"/>
               </a:ext>
             </a:extLst>
           </p:cNvPr>
@@ -1114,7 +1114,7 @@
           <p:cNvPr id="2" name="top-cape-gradient-1">
             <a:extLst xmlns:a="http://schemas.openxmlformats.org/drawingml/2006/main">
               <a:ext uri="{FF2B5EF4-FFF2-40B4-BE49-F238E27FC236}">
-                <a16:creationId xmlns:a16="http://schemas.microsoft.com/office/drawing/2014/main" id="{5E338B15-6798-4E8E-9AFF-D2B54964C993}"/>
+                <a16:creationId xmlns:a16="http://schemas.microsoft.com/office/drawing/2014/main" id="{34029A09-7BE3-4FB2-8206-880696FDD1CB}"/>
               </a:ext>
             </a:extLst>
           </p:cNvPr>
@@ -1147,7 +1147,7 @@
           <p:cNvPr id="3" name="top-cape-gradient-2">
             <a:extLst xmlns:a="http://schemas.openxmlformats.org/drawingml/2006/main">
               <a:ext uri="{FF2B5EF4-FFF2-40B4-BE49-F238E27FC236}">
-                <a16:creationId xmlns:a16="http://schemas.microsoft.com/office/drawing/2014/main" id="{0ACED37D-E6F2-48AF-96D4-900EED4427FD}"/>
+                <a16:creationId xmlns:a16="http://schemas.microsoft.com/office/drawing/2014/main" id="{C153B96A-7BE3-4F53-B337-CCD15266A5D0}"/>
               </a:ext>
             </a:extLst>
           </p:cNvPr>
@@ -1180,7 +1180,7 @@
           <p:cNvPr id="4" name="top-cape-gradient-3">
             <a:extLst xmlns:a="http://schemas.openxmlformats.org/drawingml/2006/main">
               <a:ext uri="{FF2B5EF4-FFF2-40B4-BE49-F238E27FC236}">
-                <a16:creationId xmlns:a16="http://schemas.microsoft.com/office/drawing/2014/main" id="{A7C60B16-18C2-4555-B37F-B33CB42A9ED0}"/>
+                <a16:creationId xmlns:a16="http://schemas.microsoft.com/office/drawing/2014/main" id="{73614D68-F52D-4E71-8C9B-873E3AF344A2}"/>
               </a:ext>
             </a:extLst>
           </p:cNvPr>
@@ -1213,7 +1213,7 @@
           <p:cNvPr id="5" name="top-cape-gradient-4">
             <a:extLst xmlns:a="http://schemas.openxmlformats.org/drawingml/2006/main">
               <a:ext uri="{FF2B5EF4-FFF2-40B4-BE49-F238E27FC236}">
-                <a16:creationId xmlns:a16="http://schemas.microsoft.com/office/drawing/2014/main" id="{996300B4-DEB5-43C3-83EF-A5E3E9E841E9}"/>
+                <a16:creationId xmlns:a16="http://schemas.microsoft.com/office/drawing/2014/main" id="{49EEFEF2-88B4-46C9-A03B-669A7BF40300}"/>
               </a:ext>
             </a:extLst>
           </p:cNvPr>
@@ -1246,7 +1246,7 @@
           <p:cNvPr id="6" name="top-cape-gradient-5">
             <a:extLst xmlns:a="http://schemas.openxmlformats.org/drawingml/2006/main">
               <a:ext uri="{FF2B5EF4-FFF2-40B4-BE49-F238E27FC236}">
-                <a16:creationId xmlns:a16="http://schemas.microsoft.com/office/drawing/2014/main" id="{C24DBE8D-3525-4156-8271-5ED01B9D1F00}"/>
+                <a16:creationId xmlns:a16="http://schemas.microsoft.com/office/drawing/2014/main" id="{7FC823B7-246B-4502-8B45-7B6FCC215423}"/>
               </a:ext>
             </a:extLst>
           </p:cNvPr>
@@ -1279,7 +1279,7 @@
           <p:cNvPr id="7" name="top-cape-gradient-6">
             <a:extLst xmlns:a="http://schemas.openxmlformats.org/drawingml/2006/main">
               <a:ext uri="{FF2B5EF4-FFF2-40B4-BE49-F238E27FC236}">
-                <a16:creationId xmlns:a16="http://schemas.microsoft.com/office/drawing/2014/main" id="{C07B0D72-BE1A-46CE-A6A0-B90835FED0A0}"/>
+                <a16:creationId xmlns:a16="http://schemas.microsoft.com/office/drawing/2014/main" id="{C0103DEB-E8E5-4BC6-B906-4E0460123AF7}"/>
               </a:ext>
             </a:extLst>
           </p:cNvPr>
@@ -1312,7 +1312,7 @@
           <p:cNvPr id="8" name="top-cape-gradient-7">
             <a:extLst xmlns:a="http://schemas.openxmlformats.org/drawingml/2006/main">
               <a:ext uri="{FF2B5EF4-FFF2-40B4-BE49-F238E27FC236}">
-                <a16:creationId xmlns:a16="http://schemas.microsoft.com/office/drawing/2014/main" id="{0A56D24E-3BC4-4023-938E-5623D32227CA}"/>
+                <a16:creationId xmlns:a16="http://schemas.microsoft.com/office/drawing/2014/main" id="{31DC286E-91A4-4D6C-85DC-020C84A36179}"/>
               </a:ext>
             </a:extLst>
           </p:cNvPr>
@@ -1345,7 +1345,7 @@
           <p:cNvPr id="9" name="top-cape-gradient-8">
             <a:extLst xmlns:a="http://schemas.openxmlformats.org/drawingml/2006/main">
               <a:ext uri="{FF2B5EF4-FFF2-40B4-BE49-F238E27FC236}">
-                <a16:creationId xmlns:a16="http://schemas.microsoft.com/office/drawing/2014/main" id="{F8E46AEE-FCCB-48CD-8A4A-6F5762B8F968}"/>
+                <a16:creationId xmlns:a16="http://schemas.microsoft.com/office/drawing/2014/main" id="{887D9E87-A769-4BE6-B5BC-958339D4892F}"/>
               </a:ext>
             </a:extLst>
           </p:cNvPr>
@@ -1378,7 +1378,7 @@
           <p:cNvPr id="10" name="top-cape-gradient-9">
             <a:extLst xmlns:a="http://schemas.openxmlformats.org/drawingml/2006/main">
               <a:ext uri="{FF2B5EF4-FFF2-40B4-BE49-F238E27FC236}">
-                <a16:creationId xmlns:a16="http://schemas.microsoft.com/office/drawing/2014/main" id="{DD4BC43A-511C-4F1E-9739-AEE60F27BCAF}"/>
+                <a16:creationId xmlns:a16="http://schemas.microsoft.com/office/drawing/2014/main" id="{E0EA1066-C30E-49A9-8C1D-45D3F5D8E19B}"/>
               </a:ext>
             </a:extLst>
           </p:cNvPr>
@@ -1411,7 +1411,7 @@
           <p:cNvPr id="11" name="top-cape-gradient-10">
             <a:extLst xmlns:a="http://schemas.openxmlformats.org/drawingml/2006/main">
               <a:ext uri="{FF2B5EF4-FFF2-40B4-BE49-F238E27FC236}">
-                <a16:creationId xmlns:a16="http://schemas.microsoft.com/office/drawing/2014/main" id="{A90B7357-705D-45FC-B0C6-93446D7DD645}"/>
+                <a16:creationId xmlns:a16="http://schemas.microsoft.com/office/drawing/2014/main" id="{A85C7CA1-D033-4CAF-92A1-D66B6125D185}"/>
               </a:ext>
             </a:extLst>
           </p:cNvPr>
@@ -1444,7 +1444,7 @@
           <p:cNvPr id="12" name="top-cape-gradient-11">
             <a:extLst xmlns:a="http://schemas.openxmlformats.org/drawingml/2006/main">
               <a:ext uri="{FF2B5EF4-FFF2-40B4-BE49-F238E27FC236}">
-                <a16:creationId xmlns:a16="http://schemas.microsoft.com/office/drawing/2014/main" id="{69B7DFFD-E94A-482D-AEEC-7D537DE527C8}"/>
+                <a16:creationId xmlns:a16="http://schemas.microsoft.com/office/drawing/2014/main" id="{E3E49890-3443-4DC0-84E3-39F6D2D9E272}"/>
               </a:ext>
             </a:extLst>
           </p:cNvPr>
@@ -1477,7 +1477,7 @@
           <p:cNvPr id="13" name="top-cape-gradient-12">
             <a:extLst xmlns:a="http://schemas.openxmlformats.org/drawingml/2006/main">
               <a:ext uri="{FF2B5EF4-FFF2-40B4-BE49-F238E27FC236}">
-                <a16:creationId xmlns:a16="http://schemas.microsoft.com/office/drawing/2014/main" id="{2B66DB97-9891-4913-B1F6-355E4486135F}"/>
+                <a16:creationId xmlns:a16="http://schemas.microsoft.com/office/drawing/2014/main" id="{0CE7E1D0-1D53-4680-AC5A-00F3610AEEDA}"/>
               </a:ext>
             </a:extLst>
           </p:cNvPr>
@@ -1510,7 +1510,7 @@
           <p:cNvPr id="14" name="top-cape-gradient-13">
             <a:extLst xmlns:a="http://schemas.openxmlformats.org/drawingml/2006/main">
               <a:ext uri="{FF2B5EF4-FFF2-40B4-BE49-F238E27FC236}">
-                <a16:creationId xmlns:a16="http://schemas.microsoft.com/office/drawing/2014/main" id="{EDE3E85F-8D97-41FE-8C23-0305F38DE926}"/>
+                <a16:creationId xmlns:a16="http://schemas.microsoft.com/office/drawing/2014/main" id="{820F89DA-F11C-40C3-945D-BE35AABCC0F6}"/>
               </a:ext>
             </a:extLst>
           </p:cNvPr>
@@ -1543,7 +1543,7 @@
           <p:cNvPr id="15" name="top-cape-gradient-14">
             <a:extLst xmlns:a="http://schemas.openxmlformats.org/drawingml/2006/main">
               <a:ext uri="{FF2B5EF4-FFF2-40B4-BE49-F238E27FC236}">
-                <a16:creationId xmlns:a16="http://schemas.microsoft.com/office/drawing/2014/main" id="{2404E397-C6C8-49EC-96CB-6CEA814439BD}"/>
+                <a16:creationId xmlns:a16="http://schemas.microsoft.com/office/drawing/2014/main" id="{CE9BDE21-2D81-4926-85EC-859EE00ECEEE}"/>
               </a:ext>
             </a:extLst>
           </p:cNvPr>
@@ -1576,7 +1576,7 @@
           <p:cNvPr id="16" name="top-cape-gradient-15">
             <a:extLst xmlns:a="http://schemas.openxmlformats.org/drawingml/2006/main">
               <a:ext uri="{FF2B5EF4-FFF2-40B4-BE49-F238E27FC236}">
-                <a16:creationId xmlns:a16="http://schemas.microsoft.com/office/drawing/2014/main" id="{9BCF17BF-FC4B-4791-9FEE-9DC1643CEFA7}"/>
+                <a16:creationId xmlns:a16="http://schemas.microsoft.com/office/drawing/2014/main" id="{E50000CC-1115-40BC-96E1-946A1175E6BF}"/>
               </a:ext>
             </a:extLst>
           </p:cNvPr>
@@ -1609,7 +1609,7 @@
           <p:cNvPr id="17" name="top-cape-gradient-16">
             <a:extLst xmlns:a="http://schemas.openxmlformats.org/drawingml/2006/main">
               <a:ext uri="{FF2B5EF4-FFF2-40B4-BE49-F238E27FC236}">
-                <a16:creationId xmlns:a16="http://schemas.microsoft.com/office/drawing/2014/main" id="{F9EFA670-E94B-43FC-84A3-757AC6DE97F1}"/>
+                <a16:creationId xmlns:a16="http://schemas.microsoft.com/office/drawing/2014/main" id="{4477800E-9B46-4C88-887D-18DBABB5C74E}"/>
               </a:ext>
             </a:extLst>
           </p:cNvPr>
@@ -1642,7 +1642,7 @@
           <p:cNvPr id="18" name="top-cape-gradient-17">
             <a:extLst xmlns:a="http://schemas.openxmlformats.org/drawingml/2006/main">
               <a:ext uri="{FF2B5EF4-FFF2-40B4-BE49-F238E27FC236}">
-                <a16:creationId xmlns:a16="http://schemas.microsoft.com/office/drawing/2014/main" id="{25F91DBB-9741-4C10-B4F5-A428B680BA11}"/>
+                <a16:creationId xmlns:a16="http://schemas.microsoft.com/office/drawing/2014/main" id="{F57BD030-CAF9-4A00-BF2F-8927349CA182}"/>
               </a:ext>
             </a:extLst>
           </p:cNvPr>
@@ -1675,7 +1675,7 @@
           <p:cNvPr id="19" name="top-cape-gradient-18">
             <a:extLst xmlns:a="http://schemas.openxmlformats.org/drawingml/2006/main">
               <a:ext uri="{FF2B5EF4-FFF2-40B4-BE49-F238E27FC236}">
-                <a16:creationId xmlns:a16="http://schemas.microsoft.com/office/drawing/2014/main" id="{4473E7AE-1A87-4C83-8B70-839FCB0EBD55}"/>
+                <a16:creationId xmlns:a16="http://schemas.microsoft.com/office/drawing/2014/main" id="{1C543F37-7EA6-4CBD-990A-DBC17386573E}"/>
               </a:ext>
             </a:extLst>
           </p:cNvPr>
@@ -1708,7 +1708,7 @@
           <p:cNvPr id="20" name="top-cape-gradient-19">
             <a:extLst xmlns:a="http://schemas.openxmlformats.org/drawingml/2006/main">
               <a:ext uri="{FF2B5EF4-FFF2-40B4-BE49-F238E27FC236}">
-                <a16:creationId xmlns:a16="http://schemas.microsoft.com/office/drawing/2014/main" id="{3341A5F8-7DBF-455F-9DFA-36132C0E38C0}"/>
+                <a16:creationId xmlns:a16="http://schemas.microsoft.com/office/drawing/2014/main" id="{29C80A20-DA4E-465E-8F0A-027488506D94}"/>
               </a:ext>
             </a:extLst>
           </p:cNvPr>
@@ -1741,7 +1741,7 @@
           <p:cNvPr id="21" name="top-cape-gradient-20">
             <a:extLst xmlns:a="http://schemas.openxmlformats.org/drawingml/2006/main">
               <a:ext uri="{FF2B5EF4-FFF2-40B4-BE49-F238E27FC236}">
-                <a16:creationId xmlns:a16="http://schemas.microsoft.com/office/drawing/2014/main" id="{8E571786-EB08-46F2-B4AC-812D673358C4}"/>
+                <a16:creationId xmlns:a16="http://schemas.microsoft.com/office/drawing/2014/main" id="{6D0C46C3-1E73-419B-94DA-CD33E1295983}"/>
               </a:ext>
             </a:extLst>
           </p:cNvPr>
@@ -1774,7 +1774,7 @@
           <p:cNvPr id="22" name="top-cape-gradient-21">
             <a:extLst xmlns:a="http://schemas.openxmlformats.org/drawingml/2006/main">
               <a:ext uri="{FF2B5EF4-FFF2-40B4-BE49-F238E27FC236}">
-                <a16:creationId xmlns:a16="http://schemas.microsoft.com/office/drawing/2014/main" id="{7DC905E7-71A7-4EA0-B824-000644062BB6}"/>
+                <a16:creationId xmlns:a16="http://schemas.microsoft.com/office/drawing/2014/main" id="{9649BB14-89F4-4414-A7E5-F9902A50BC34}"/>
               </a:ext>
             </a:extLst>
           </p:cNvPr>
@@ -1807,7 +1807,7 @@
           <p:cNvPr id="23" name="top-cape-gradient-22">
             <a:extLst xmlns:a="http://schemas.openxmlformats.org/drawingml/2006/main">
               <a:ext uri="{FF2B5EF4-FFF2-40B4-BE49-F238E27FC236}">
-                <a16:creationId xmlns:a16="http://schemas.microsoft.com/office/drawing/2014/main" id="{0DD8ABDE-841C-4B81-8330-11FE98736494}"/>
+                <a16:creationId xmlns:a16="http://schemas.microsoft.com/office/drawing/2014/main" id="{2147713C-FE8B-4AC4-9E0B-BD238BD29CA9}"/>
               </a:ext>
             </a:extLst>
           </p:cNvPr>
@@ -1840,7 +1840,7 @@
           <p:cNvPr id="24" name="top-cape-gradient-23">
             <a:extLst xmlns:a="http://schemas.openxmlformats.org/drawingml/2006/main">
               <a:ext uri="{FF2B5EF4-FFF2-40B4-BE49-F238E27FC236}">
-                <a16:creationId xmlns:a16="http://schemas.microsoft.com/office/drawing/2014/main" id="{184816BD-5134-48D0-AB7E-02C0FECE4E99}"/>
+                <a16:creationId xmlns:a16="http://schemas.microsoft.com/office/drawing/2014/main" id="{DAD3AD5A-A27B-4063-87CA-2110B5EDD1EE}"/>
               </a:ext>
             </a:extLst>
           </p:cNvPr>
@@ -1873,7 +1873,7 @@
           <p:cNvPr id="25" name="top-cape-gradient-24">
             <a:extLst xmlns:a="http://schemas.openxmlformats.org/drawingml/2006/main">
               <a:ext uri="{FF2B5EF4-FFF2-40B4-BE49-F238E27FC236}">
-                <a16:creationId xmlns:a16="http://schemas.microsoft.com/office/drawing/2014/main" id="{0F45DCFC-F910-4D24-80E7-6650EE80D665}"/>
+                <a16:creationId xmlns:a16="http://schemas.microsoft.com/office/drawing/2014/main" id="{73705B9F-E802-4A7D-8C1A-8FFADB3899FF}"/>
               </a:ext>
             </a:extLst>
           </p:cNvPr>
@@ -1906,7 +1906,7 @@
           <p:cNvPr id="26" name="top-cape-gradient-25">
             <a:extLst xmlns:a="http://schemas.openxmlformats.org/drawingml/2006/main">
               <a:ext uri="{FF2B5EF4-FFF2-40B4-BE49-F238E27FC236}">
-                <a16:creationId xmlns:a16="http://schemas.microsoft.com/office/drawing/2014/main" id="{87B5B670-9BA2-4269-AA19-6D8C08F1EF0E}"/>
+                <a16:creationId xmlns:a16="http://schemas.microsoft.com/office/drawing/2014/main" id="{212BFC07-EC67-47BC-BC62-C0CCF3E205EE}"/>
               </a:ext>
             </a:extLst>
           </p:cNvPr>
@@ -1939,7 +1939,7 @@
           <p:cNvPr id="27" name="top-cape-gradient-26">
             <a:extLst xmlns:a="http://schemas.openxmlformats.org/drawingml/2006/main">
               <a:ext uri="{FF2B5EF4-FFF2-40B4-BE49-F238E27FC236}">
-                <a16:creationId xmlns:a16="http://schemas.microsoft.com/office/drawing/2014/main" id="{CBC32F7D-3639-4F56-9D7F-F0F15867C884}"/>
+                <a16:creationId xmlns:a16="http://schemas.microsoft.com/office/drawing/2014/main" id="{543F3AC4-450A-4289-AA56-28C3720FF8C4}"/>
               </a:ext>
             </a:extLst>
           </p:cNvPr>
@@ -1972,7 +1972,7 @@
           <p:cNvPr id="28" name="top-cape-gradient-27">
             <a:extLst xmlns:a="http://schemas.openxmlformats.org/drawingml/2006/main">
               <a:ext uri="{FF2B5EF4-FFF2-40B4-BE49-F238E27FC236}">
-                <a16:creationId xmlns:a16="http://schemas.microsoft.com/office/drawing/2014/main" id="{9CB4572C-2421-4DC4-B156-BDABD7991992}"/>
+                <a16:creationId xmlns:a16="http://schemas.microsoft.com/office/drawing/2014/main" id="{CC1A02BC-8A5A-45E8-B31A-C65ED8A9D793}"/>
               </a:ext>
             </a:extLst>
           </p:cNvPr>
@@ -2005,7 +2005,7 @@
           <p:cNvPr id="29" name="top-cape-gradient-28">
             <a:extLst xmlns:a="http://schemas.openxmlformats.org/drawingml/2006/main">
               <a:ext uri="{FF2B5EF4-FFF2-40B4-BE49-F238E27FC236}">
-                <a16:creationId xmlns:a16="http://schemas.microsoft.com/office/drawing/2014/main" id="{2F0D335E-F6C8-41A1-874B-095E68F7220A}"/>
+                <a16:creationId xmlns:a16="http://schemas.microsoft.com/office/drawing/2014/main" id="{606C5938-AB85-43E9-AD14-61B27712B603}"/>
               </a:ext>
             </a:extLst>
           </p:cNvPr>
@@ -2038,7 +2038,7 @@
           <p:cNvPr id="30" name="top-cape-gradient-29">
             <a:extLst xmlns:a="http://schemas.openxmlformats.org/drawingml/2006/main">
               <a:ext uri="{FF2B5EF4-FFF2-40B4-BE49-F238E27FC236}">
-                <a16:creationId xmlns:a16="http://schemas.microsoft.com/office/drawing/2014/main" id="{5B0E19EF-C75A-4BFE-BF6E-D1CBA9FE4171}"/>
+                <a16:creationId xmlns:a16="http://schemas.microsoft.com/office/drawing/2014/main" id="{15FF3EA5-A4D6-41AE-8BC7-57A9A573B6C6}"/>
               </a:ext>
             </a:extLst>
           </p:cNvPr>
@@ -2071,7 +2071,7 @@
           <p:cNvPr id="31" name="top-cape-gradient-30">
             <a:extLst xmlns:a="http://schemas.openxmlformats.org/drawingml/2006/main">
               <a:ext uri="{FF2B5EF4-FFF2-40B4-BE49-F238E27FC236}">
-                <a16:creationId xmlns:a16="http://schemas.microsoft.com/office/drawing/2014/main" id="{C4746EF6-4959-4919-9DC0-228A4C8236CB}"/>
+                <a16:creationId xmlns:a16="http://schemas.microsoft.com/office/drawing/2014/main" id="{5AA52F48-B994-4DE1-8230-330105FEDD28}"/>
               </a:ext>
             </a:extLst>
           </p:cNvPr>
@@ -2104,7 +2104,7 @@
           <p:cNvPr id="32" name="top-cape-gradient-31">
             <a:extLst xmlns:a="http://schemas.openxmlformats.org/drawingml/2006/main">
               <a:ext uri="{FF2B5EF4-FFF2-40B4-BE49-F238E27FC236}">
-                <a16:creationId xmlns:a16="http://schemas.microsoft.com/office/drawing/2014/main" id="{1682BAE2-B645-42CB-AB59-FBCE191AC40D}"/>
+                <a16:creationId xmlns:a16="http://schemas.microsoft.com/office/drawing/2014/main" id="{81B01FE1-F7F4-4240-BFD8-BC814CC1F568}"/>
               </a:ext>
             </a:extLst>
           </p:cNvPr>
@@ -2137,7 +2137,7 @@
           <p:cNvPr id="33" name="top-cape-gradient-32">
             <a:extLst xmlns:a="http://schemas.openxmlformats.org/drawingml/2006/main">
               <a:ext uri="{FF2B5EF4-FFF2-40B4-BE49-F238E27FC236}">
-                <a16:creationId xmlns:a16="http://schemas.microsoft.com/office/drawing/2014/main" id="{817CA08F-3886-4009-9385-FDA34D168A01}"/>
+                <a16:creationId xmlns:a16="http://schemas.microsoft.com/office/drawing/2014/main" id="{0DDFD2E3-2C3D-45A5-A433-6198FB13D606}"/>
               </a:ext>
             </a:extLst>
           </p:cNvPr>
@@ -2170,7 +2170,7 @@
           <p:cNvPr id="34" name="header-cape-gradient-1">
             <a:extLst xmlns:a="http://schemas.openxmlformats.org/drawingml/2006/main">
               <a:ext uri="{FF2B5EF4-FFF2-40B4-BE49-F238E27FC236}">
-                <a16:creationId xmlns:a16="http://schemas.microsoft.com/office/drawing/2014/main" id="{040CD65F-CD06-4F85-B8EE-A602BBC00EEF}"/>
+                <a16:creationId xmlns:a16="http://schemas.microsoft.com/office/drawing/2014/main" id="{67027A93-A579-4E56-B9D4-9F30668FA599}"/>
               </a:ext>
             </a:extLst>
           </p:cNvPr>
@@ -2203,7 +2203,7 @@
           <p:cNvPr id="35" name="header-cape-gradient-2">
             <a:extLst xmlns:a="http://schemas.openxmlformats.org/drawingml/2006/main">
               <a:ext uri="{FF2B5EF4-FFF2-40B4-BE49-F238E27FC236}">
-                <a16:creationId xmlns:a16="http://schemas.microsoft.com/office/drawing/2014/main" id="{053EE2DC-6425-4DD1-9D49-9C3A10776B7F}"/>
+                <a16:creationId xmlns:a16="http://schemas.microsoft.com/office/drawing/2014/main" id="{D44F5BD0-A5A3-468A-BF48-16CF93B918D4}"/>
               </a:ext>
             </a:extLst>
           </p:cNvPr>
@@ -2236,7 +2236,7 @@
           <p:cNvPr id="36" name="header-cape-gradient-3">
             <a:extLst xmlns:a="http://schemas.openxmlformats.org/drawingml/2006/main">
               <a:ext uri="{FF2B5EF4-FFF2-40B4-BE49-F238E27FC236}">
-                <a16:creationId xmlns:a16="http://schemas.microsoft.com/office/drawing/2014/main" id="{049223F8-9B8B-4C71-A3A1-7E21681DB5DB}"/>
+                <a16:creationId xmlns:a16="http://schemas.microsoft.com/office/drawing/2014/main" id="{EBC2194C-E6C7-4681-84A8-ADD606732313}"/>
               </a:ext>
             </a:extLst>
           </p:cNvPr>
@@ -2269,7 +2269,7 @@
           <p:cNvPr id="37" name="header-cape-gradient-4">
             <a:extLst xmlns:a="http://schemas.openxmlformats.org/drawingml/2006/main">
               <a:ext uri="{FF2B5EF4-FFF2-40B4-BE49-F238E27FC236}">
-                <a16:creationId xmlns:a16="http://schemas.microsoft.com/office/drawing/2014/main" id="{B3D441E0-F565-43DF-B200-D958E9526677}"/>
+                <a16:creationId xmlns:a16="http://schemas.microsoft.com/office/drawing/2014/main" id="{8E24E757-FD4F-4E64-9CE6-52E7A490BA86}"/>
               </a:ext>
             </a:extLst>
           </p:cNvPr>
@@ -2302,7 +2302,7 @@
           <p:cNvPr id="38" name="header-cape-gradient-5">
             <a:extLst xmlns:a="http://schemas.openxmlformats.org/drawingml/2006/main">
               <a:ext uri="{FF2B5EF4-FFF2-40B4-BE49-F238E27FC236}">
-                <a16:creationId xmlns:a16="http://schemas.microsoft.com/office/drawing/2014/main" id="{AA7AA9D0-CF76-42B6-9A9B-1F5856FF58ED}"/>
+                <a16:creationId xmlns:a16="http://schemas.microsoft.com/office/drawing/2014/main" id="{A785195D-C0A5-4FB2-9CEF-0EAD1874A437}"/>
               </a:ext>
             </a:extLst>
           </p:cNvPr>
@@ -2335,7 +2335,7 @@
           <p:cNvPr id="39" name="header-cape-gradient-6">
             <a:extLst xmlns:a="http://schemas.openxmlformats.org/drawingml/2006/main">
               <a:ext uri="{FF2B5EF4-FFF2-40B4-BE49-F238E27FC236}">
-                <a16:creationId xmlns:a16="http://schemas.microsoft.com/office/drawing/2014/main" id="{51A37B43-8C3A-4E08-9FE4-94A90673D52F}"/>
+                <a16:creationId xmlns:a16="http://schemas.microsoft.com/office/drawing/2014/main" id="{59259C72-4A08-4203-AB5F-BB718C28BE54}"/>
               </a:ext>
             </a:extLst>
           </p:cNvPr>
@@ -2368,7 +2368,7 @@
           <p:cNvPr id="40" name="header-cape-gradient-7">
             <a:extLst xmlns:a="http://schemas.openxmlformats.org/drawingml/2006/main">
               <a:ext uri="{FF2B5EF4-FFF2-40B4-BE49-F238E27FC236}">
-                <a16:creationId xmlns:a16="http://schemas.microsoft.com/office/drawing/2014/main" id="{4844092B-1039-4DC1-8C27-A4A5074941BC}"/>
+                <a16:creationId xmlns:a16="http://schemas.microsoft.com/office/drawing/2014/main" id="{8080B51A-51ED-4796-82BE-A90A1179BA28}"/>
               </a:ext>
             </a:extLst>
           </p:cNvPr>
@@ -2401,7 +2401,7 @@
           <p:cNvPr id="41" name="header-cape-gradient-8">
             <a:extLst xmlns:a="http://schemas.openxmlformats.org/drawingml/2006/main">
               <a:ext uri="{FF2B5EF4-FFF2-40B4-BE49-F238E27FC236}">
-                <a16:creationId xmlns:a16="http://schemas.microsoft.com/office/drawing/2014/main" id="{6DBC9A14-0E53-4782-A081-1A0FEE591C4A}"/>
+                <a16:creationId xmlns:a16="http://schemas.microsoft.com/office/drawing/2014/main" id="{AE525D22-6A7F-4B65-91BD-30F63E60DE2B}"/>
               </a:ext>
             </a:extLst>
           </p:cNvPr>
@@ -2434,7 +2434,7 @@
           <p:cNvPr id="42" name="header-cape-gradient-9">
             <a:extLst xmlns:a="http://schemas.openxmlformats.org/drawingml/2006/main">
               <a:ext uri="{FF2B5EF4-FFF2-40B4-BE49-F238E27FC236}">
-                <a16:creationId xmlns:a16="http://schemas.microsoft.com/office/drawing/2014/main" id="{93FEED8F-9EEF-4A6D-9956-365C8D70245A}"/>
+                <a16:creationId xmlns:a16="http://schemas.microsoft.com/office/drawing/2014/main" id="{E6B483FA-2630-4CAC-882B-5F0AFA30D9F8}"/>
               </a:ext>
             </a:extLst>
           </p:cNvPr>
@@ -2467,7 +2467,7 @@
           <p:cNvPr id="43" name="header-cape-gradient-10">
             <a:extLst xmlns:a="http://schemas.openxmlformats.org/drawingml/2006/main">
               <a:ext uri="{FF2B5EF4-FFF2-40B4-BE49-F238E27FC236}">
-                <a16:creationId xmlns:a16="http://schemas.microsoft.com/office/drawing/2014/main" id="{728CBFB9-2C7B-4D15-BE30-E0597DFFD4F4}"/>
+                <a16:creationId xmlns:a16="http://schemas.microsoft.com/office/drawing/2014/main" id="{2D00F06B-84A6-4397-A21F-DA8D65695349}"/>
               </a:ext>
             </a:extLst>
           </p:cNvPr>
@@ -2500,7 +2500,7 @@
           <p:cNvPr id="44" name="header-cape-gradient-11">
             <a:extLst xmlns:a="http://schemas.openxmlformats.org/drawingml/2006/main">
               <a:ext uri="{FF2B5EF4-FFF2-40B4-BE49-F238E27FC236}">
-                <a16:creationId xmlns:a16="http://schemas.microsoft.com/office/drawing/2014/main" id="{0536930E-37AD-42D3-8B3B-0CBAD8920403}"/>
+                <a16:creationId xmlns:a16="http://schemas.microsoft.com/office/drawing/2014/main" id="{B7277CA5-A15A-4F23-A3BF-F0959DD0A135}"/>
               </a:ext>
             </a:extLst>
           </p:cNvPr>
@@ -2533,7 +2533,7 @@
           <p:cNvPr id="45" name="header-cape-gradient-12">
             <a:extLst xmlns:a="http://schemas.openxmlformats.org/drawingml/2006/main">
               <a:ext uri="{FF2B5EF4-FFF2-40B4-BE49-F238E27FC236}">
-                <a16:creationId xmlns:a16="http://schemas.microsoft.com/office/drawing/2014/main" id="{49663E39-A4C8-49E3-8623-F1E08295EEF9}"/>
+                <a16:creationId xmlns:a16="http://schemas.microsoft.com/office/drawing/2014/main" id="{933C32AD-BC75-49EA-9B5F-6A46649DCF72}"/>
               </a:ext>
             </a:extLst>
           </p:cNvPr>
@@ -2566,7 +2566,7 @@
           <p:cNvPr id="46" name="header-cape-gradient-13">
             <a:extLst xmlns:a="http://schemas.openxmlformats.org/drawingml/2006/main">
               <a:ext uri="{FF2B5EF4-FFF2-40B4-BE49-F238E27FC236}">
-                <a16:creationId xmlns:a16="http://schemas.microsoft.com/office/drawing/2014/main" id="{1BE011DD-CEDD-46FB-ADD7-7BCB69543C84}"/>
+                <a16:creationId xmlns:a16="http://schemas.microsoft.com/office/drawing/2014/main" id="{20764E04-43B4-405D-A114-3246185BADCC}"/>
               </a:ext>
             </a:extLst>
           </p:cNvPr>
@@ -2599,7 +2599,7 @@
           <p:cNvPr id="47" name="header-cape-gradient-14">
             <a:extLst xmlns:a="http://schemas.openxmlformats.org/drawingml/2006/main">
               <a:ext uri="{FF2B5EF4-FFF2-40B4-BE49-F238E27FC236}">
-                <a16:creationId xmlns:a16="http://schemas.microsoft.com/office/drawing/2014/main" id="{CC5E326E-6109-4D9F-B080-51E6C5C5AF90}"/>
+                <a16:creationId xmlns:a16="http://schemas.microsoft.com/office/drawing/2014/main" id="{B44E7C9C-DCF9-4665-8DAC-2C51530F21A1}"/>
               </a:ext>
             </a:extLst>
           </p:cNvPr>
@@ -2632,7 +2632,7 @@
           <p:cNvPr id="48" name="header-cape-gradient-15">
             <a:extLst xmlns:a="http://schemas.openxmlformats.org/drawingml/2006/main">
               <a:ext uri="{FF2B5EF4-FFF2-40B4-BE49-F238E27FC236}">
-                <a16:creationId xmlns:a16="http://schemas.microsoft.com/office/drawing/2014/main" id="{5550CFD7-D717-41D5-88EA-7DDBDFD33A4D}"/>
+                <a16:creationId xmlns:a16="http://schemas.microsoft.com/office/drawing/2014/main" id="{63DEAA51-8482-41E9-80A2-E87AB8B13A46}"/>
               </a:ext>
             </a:extLst>
           </p:cNvPr>
@@ -2665,7 +2665,7 @@
           <p:cNvPr id="49" name="header-cape-gradient-16">
             <a:extLst xmlns:a="http://schemas.openxmlformats.org/drawingml/2006/main">
               <a:ext uri="{FF2B5EF4-FFF2-40B4-BE49-F238E27FC236}">
-                <a16:creationId xmlns:a16="http://schemas.microsoft.com/office/drawing/2014/main" id="{FCE35718-514C-4A2A-B15C-00866C44C209}"/>
+                <a16:creationId xmlns:a16="http://schemas.microsoft.com/office/drawing/2014/main" id="{64BB8011-02BE-4C3F-9086-017E07D78F82}"/>
               </a:ext>
             </a:extLst>
           </p:cNvPr>
@@ -2698,7 +2698,7 @@
           <p:cNvPr id="50" name="header-cape-gradient-17">
             <a:extLst xmlns:a="http://schemas.openxmlformats.org/drawingml/2006/main">
               <a:ext uri="{FF2B5EF4-FFF2-40B4-BE49-F238E27FC236}">
-                <a16:creationId xmlns:a16="http://schemas.microsoft.com/office/drawing/2014/main" id="{EC8A09ED-5A54-4A75-B53C-A123B122B55F}"/>
+                <a16:creationId xmlns:a16="http://schemas.microsoft.com/office/drawing/2014/main" id="{E6426281-C186-4F29-AC86-EA3B1DA1EA2C}"/>
               </a:ext>
             </a:extLst>
           </p:cNvPr>
@@ -2731,7 +2731,7 @@
           <p:cNvPr id="51" name="header-cape-gradient-18">
             <a:extLst xmlns:a="http://schemas.openxmlformats.org/drawingml/2006/main">
               <a:ext uri="{FF2B5EF4-FFF2-40B4-BE49-F238E27FC236}">
-                <a16:creationId xmlns:a16="http://schemas.microsoft.com/office/drawing/2014/main" id="{CA8ECF48-1CFE-43E5-A93E-00DBF5F1B153}"/>
+                <a16:creationId xmlns:a16="http://schemas.microsoft.com/office/drawing/2014/main" id="{F77A9700-4D23-4482-A964-950444DE78D4}"/>
               </a:ext>
             </a:extLst>
           </p:cNvPr>
@@ -2764,7 +2764,7 @@
           <p:cNvPr id="52" name="header-cape-gradient-19">
             <a:extLst xmlns:a="http://schemas.openxmlformats.org/drawingml/2006/main">
               <a:ext uri="{FF2B5EF4-FFF2-40B4-BE49-F238E27FC236}">
-                <a16:creationId xmlns:a16="http://schemas.microsoft.com/office/drawing/2014/main" id="{3245D9AC-609C-4B6B-94C1-645B9C617B68}"/>
+                <a16:creationId xmlns:a16="http://schemas.microsoft.com/office/drawing/2014/main" id="{B34A9ED6-59D0-4B1E-AF43-F45287A69A50}"/>
               </a:ext>
             </a:extLst>
           </p:cNvPr>
@@ -2797,7 +2797,7 @@
           <p:cNvPr id="53" name="header-cape-gradient-20">
             <a:extLst xmlns:a="http://schemas.openxmlformats.org/drawingml/2006/main">
               <a:ext uri="{FF2B5EF4-FFF2-40B4-BE49-F238E27FC236}">
-                <a16:creationId xmlns:a16="http://schemas.microsoft.com/office/drawing/2014/main" id="{0488E61C-C65F-43D4-98C8-AFFEC7F4D7C1}"/>
+                <a16:creationId xmlns:a16="http://schemas.microsoft.com/office/drawing/2014/main" id="{D654066E-4E3B-49BC-B169-0E7AB1AAF9FE}"/>
               </a:ext>
             </a:extLst>
           </p:cNvPr>
@@ -2830,7 +2830,7 @@
           <p:cNvPr id="54" name="header-cape-gradient-21">
             <a:extLst xmlns:a="http://schemas.openxmlformats.org/drawingml/2006/main">
               <a:ext uri="{FF2B5EF4-FFF2-40B4-BE49-F238E27FC236}">
-                <a16:creationId xmlns:a16="http://schemas.microsoft.com/office/drawing/2014/main" id="{0BE6C038-C42F-4B61-8E69-3FC67D627C0D}"/>
+                <a16:creationId xmlns:a16="http://schemas.microsoft.com/office/drawing/2014/main" id="{52AFDF20-9579-4327-9DF4-CDDA39530D32}"/>
               </a:ext>
             </a:extLst>
           </p:cNvPr>
@@ -2863,7 +2863,7 @@
           <p:cNvPr id="55" name="header-cape-gradient-22">
             <a:extLst xmlns:a="http://schemas.openxmlformats.org/drawingml/2006/main">
               <a:ext uri="{FF2B5EF4-FFF2-40B4-BE49-F238E27FC236}">
-                <a16:creationId xmlns:a16="http://schemas.microsoft.com/office/drawing/2014/main" id="{ED9E609B-BCDC-48C3-B568-2F4097B8CF08}"/>
+                <a16:creationId xmlns:a16="http://schemas.microsoft.com/office/drawing/2014/main" id="{406BCA56-5153-4321-8C77-3C573332B869}"/>
               </a:ext>
             </a:extLst>
           </p:cNvPr>
@@ -2896,7 +2896,7 @@
           <p:cNvPr id="56" name="header-cape-gradient-23">
             <a:extLst xmlns:a="http://schemas.openxmlformats.org/drawingml/2006/main">
               <a:ext uri="{FF2B5EF4-FFF2-40B4-BE49-F238E27FC236}">
-                <a16:creationId xmlns:a16="http://schemas.microsoft.com/office/drawing/2014/main" id="{07DA332B-C330-496F-A055-98E025B6CFD7}"/>
+                <a16:creationId xmlns:a16="http://schemas.microsoft.com/office/drawing/2014/main" id="{6A186343-D960-4E93-827F-7B9B25771D43}"/>
               </a:ext>
             </a:extLst>
           </p:cNvPr>
@@ -2929,7 +2929,7 @@
           <p:cNvPr id="57" name="header-cape-gradient-24">
             <a:extLst xmlns:a="http://schemas.openxmlformats.org/drawingml/2006/main">
               <a:ext uri="{FF2B5EF4-FFF2-40B4-BE49-F238E27FC236}">
-                <a16:creationId xmlns:a16="http://schemas.microsoft.com/office/drawing/2014/main" id="{D0B9CF39-B677-4480-9625-60EFBBEFD832}"/>
+                <a16:creationId xmlns:a16="http://schemas.microsoft.com/office/drawing/2014/main" id="{517B60F4-E9BB-4072-B1CB-788FEA4BB23D}"/>
               </a:ext>
             </a:extLst>
           </p:cNvPr>
@@ -2962,7 +2962,7 @@
           <p:cNvPr id="58" name="header-cape-gradient-25">
             <a:extLst xmlns:a="http://schemas.openxmlformats.org/drawingml/2006/main">
               <a:ext uri="{FF2B5EF4-FFF2-40B4-BE49-F238E27FC236}">
-                <a16:creationId xmlns:a16="http://schemas.microsoft.com/office/drawing/2014/main" id="{1657F820-7D2D-4900-9888-3DEECBAB23DD}"/>
+                <a16:creationId xmlns:a16="http://schemas.microsoft.com/office/drawing/2014/main" id="{33C81CAC-3AEF-41B7-B234-0AEDE255B933}"/>
               </a:ext>
             </a:extLst>
           </p:cNvPr>
@@ -2995,7 +2995,7 @@
           <p:cNvPr id="59" name="header-cape-gradient-26">
             <a:extLst xmlns:a="http://schemas.openxmlformats.org/drawingml/2006/main">
               <a:ext uri="{FF2B5EF4-FFF2-40B4-BE49-F238E27FC236}">
-                <a16:creationId xmlns:a16="http://schemas.microsoft.com/office/drawing/2014/main" id="{AF493B8E-6551-4F0C-AA7A-378AF29917F4}"/>
+                <a16:creationId xmlns:a16="http://schemas.microsoft.com/office/drawing/2014/main" id="{6628E5CB-1948-4892-972E-EB102D922730}"/>
               </a:ext>
             </a:extLst>
           </p:cNvPr>
@@ -3028,7 +3028,7 @@
           <p:cNvPr id="60" name="header-cape-gradient-27">
             <a:extLst xmlns:a="http://schemas.openxmlformats.org/drawingml/2006/main">
               <a:ext uri="{FF2B5EF4-FFF2-40B4-BE49-F238E27FC236}">
-                <a16:creationId xmlns:a16="http://schemas.microsoft.com/office/drawing/2014/main" id="{3671330E-EC9C-4896-8E80-4AB007889EE0}"/>
+                <a16:creationId xmlns:a16="http://schemas.microsoft.com/office/drawing/2014/main" id="{383A2517-1A40-4E4C-A479-C343E207C020}"/>
               </a:ext>
             </a:extLst>
           </p:cNvPr>
@@ -3061,7 +3061,7 @@
           <p:cNvPr id="61" name="header-cape-gradient-28">
             <a:extLst xmlns:a="http://schemas.openxmlformats.org/drawingml/2006/main">
               <a:ext uri="{FF2B5EF4-FFF2-40B4-BE49-F238E27FC236}">
-                <a16:creationId xmlns:a16="http://schemas.microsoft.com/office/drawing/2014/main" id="{CF3267F0-7F0F-4A5D-ADB5-8B4172ABAAA3}"/>
+                <a16:creationId xmlns:a16="http://schemas.microsoft.com/office/drawing/2014/main" id="{BEF81AF2-97C5-4CAF-8DC0-B68EC2CDB754}"/>
               </a:ext>
             </a:extLst>
           </p:cNvPr>
@@ -3094,7 +3094,7 @@
           <p:cNvPr id="62" name="header-cape-gradient-29">
             <a:extLst xmlns:a="http://schemas.openxmlformats.org/drawingml/2006/main">
               <a:ext uri="{FF2B5EF4-FFF2-40B4-BE49-F238E27FC236}">
-                <a16:creationId xmlns:a16="http://schemas.microsoft.com/office/drawing/2014/main" id="{93DF4A34-F075-4C48-85F0-6245836E886B}"/>
+                <a16:creationId xmlns:a16="http://schemas.microsoft.com/office/drawing/2014/main" id="{A5A1E170-ED39-4AED-8EFA-C3EBD9A81207}"/>
               </a:ext>
             </a:extLst>
           </p:cNvPr>
@@ -3127,7 +3127,7 @@
           <p:cNvPr id="63" name="header-cape-gradient-30">
             <a:extLst xmlns:a="http://schemas.openxmlformats.org/drawingml/2006/main">
               <a:ext uri="{FF2B5EF4-FFF2-40B4-BE49-F238E27FC236}">
-                <a16:creationId xmlns:a16="http://schemas.microsoft.com/office/drawing/2014/main" id="{47D3176F-E018-422A-B58B-1DC68799B9BB}"/>
+                <a16:creationId xmlns:a16="http://schemas.microsoft.com/office/drawing/2014/main" id="{4B450EA3-3AF7-44FA-9141-15126C77C8E1}"/>
               </a:ext>
             </a:extLst>
           </p:cNvPr>
@@ -3160,7 +3160,7 @@
           <p:cNvPr id="64" name="header-cape-gradient-31">
             <a:extLst xmlns:a="http://schemas.openxmlformats.org/drawingml/2006/main">
               <a:ext uri="{FF2B5EF4-FFF2-40B4-BE49-F238E27FC236}">
-                <a16:creationId xmlns:a16="http://schemas.microsoft.com/office/drawing/2014/main" id="{8BE86224-526E-4045-81CE-19962E68E745}"/>
+                <a16:creationId xmlns:a16="http://schemas.microsoft.com/office/drawing/2014/main" id="{17133940-8BFF-4343-87BC-7793340899DD}"/>
               </a:ext>
             </a:extLst>
           </p:cNvPr>
@@ -3193,7 +3193,7 @@
           <p:cNvPr id="65" name="header-cape-gradient-32">
             <a:extLst xmlns:a="http://schemas.openxmlformats.org/drawingml/2006/main">
               <a:ext uri="{FF2B5EF4-FFF2-40B4-BE49-F238E27FC236}">
-                <a16:creationId xmlns:a16="http://schemas.microsoft.com/office/drawing/2014/main" id="{95E2D35A-1943-4E41-B7A8-2BA43ADD705C}"/>
+                <a16:creationId xmlns:a16="http://schemas.microsoft.com/office/drawing/2014/main" id="{AB8A5C2C-5502-4E03-B216-B596156A675A}"/>
               </a:ext>
             </a:extLst>
           </p:cNvPr>
@@ -3226,7 +3226,7 @@
           <p:cNvPr id="66" name="poster-title">
             <a:extLst xmlns:a="http://schemas.openxmlformats.org/drawingml/2006/main">
               <a:ext uri="{FF2B5EF4-FFF2-40B4-BE49-F238E27FC236}">
-                <a16:creationId xmlns:a16="http://schemas.microsoft.com/office/drawing/2014/main" id="{A8EDF088-BD66-4FF0-A593-D40C64774097}"/>
+                <a16:creationId xmlns:a16="http://schemas.microsoft.com/office/drawing/2014/main" id="{1CD30854-4651-4951-B48E-B73F9188F1BD}"/>
               </a:ext>
             </a:extLst>
           </p:cNvPr>
@@ -3293,7 +3293,7 @@
           <p:cNvPr id="67" name="authors">
             <a:extLst xmlns:a="http://schemas.openxmlformats.org/drawingml/2006/main">
               <a:ext uri="{FF2B5EF4-FFF2-40B4-BE49-F238E27FC236}">
-                <a16:creationId xmlns:a16="http://schemas.microsoft.com/office/drawing/2014/main" id="{39CF8C86-4CCB-4A3F-A8C8-A94B2B10C89C}"/>
+                <a16:creationId xmlns:a16="http://schemas.microsoft.com/office/drawing/2014/main" id="{B94ABEB0-56A2-4983-BAFA-57B001C39BAB}"/>
               </a:ext>
             </a:extLst>
           </p:cNvPr>
@@ -3343,7 +3343,7 @@
           <p:cNvPr id="68" name="affiliations">
             <a:extLst xmlns:a="http://schemas.openxmlformats.org/drawingml/2006/main">
               <a:ext uri="{FF2B5EF4-FFF2-40B4-BE49-F238E27FC236}">
-                <a16:creationId xmlns:a16="http://schemas.microsoft.com/office/drawing/2014/main" id="{3631AAE4-3482-4142-A067-FB227BF5E00D}"/>
+                <a16:creationId xmlns:a16="http://schemas.microsoft.com/office/drawing/2014/main" id="{CFC99298-BAD2-4EF4-9765-78AE7F254375}"/>
               </a:ext>
             </a:extLst>
           </p:cNvPr>
@@ -3393,7 +3393,7 @@
           <p:cNvPr id="69" name="citation">
             <a:extLst xmlns:a="http://schemas.openxmlformats.org/drawingml/2006/main">
               <a:ext uri="{FF2B5EF4-FFF2-40B4-BE49-F238E27FC236}">
-                <a16:creationId xmlns:a16="http://schemas.microsoft.com/office/drawing/2014/main" id="{375CB9A3-F654-4250-BA75-32CA46AE32BD}"/>
+                <a16:creationId xmlns:a16="http://schemas.microsoft.com/office/drawing/2014/main" id="{16AC562E-50EB-4BDE-A919-5C0DB5A3BDB1}"/>
               </a:ext>
             </a:extLst>
           </p:cNvPr>
@@ -3443,7 +3443,7 @@
           <p:cNvPr id="70" name="logo-slot-fictional-lab-logo">
             <a:extLst xmlns:a="http://schemas.openxmlformats.org/drawingml/2006/main">
               <a:ext uri="{FF2B5EF4-FFF2-40B4-BE49-F238E27FC236}">
-                <a16:creationId xmlns:a16="http://schemas.microsoft.com/office/drawing/2014/main" id="{1071F83C-A7C3-4B0F-BBDD-E3ABB9B1AD57}"/>
+                <a16:creationId xmlns:a16="http://schemas.microsoft.com/office/drawing/2014/main" id="{6716C152-3695-4702-8C63-CAA65467C68B}"/>
               </a:ext>
             </a:extLst>
           </p:cNvPr>
@@ -3478,7 +3478,7 @@
           <p:cNvPr id="71" name="logo-placeholder-fictional-lab-logo">
             <a:extLst xmlns:a="http://schemas.openxmlformats.org/drawingml/2006/main">
               <a:ext uri="{FF2B5EF4-FFF2-40B4-BE49-F238E27FC236}">
-                <a16:creationId xmlns:a16="http://schemas.microsoft.com/office/drawing/2014/main" id="{5F1E21C0-31D8-414A-A3B4-0D15D20670C7}"/>
+                <a16:creationId xmlns:a16="http://schemas.microsoft.com/office/drawing/2014/main" id="{E533AAE4-2F2C-488F-AAD2-3333673EF128}"/>
               </a:ext>
             </a:extLst>
           </p:cNvPr>
@@ -3528,7 +3528,7 @@
           <p:cNvPr id="72" name="header-summary">
             <a:extLst xmlns:a="http://schemas.openxmlformats.org/drawingml/2006/main">
               <a:ext uri="{FF2B5EF4-FFF2-40B4-BE49-F238E27FC236}">
-                <a16:creationId xmlns:a16="http://schemas.microsoft.com/office/drawing/2014/main" id="{41B1441D-14CA-4B2C-8231-E05FEAA350D2}"/>
+                <a16:creationId xmlns:a16="http://schemas.microsoft.com/office/drawing/2014/main" id="{9A2C4752-3D9C-418F-9731-5B82F20060E9}"/>
               </a:ext>
             </a:extLst>
           </p:cNvPr>
@@ -3561,7 +3561,7 @@
           <p:cNvPr id="73" name="header-metric-1-value">
             <a:extLst xmlns:a="http://schemas.openxmlformats.org/drawingml/2006/main">
               <a:ext uri="{FF2B5EF4-FFF2-40B4-BE49-F238E27FC236}">
-                <a16:creationId xmlns:a16="http://schemas.microsoft.com/office/drawing/2014/main" id="{8861E331-BA6E-42B0-9159-C3EDEE03E921}"/>
+                <a16:creationId xmlns:a16="http://schemas.microsoft.com/office/drawing/2014/main" id="{6CC19E47-D07D-43B7-96C9-E8C4E6397CCE}"/>
               </a:ext>
             </a:extLst>
           </p:cNvPr>
@@ -3611,18 +3611,18 @@
           <p:cNvPr id="74" name="header-metric-1-label">
             <a:extLst xmlns:a="http://schemas.openxmlformats.org/drawingml/2006/main">
               <a:ext uri="{FF2B5EF4-FFF2-40B4-BE49-F238E27FC236}">
-                <a16:creationId xmlns:a16="http://schemas.microsoft.com/office/drawing/2014/main" id="{0EDEA20D-C0D1-4116-9344-4901A0B7F347}"/>
-              </a:ext>
-            </a:extLst>
-          </p:cNvPr>
-          <p:cNvSpPr>
-            <a:spLocks xmlns:a="http://schemas.openxmlformats.org/drawingml/2006/main" noGrp="1"/>
-          </p:cNvSpPr>
-          <p:nvPr/>
-        </p:nvSpPr>
-        <p:spPr>
-          <a:xfrm xmlns:a="http://schemas.openxmlformats.org/drawingml/2006/main">
-            <a:off x="33597180" y="3334295"/>
+                <a16:creationId xmlns:a16="http://schemas.microsoft.com/office/drawing/2014/main" id="{2D939071-C0DC-47D0-93C9-D5839D57E276}"/>
+              </a:ext>
+            </a:extLst>
+          </p:cNvPr>
+          <p:cNvSpPr>
+            <a:spLocks xmlns:a="http://schemas.openxmlformats.org/drawingml/2006/main" noGrp="1"/>
+          </p:cNvSpPr>
+          <p:nvPr/>
+        </p:nvSpPr>
+        <p:spPr>
+          <a:xfrm xmlns:a="http://schemas.openxmlformats.org/drawingml/2006/main">
+            <a:off x="33597180" y="3292875"/>
             <a:ext cx="2539322" cy="911236"/>
           </a:xfrm>
           <a:prstGeom xmlns:a="http://schemas.openxmlformats.org/drawingml/2006/main" prst="rect">
@@ -3661,7 +3661,7 @@
           <p:cNvPr id="75" name="header-metric-2-value">
             <a:extLst xmlns:a="http://schemas.openxmlformats.org/drawingml/2006/main">
               <a:ext uri="{FF2B5EF4-FFF2-40B4-BE49-F238E27FC236}">
-                <a16:creationId xmlns:a16="http://schemas.microsoft.com/office/drawing/2014/main" id="{A3068D96-1139-49ED-AE81-875F9128EACE}"/>
+                <a16:creationId xmlns:a16="http://schemas.microsoft.com/office/drawing/2014/main" id="{9876319E-681F-4C42-BEB3-85219D49B665}"/>
               </a:ext>
             </a:extLst>
           </p:cNvPr>
@@ -3711,18 +3711,18 @@
           <p:cNvPr id="76" name="header-metric-2-label">
             <a:extLst xmlns:a="http://schemas.openxmlformats.org/drawingml/2006/main">
               <a:ext uri="{FF2B5EF4-FFF2-40B4-BE49-F238E27FC236}">
-                <a16:creationId xmlns:a16="http://schemas.microsoft.com/office/drawing/2014/main" id="{46F98610-89EF-4543-BDE7-F665DCBA254C}"/>
-              </a:ext>
-            </a:extLst>
-          </p:cNvPr>
-          <p:cNvSpPr>
-            <a:spLocks xmlns:a="http://schemas.openxmlformats.org/drawingml/2006/main" noGrp="1"/>
-          </p:cNvSpPr>
-          <p:nvPr/>
-        </p:nvSpPr>
-        <p:spPr>
-          <a:xfrm xmlns:a="http://schemas.openxmlformats.org/drawingml/2006/main">
-            <a:off x="36527167" y="3334295"/>
+                <a16:creationId xmlns:a16="http://schemas.microsoft.com/office/drawing/2014/main" id="{91E02C6B-E456-450E-A289-2AF7BE02D61C}"/>
+              </a:ext>
+            </a:extLst>
+          </p:cNvPr>
+          <p:cNvSpPr>
+            <a:spLocks xmlns:a="http://schemas.openxmlformats.org/drawingml/2006/main" noGrp="1"/>
+          </p:cNvSpPr>
+          <p:nvPr/>
+        </p:nvSpPr>
+        <p:spPr>
+          <a:xfrm xmlns:a="http://schemas.openxmlformats.org/drawingml/2006/main">
+            <a:off x="36527167" y="3292875"/>
             <a:ext cx="2539322" cy="911236"/>
           </a:xfrm>
           <a:prstGeom xmlns:a="http://schemas.openxmlformats.org/drawingml/2006/main" prst="rect">
@@ -3761,7 +3761,7 @@
           <p:cNvPr id="77" name="header-metric-3-value">
             <a:extLst xmlns:a="http://schemas.openxmlformats.org/drawingml/2006/main">
               <a:ext uri="{FF2B5EF4-FFF2-40B4-BE49-F238E27FC236}">
-                <a16:creationId xmlns:a16="http://schemas.microsoft.com/office/drawing/2014/main" id="{49E04449-AD2C-4369-8AAE-0019384A41D4}"/>
+                <a16:creationId xmlns:a16="http://schemas.microsoft.com/office/drawing/2014/main" id="{088ECDCA-0038-4F90-AB3B-A68945B7FD7C}"/>
               </a:ext>
             </a:extLst>
           </p:cNvPr>
@@ -3811,18 +3811,18 @@
           <p:cNvPr id="78" name="header-metric-3-label">
             <a:extLst xmlns:a="http://schemas.openxmlformats.org/drawingml/2006/main">
               <a:ext uri="{FF2B5EF4-FFF2-40B4-BE49-F238E27FC236}">
-                <a16:creationId xmlns:a16="http://schemas.microsoft.com/office/drawing/2014/main" id="{FBACC97D-1562-4D58-ADD0-39E2F1DBF76F}"/>
-              </a:ext>
-            </a:extLst>
-          </p:cNvPr>
-          <p:cNvSpPr>
-            <a:spLocks xmlns:a="http://schemas.openxmlformats.org/drawingml/2006/main" noGrp="1"/>
-          </p:cNvSpPr>
-          <p:nvPr/>
-        </p:nvSpPr>
-        <p:spPr>
-          <a:xfrm xmlns:a="http://schemas.openxmlformats.org/drawingml/2006/main">
-            <a:off x="39457154" y="3334295"/>
+                <a16:creationId xmlns:a16="http://schemas.microsoft.com/office/drawing/2014/main" id="{0D137002-7213-4E39-94CE-F1487028FE6D}"/>
+              </a:ext>
+            </a:extLst>
+          </p:cNvPr>
+          <p:cNvSpPr>
+            <a:spLocks xmlns:a="http://schemas.openxmlformats.org/drawingml/2006/main" noGrp="1"/>
+          </p:cNvSpPr>
+          <p:nvPr/>
+        </p:nvSpPr>
+        <p:spPr>
+          <a:xfrm xmlns:a="http://schemas.openxmlformats.org/drawingml/2006/main">
+            <a:off x="39457154" y="3292875"/>
             <a:ext cx="2539322" cy="911236"/>
           </a:xfrm>
           <a:prstGeom xmlns:a="http://schemas.openxmlformats.org/drawingml/2006/main" prst="rect">
@@ -3861,7 +3861,7 @@
           <p:cNvPr id="79" name="question-title">
             <a:extLst xmlns:a="http://schemas.openxmlformats.org/drawingml/2006/main">
               <a:ext uri="{FF2B5EF4-FFF2-40B4-BE49-F238E27FC236}">
-                <a16:creationId xmlns:a16="http://schemas.microsoft.com/office/drawing/2014/main" id="{518E511D-1850-48D1-900E-25FAA8F26A29}"/>
+                <a16:creationId xmlns:a16="http://schemas.microsoft.com/office/drawing/2014/main" id="{B2EDF248-E03B-4B37-8761-EA5409064E11}"/>
               </a:ext>
             </a:extLst>
           </p:cNvPr>
@@ -3911,7 +3911,7 @@
           <p:cNvPr id="80" name="question-rule">
             <a:extLst xmlns:a="http://schemas.openxmlformats.org/drawingml/2006/main">
               <a:ext uri="{FF2B5EF4-FFF2-40B4-BE49-F238E27FC236}">
-                <a16:creationId xmlns:a16="http://schemas.microsoft.com/office/drawing/2014/main" id="{C7CD4651-9956-4ECA-A335-FDD719F3469B}"/>
+                <a16:creationId xmlns:a16="http://schemas.microsoft.com/office/drawing/2014/main" id="{0CF0C1DE-4026-4BA4-BEBF-312D9D6DBAAF}"/>
               </a:ext>
             </a:extLst>
           </p:cNvPr>
@@ -3944,7 +3944,7 @@
           <p:cNvPr id="81" name="research-question">
             <a:extLst xmlns:a="http://schemas.openxmlformats.org/drawingml/2006/main">
               <a:ext uri="{FF2B5EF4-FFF2-40B4-BE49-F238E27FC236}">
-                <a16:creationId xmlns:a16="http://schemas.microsoft.com/office/drawing/2014/main" id="{1A9995E9-0891-49EB-98C5-4553AEBB6A37}"/>
+                <a16:creationId xmlns:a16="http://schemas.microsoft.com/office/drawing/2014/main" id="{2C6BC78F-92CA-4B20-9A85-2AAAF5606995}"/>
               </a:ext>
             </a:extLst>
           </p:cNvPr>
@@ -3956,7 +3956,7 @@
         <p:spPr>
           <a:xfrm xmlns:a="http://schemas.openxmlformats.org/drawingml/2006/main">
             <a:off x="1367327" y="7062079"/>
-            <a:ext cx="11915279" cy="2433414"/>
+            <a:ext cx="11915279" cy="2278090"/>
           </a:xfrm>
           <a:prstGeom xmlns:a="http://schemas.openxmlformats.org/drawingml/2006/main" prst="rect">
             <a:avLst/>
@@ -3994,7 +3994,7 @@
           <p:cNvPr id="82" name="question-evidence">
             <a:extLst xmlns:a="http://schemas.openxmlformats.org/drawingml/2006/main">
               <a:ext uri="{FF2B5EF4-FFF2-40B4-BE49-F238E27FC236}">
-                <a16:creationId xmlns:a16="http://schemas.microsoft.com/office/drawing/2014/main" id="{ABBB08FA-D675-4698-B5E0-793AA488C4AB}"/>
+                <a16:creationId xmlns:a16="http://schemas.microsoft.com/office/drawing/2014/main" id="{79A51CEA-D51F-45B1-B30C-4BA496DCB642}"/>
               </a:ext>
             </a:extLst>
           </p:cNvPr>
@@ -4022,14 +4022,14 @@
           <a:lstStyle xmlns:a="http://schemas.openxmlformats.org/drawingml/2006/main"/>
           <a:p xmlns:a="http://schemas.openxmlformats.org/drawingml/2006/main">
             <a:pPr>
-              <a:defRPr sz="1923" i="1">
+              <a:defRPr sz="1923">
                 <a:solidFill>
                   <a:srgbClr val="487AA1"/>
                 </a:solidFill>
               </a:defRPr>
             </a:pPr>
             <a:r>
-              <a:rPr sz="1923" i="1">
+              <a:rPr sz="1923">
                 <a:solidFill>
                   <a:srgbClr val="487AA1"/>
                 </a:solidFill>
@@ -4044,7 +4044,7 @@
           <p:cNvPr id="83" name="pipeline-title">
             <a:extLst xmlns:a="http://schemas.openxmlformats.org/drawingml/2006/main">
               <a:ext uri="{FF2B5EF4-FFF2-40B4-BE49-F238E27FC236}">
-                <a16:creationId xmlns:a16="http://schemas.microsoft.com/office/drawing/2014/main" id="{3C6A3F19-80B0-44D0-97EB-E67CEEFF6BB2}"/>
+                <a16:creationId xmlns:a16="http://schemas.microsoft.com/office/drawing/2014/main" id="{75378F75-E355-4F77-98B3-67DB9C21923D}"/>
               </a:ext>
             </a:extLst>
           </p:cNvPr>
@@ -4094,7 +4094,7 @@
           <p:cNvPr id="84" name="pipeline-rule">
             <a:extLst xmlns:a="http://schemas.openxmlformats.org/drawingml/2006/main">
               <a:ext uri="{FF2B5EF4-FFF2-40B4-BE49-F238E27FC236}">
-                <a16:creationId xmlns:a16="http://schemas.microsoft.com/office/drawing/2014/main" id="{E53354E3-AAD2-4F2E-8F87-2962FBCA68F1}"/>
+                <a16:creationId xmlns:a16="http://schemas.microsoft.com/office/drawing/2014/main" id="{42D8DE93-43C0-4CF8-8D5B-962E65040EAB}"/>
               </a:ext>
             </a:extLst>
           </p:cNvPr>
@@ -4127,7 +4127,7 @@
           <p:cNvPr id="85" name="pipeline-1-number-bg">
             <a:extLst xmlns:a="http://schemas.openxmlformats.org/drawingml/2006/main">
               <a:ext uri="{FF2B5EF4-FFF2-40B4-BE49-F238E27FC236}">
-                <a16:creationId xmlns:a16="http://schemas.microsoft.com/office/drawing/2014/main" id="{79514483-1547-4647-B656-12D4C9FECF42}"/>
+                <a16:creationId xmlns:a16="http://schemas.microsoft.com/office/drawing/2014/main" id="{E920EA5C-1189-434B-B431-02AD80C99E4F}"/>
               </a:ext>
             </a:extLst>
           </p:cNvPr>
@@ -4160,7 +4160,7 @@
           <p:cNvPr id="86" name="pipeline-1-number">
             <a:extLst xmlns:a="http://schemas.openxmlformats.org/drawingml/2006/main">
               <a:ext uri="{FF2B5EF4-FFF2-40B4-BE49-F238E27FC236}">
-                <a16:creationId xmlns:a16="http://schemas.microsoft.com/office/drawing/2014/main" id="{56459AFE-2FDB-4D4F-B2FD-BE6C83E0A88A}"/>
+                <a16:creationId xmlns:a16="http://schemas.microsoft.com/office/drawing/2014/main" id="{093B4902-3BEB-4A97-8A4A-60F8C28C1E38}"/>
               </a:ext>
             </a:extLst>
           </p:cNvPr>
@@ -4210,7 +4210,7 @@
           <p:cNvPr id="87" name="pipeline-1-text">
             <a:extLst xmlns:a="http://schemas.openxmlformats.org/drawingml/2006/main">
               <a:ext uri="{FF2B5EF4-FFF2-40B4-BE49-F238E27FC236}">
-                <a16:creationId xmlns:a16="http://schemas.microsoft.com/office/drawing/2014/main" id="{79CB343F-EE9C-4DE0-90F3-1BDF60A6D253}"/>
+                <a16:creationId xmlns:a16="http://schemas.microsoft.com/office/drawing/2014/main" id="{0961C710-29DD-442B-8207-25CE1B5C5AC1}"/>
               </a:ext>
             </a:extLst>
           </p:cNvPr>
@@ -4223,6 +4223,540 @@
           <a:xfrm xmlns:a="http://schemas.openxmlformats.org/drawingml/2006/main">
             <a:off x="2168190" y="11059091"/>
             <a:ext cx="11114416" cy="600587"/>
+          </a:xfrm>
+          <a:prstGeom xmlns:a="http://schemas.openxmlformats.org/drawingml/2006/main" prst="rect">
+            <a:avLst/>
+          </a:prstGeom>
+          <a:noFill xmlns:a="http://schemas.openxmlformats.org/drawingml/2006/main"/>
+          <a:ln xmlns:a="http://schemas.openxmlformats.org/drawingml/2006/main" w="0">
+            <a:noFill/>
+            <a:prstDash val="solid"/>
+          </a:ln>
+        </p:spPr>
+        <p:txBody>
+          <a:bodyPr xmlns:a="http://schemas.openxmlformats.org/drawingml/2006/main"/>
+          <a:lstStyle xmlns:a="http://schemas.openxmlformats.org/drawingml/2006/main"/>
+          <a:p xmlns:a="http://schemas.openxmlformats.org/drawingml/2006/main">
+            <a:pPr>
+              <a:defRPr sz="2922">
+                <a:solidFill>
+                  <a:srgbClr val="293F55"/>
+                </a:solidFill>
+              </a:defRPr>
+            </a:pPr>
+            <a:r>
+              <a:rPr sz="2922">
+                <a:solidFill>
+                  <a:srgbClr val="293F55"/>
+                </a:solidFill>
+              </a:rPr>
+              <a:t>Fixed seed generated 1,240 profiles</a:t>
+            </a:r>
+          </a:p>
+        </p:txBody>
+      </p:sp>
+      <p:sp>
+        <p:nvSpPr>
+          <p:cNvPr id="88" name="pipeline-2-number-bg">
+            <a:extLst xmlns:a="http://schemas.openxmlformats.org/drawingml/2006/main">
+              <a:ext uri="{FF2B5EF4-FFF2-40B4-BE49-F238E27FC236}">
+                <a16:creationId xmlns:a16="http://schemas.microsoft.com/office/drawing/2014/main" id="{4CB7A61F-A4E2-4F29-B271-2BDBBB405685}"/>
+              </a:ext>
+            </a:extLst>
+          </p:cNvPr>
+          <p:cNvSpPr>
+            <a:spLocks xmlns:a="http://schemas.openxmlformats.org/drawingml/2006/main" noGrp="1"/>
+          </p:cNvSpPr>
+          <p:nvPr/>
+        </p:nvSpPr>
+        <p:spPr>
+          <a:xfrm xmlns:a="http://schemas.openxmlformats.org/drawingml/2006/main">
+            <a:off x="1367327" y="11846068"/>
+            <a:ext cx="605531" cy="642007"/>
+          </a:xfrm>
+          <a:prstGeom xmlns:a="http://schemas.openxmlformats.org/drawingml/2006/main" prst="roundRect">
+            <a:avLst>
+              <a:gd name="adj" fmla="val 12584"/>
+            </a:avLst>
+          </a:prstGeom>
+          <a:solidFill xmlns:a="http://schemas.openxmlformats.org/drawingml/2006/main">
+            <a:srgbClr val="E5BC6C"/>
+          </a:solidFill>
+          <a:ln xmlns:a="http://schemas.openxmlformats.org/drawingml/2006/main" w="0">
+            <a:noFill/>
+            <a:prstDash val="solid"/>
+          </a:ln>
+        </p:spPr>
+      </p:sp>
+      <p:sp>
+        <p:nvSpPr>
+          <p:cNvPr id="89" name="pipeline-2-number">
+            <a:extLst xmlns:a="http://schemas.openxmlformats.org/drawingml/2006/main">
+              <a:ext uri="{FF2B5EF4-FFF2-40B4-BE49-F238E27FC236}">
+                <a16:creationId xmlns:a16="http://schemas.microsoft.com/office/drawing/2014/main" id="{F34DADB7-8DEE-415F-AF25-124ADF65D8DB}"/>
+              </a:ext>
+            </a:extLst>
+          </p:cNvPr>
+          <p:cNvSpPr>
+            <a:spLocks xmlns:a="http://schemas.openxmlformats.org/drawingml/2006/main" noGrp="1"/>
+          </p:cNvSpPr>
+          <p:nvPr/>
+        </p:nvSpPr>
+        <p:spPr>
+          <a:xfrm xmlns:a="http://schemas.openxmlformats.org/drawingml/2006/main">
+            <a:off x="1367327" y="11918553"/>
+            <a:ext cx="605531" cy="476328"/>
+          </a:xfrm>
+          <a:prstGeom xmlns:a="http://schemas.openxmlformats.org/drawingml/2006/main" prst="rect">
+            <a:avLst/>
+          </a:prstGeom>
+          <a:noFill xmlns:a="http://schemas.openxmlformats.org/drawingml/2006/main"/>
+          <a:ln xmlns:a="http://schemas.openxmlformats.org/drawingml/2006/main" w="0">
+            <a:noFill/>
+            <a:prstDash val="solid"/>
+          </a:ln>
+        </p:spPr>
+        <p:txBody>
+          <a:bodyPr xmlns:a="http://schemas.openxmlformats.org/drawingml/2006/main"/>
+          <a:lstStyle xmlns:a="http://schemas.openxmlformats.org/drawingml/2006/main"/>
+          <a:p xmlns:a="http://schemas.openxmlformats.org/drawingml/2006/main">
+            <a:pPr algn="ctr">
+              <a:defRPr sz="2384" b="1">
+                <a:solidFill>
+                  <a:srgbClr val="293F55"/>
+                </a:solidFill>
+              </a:defRPr>
+            </a:pPr>
+            <a:r>
+              <a:rPr sz="2384" b="1">
+                <a:solidFill>
+                  <a:srgbClr val="293F55"/>
+                </a:solidFill>
+              </a:rPr>
+              <a:t>2</a:t>
+            </a:r>
+          </a:p>
+        </p:txBody>
+      </p:sp>
+      <p:sp>
+        <p:nvSpPr>
+          <p:cNvPr id="90" name="pipeline-2-text">
+            <a:extLst xmlns:a="http://schemas.openxmlformats.org/drawingml/2006/main">
+              <a:ext uri="{FF2B5EF4-FFF2-40B4-BE49-F238E27FC236}">
+                <a16:creationId xmlns:a16="http://schemas.microsoft.com/office/drawing/2014/main" id="{B5C65381-4CE8-4700-8B8B-5AABE5481BF2}"/>
+              </a:ext>
+            </a:extLst>
+          </p:cNvPr>
+          <p:cNvSpPr>
+            <a:spLocks xmlns:a="http://schemas.openxmlformats.org/drawingml/2006/main" noGrp="1"/>
+          </p:cNvSpPr>
+          <p:nvPr/>
+        </p:nvSpPr>
+        <p:spPr>
+          <a:xfrm xmlns:a="http://schemas.openxmlformats.org/drawingml/2006/main">
+            <a:off x="2168190" y="11887488"/>
+            <a:ext cx="11114416" cy="600587"/>
+          </a:xfrm>
+          <a:prstGeom xmlns:a="http://schemas.openxmlformats.org/drawingml/2006/main" prst="rect">
+            <a:avLst/>
+          </a:prstGeom>
+          <a:noFill xmlns:a="http://schemas.openxmlformats.org/drawingml/2006/main"/>
+          <a:ln xmlns:a="http://schemas.openxmlformats.org/drawingml/2006/main" w="0">
+            <a:noFill/>
+            <a:prstDash val="solid"/>
+          </a:ln>
+        </p:spPr>
+        <p:txBody>
+          <a:bodyPr xmlns:a="http://schemas.openxmlformats.org/drawingml/2006/main"/>
+          <a:lstStyle xmlns:a="http://schemas.openxmlformats.org/drawingml/2006/main"/>
+          <a:p xmlns:a="http://schemas.openxmlformats.org/drawingml/2006/main">
+            <a:pPr>
+              <a:defRPr sz="2922">
+                <a:solidFill>
+                  <a:srgbClr val="293F55"/>
+                </a:solidFill>
+              </a:defRPr>
+            </a:pPr>
+            <a:r>
+              <a:rPr sz="2922">
+                <a:solidFill>
+                  <a:srgbClr val="293F55"/>
+                </a:solidFill>
+              </a:rPr>
+              <a:t>480 anonymous transcript-like features</a:t>
+            </a:r>
+          </a:p>
+        </p:txBody>
+      </p:sp>
+      <p:sp>
+        <p:nvSpPr>
+          <p:cNvPr id="91" name="pipeline-3-number-bg">
+            <a:extLst xmlns:a="http://schemas.openxmlformats.org/drawingml/2006/main">
+              <a:ext uri="{FF2B5EF4-FFF2-40B4-BE49-F238E27FC236}">
+                <a16:creationId xmlns:a16="http://schemas.microsoft.com/office/drawing/2014/main" id="{A1414BB4-B526-43E6-953C-F59C00C13993}"/>
+              </a:ext>
+            </a:extLst>
+          </p:cNvPr>
+          <p:cNvSpPr>
+            <a:spLocks xmlns:a="http://schemas.openxmlformats.org/drawingml/2006/main" noGrp="1"/>
+          </p:cNvSpPr>
+          <p:nvPr/>
+        </p:nvSpPr>
+        <p:spPr>
+          <a:xfrm xmlns:a="http://schemas.openxmlformats.org/drawingml/2006/main">
+            <a:off x="1367327" y="12674464"/>
+            <a:ext cx="605531" cy="642007"/>
+          </a:xfrm>
+          <a:prstGeom xmlns:a="http://schemas.openxmlformats.org/drawingml/2006/main" prst="roundRect">
+            <a:avLst>
+              <a:gd name="adj" fmla="val 12584"/>
+            </a:avLst>
+          </a:prstGeom>
+          <a:solidFill xmlns:a="http://schemas.openxmlformats.org/drawingml/2006/main">
+            <a:srgbClr val="E5BC6C"/>
+          </a:solidFill>
+          <a:ln xmlns:a="http://schemas.openxmlformats.org/drawingml/2006/main" w="0">
+            <a:noFill/>
+            <a:prstDash val="solid"/>
+          </a:ln>
+        </p:spPr>
+      </p:sp>
+      <p:sp>
+        <p:nvSpPr>
+          <p:cNvPr id="92" name="pipeline-3-number">
+            <a:extLst xmlns:a="http://schemas.openxmlformats.org/drawingml/2006/main">
+              <a:ext uri="{FF2B5EF4-FFF2-40B4-BE49-F238E27FC236}">
+                <a16:creationId xmlns:a16="http://schemas.microsoft.com/office/drawing/2014/main" id="{0989D30B-780D-4F8D-9F6D-0A2E69B64176}"/>
+              </a:ext>
+            </a:extLst>
+          </p:cNvPr>
+          <p:cNvSpPr>
+            <a:spLocks xmlns:a="http://schemas.openxmlformats.org/drawingml/2006/main" noGrp="1"/>
+          </p:cNvSpPr>
+          <p:nvPr/>
+        </p:nvSpPr>
+        <p:spPr>
+          <a:xfrm xmlns:a="http://schemas.openxmlformats.org/drawingml/2006/main">
+            <a:off x="1367327" y="12746949"/>
+            <a:ext cx="605531" cy="476328"/>
+          </a:xfrm>
+          <a:prstGeom xmlns:a="http://schemas.openxmlformats.org/drawingml/2006/main" prst="rect">
+            <a:avLst/>
+          </a:prstGeom>
+          <a:noFill xmlns:a="http://schemas.openxmlformats.org/drawingml/2006/main"/>
+          <a:ln xmlns:a="http://schemas.openxmlformats.org/drawingml/2006/main" w="0">
+            <a:noFill/>
+            <a:prstDash val="solid"/>
+          </a:ln>
+        </p:spPr>
+        <p:txBody>
+          <a:bodyPr xmlns:a="http://schemas.openxmlformats.org/drawingml/2006/main"/>
+          <a:lstStyle xmlns:a="http://schemas.openxmlformats.org/drawingml/2006/main"/>
+          <a:p xmlns:a="http://schemas.openxmlformats.org/drawingml/2006/main">
+            <a:pPr algn="ctr">
+              <a:defRPr sz="2384" b="1">
+                <a:solidFill>
+                  <a:srgbClr val="293F55"/>
+                </a:solidFill>
+              </a:defRPr>
+            </a:pPr>
+            <a:r>
+              <a:rPr sz="2384" b="1">
+                <a:solidFill>
+                  <a:srgbClr val="293F55"/>
+                </a:solidFill>
+              </a:rPr>
+              <a:t>3</a:t>
+            </a:r>
+          </a:p>
+        </p:txBody>
+      </p:sp>
+      <p:sp>
+        <p:nvSpPr>
+          <p:cNvPr id="93" name="pipeline-3-text">
+            <a:extLst xmlns:a="http://schemas.openxmlformats.org/drawingml/2006/main">
+              <a:ext uri="{FF2B5EF4-FFF2-40B4-BE49-F238E27FC236}">
+                <a16:creationId xmlns:a16="http://schemas.microsoft.com/office/drawing/2014/main" id="{CEF45360-E186-4C58-970A-51059BFFD68E}"/>
+              </a:ext>
+            </a:extLst>
+          </p:cNvPr>
+          <p:cNvSpPr>
+            <a:spLocks xmlns:a="http://schemas.openxmlformats.org/drawingml/2006/main" noGrp="1"/>
+          </p:cNvSpPr>
+          <p:nvPr/>
+        </p:nvSpPr>
+        <p:spPr>
+          <a:xfrm xmlns:a="http://schemas.openxmlformats.org/drawingml/2006/main">
+            <a:off x="2168190" y="12715884"/>
+            <a:ext cx="11114416" cy="600587"/>
+          </a:xfrm>
+          <a:prstGeom xmlns:a="http://schemas.openxmlformats.org/drawingml/2006/main" prst="rect">
+            <a:avLst/>
+          </a:prstGeom>
+          <a:noFill xmlns:a="http://schemas.openxmlformats.org/drawingml/2006/main"/>
+          <a:ln xmlns:a="http://schemas.openxmlformats.org/drawingml/2006/main" w="0">
+            <a:noFill/>
+            <a:prstDash val="solid"/>
+          </a:ln>
+        </p:spPr>
+        <p:txBody>
+          <a:bodyPr xmlns:a="http://schemas.openxmlformats.org/drawingml/2006/main"/>
+          <a:lstStyle xmlns:a="http://schemas.openxmlformats.org/drawingml/2006/main"/>
+          <a:p xmlns:a="http://schemas.openxmlformats.org/drawingml/2006/main">
+            <a:pPr>
+              <a:defRPr sz="2922">
+                <a:solidFill>
+                  <a:srgbClr val="293F55"/>
+                </a:solidFill>
+              </a:defRPr>
+            </a:pPr>
+            <a:r>
+              <a:rPr sz="2922">
+                <a:solidFill>
+                  <a:srgbClr val="293F55"/>
+                </a:solidFill>
+              </a:rPr>
+              <a:t>Nested elastic-net selection</a:t>
+            </a:r>
+          </a:p>
+        </p:txBody>
+      </p:sp>
+      <p:sp>
+        <p:nvSpPr>
+          <p:cNvPr id="94" name="pipeline-4-number-bg">
+            <a:extLst xmlns:a="http://schemas.openxmlformats.org/drawingml/2006/main">
+              <a:ext uri="{FF2B5EF4-FFF2-40B4-BE49-F238E27FC236}">
+                <a16:creationId xmlns:a16="http://schemas.microsoft.com/office/drawing/2014/main" id="{AE2E8EAD-3179-4B12-AE92-748443582E11}"/>
+              </a:ext>
+            </a:extLst>
+          </p:cNvPr>
+          <p:cNvSpPr>
+            <a:spLocks xmlns:a="http://schemas.openxmlformats.org/drawingml/2006/main" noGrp="1"/>
+          </p:cNvSpPr>
+          <p:nvPr/>
+        </p:nvSpPr>
+        <p:spPr>
+          <a:xfrm xmlns:a="http://schemas.openxmlformats.org/drawingml/2006/main">
+            <a:off x="1367327" y="13502861"/>
+            <a:ext cx="605531" cy="642007"/>
+          </a:xfrm>
+          <a:prstGeom xmlns:a="http://schemas.openxmlformats.org/drawingml/2006/main" prst="roundRect">
+            <a:avLst>
+              <a:gd name="adj" fmla="val 12584"/>
+            </a:avLst>
+          </a:prstGeom>
+          <a:solidFill xmlns:a="http://schemas.openxmlformats.org/drawingml/2006/main">
+            <a:srgbClr val="E5BC6C"/>
+          </a:solidFill>
+          <a:ln xmlns:a="http://schemas.openxmlformats.org/drawingml/2006/main" w="0">
+            <a:noFill/>
+            <a:prstDash val="solid"/>
+          </a:ln>
+        </p:spPr>
+      </p:sp>
+      <p:sp>
+        <p:nvSpPr>
+          <p:cNvPr id="95" name="pipeline-4-number">
+            <a:extLst xmlns:a="http://schemas.openxmlformats.org/drawingml/2006/main">
+              <a:ext uri="{FF2B5EF4-FFF2-40B4-BE49-F238E27FC236}">
+                <a16:creationId xmlns:a16="http://schemas.microsoft.com/office/drawing/2014/main" id="{FC72C1D6-CC94-4A85-9FD0-100ABC676DA6}"/>
+              </a:ext>
+            </a:extLst>
+          </p:cNvPr>
+          <p:cNvSpPr>
+            <a:spLocks xmlns:a="http://schemas.openxmlformats.org/drawingml/2006/main" noGrp="1"/>
+          </p:cNvSpPr>
+          <p:nvPr/>
+        </p:nvSpPr>
+        <p:spPr>
+          <a:xfrm xmlns:a="http://schemas.openxmlformats.org/drawingml/2006/main">
+            <a:off x="1367327" y="13575345"/>
+            <a:ext cx="605531" cy="476328"/>
+          </a:xfrm>
+          <a:prstGeom xmlns:a="http://schemas.openxmlformats.org/drawingml/2006/main" prst="rect">
+            <a:avLst/>
+          </a:prstGeom>
+          <a:noFill xmlns:a="http://schemas.openxmlformats.org/drawingml/2006/main"/>
+          <a:ln xmlns:a="http://schemas.openxmlformats.org/drawingml/2006/main" w="0">
+            <a:noFill/>
+            <a:prstDash val="solid"/>
+          </a:ln>
+        </p:spPr>
+        <p:txBody>
+          <a:bodyPr xmlns:a="http://schemas.openxmlformats.org/drawingml/2006/main"/>
+          <a:lstStyle xmlns:a="http://schemas.openxmlformats.org/drawingml/2006/main"/>
+          <a:p xmlns:a="http://schemas.openxmlformats.org/drawingml/2006/main">
+            <a:pPr algn="ctr">
+              <a:defRPr sz="2384" b="1">
+                <a:solidFill>
+                  <a:srgbClr val="293F55"/>
+                </a:solidFill>
+              </a:defRPr>
+            </a:pPr>
+            <a:r>
+              <a:rPr sz="2384" b="1">
+                <a:solidFill>
+                  <a:srgbClr val="293F55"/>
+                </a:solidFill>
+              </a:rPr>
+              <a:t>4</a:t>
+            </a:r>
+          </a:p>
+        </p:txBody>
+      </p:sp>
+      <p:sp>
+        <p:nvSpPr>
+          <p:cNvPr id="96" name="pipeline-4-text">
+            <a:extLst xmlns:a="http://schemas.openxmlformats.org/drawingml/2006/main">
+              <a:ext uri="{FF2B5EF4-FFF2-40B4-BE49-F238E27FC236}">
+                <a16:creationId xmlns:a16="http://schemas.microsoft.com/office/drawing/2014/main" id="{D272B059-F8F6-4A7E-8BB2-31B4E551B3EF}"/>
+              </a:ext>
+            </a:extLst>
+          </p:cNvPr>
+          <p:cNvSpPr>
+            <a:spLocks xmlns:a="http://schemas.openxmlformats.org/drawingml/2006/main" noGrp="1"/>
+          </p:cNvSpPr>
+          <p:nvPr/>
+        </p:nvSpPr>
+        <p:spPr>
+          <a:xfrm xmlns:a="http://schemas.openxmlformats.org/drawingml/2006/main">
+            <a:off x="2168190" y="13544280"/>
+            <a:ext cx="11114416" cy="600587"/>
+          </a:xfrm>
+          <a:prstGeom xmlns:a="http://schemas.openxmlformats.org/drawingml/2006/main" prst="rect">
+            <a:avLst/>
+          </a:prstGeom>
+          <a:noFill xmlns:a="http://schemas.openxmlformats.org/drawingml/2006/main"/>
+          <a:ln xmlns:a="http://schemas.openxmlformats.org/drawingml/2006/main" w="0">
+            <a:noFill/>
+            <a:prstDash val="solid"/>
+          </a:ln>
+        </p:spPr>
+        <p:txBody>
+          <a:bodyPr xmlns:a="http://schemas.openxmlformats.org/drawingml/2006/main"/>
+          <a:lstStyle xmlns:a="http://schemas.openxmlformats.org/drawingml/2006/main"/>
+          <a:p xmlns:a="http://schemas.openxmlformats.org/drawingml/2006/main">
+            <a:pPr>
+              <a:defRPr sz="2922">
+                <a:solidFill>
+                  <a:srgbClr val="293F55"/>
+                </a:solidFill>
+              </a:defRPr>
+            </a:pPr>
+            <a:r>
+              <a:rPr sz="2922">
+                <a:solidFill>
+                  <a:srgbClr val="293F55"/>
+                </a:solidFill>
+              </a:rPr>
+              <a:t>12-feature score and shift testing</a:t>
+            </a:r>
+          </a:p>
+        </p:txBody>
+      </p:sp>
+      <p:sp>
+        <p:nvSpPr>
+          <p:cNvPr id="97" name="dataset-panel">
+            <a:extLst xmlns:a="http://schemas.openxmlformats.org/drawingml/2006/main">
+              <a:ext uri="{FF2B5EF4-FFF2-40B4-BE49-F238E27FC236}">
+                <a16:creationId xmlns:a16="http://schemas.microsoft.com/office/drawing/2014/main" id="{B91DF533-D4EA-44E3-A0B6-B6E766EA33A0}"/>
+              </a:ext>
+            </a:extLst>
+          </p:cNvPr>
+          <p:cNvSpPr>
+            <a:spLocks xmlns:a="http://schemas.openxmlformats.org/drawingml/2006/main" noGrp="1"/>
+          </p:cNvSpPr>
+          <p:nvPr/>
+        </p:nvSpPr>
+        <p:spPr>
+          <a:xfrm xmlns:a="http://schemas.openxmlformats.org/drawingml/2006/main">
+            <a:off x="1367327" y="14600486"/>
+            <a:ext cx="11915279" cy="3727784"/>
+          </a:xfrm>
+          <a:prstGeom xmlns:a="http://schemas.openxmlformats.org/drawingml/2006/main" prst="roundRect">
+            <a:avLst>
+              <a:gd name="adj" fmla="val 3066"/>
+            </a:avLst>
+          </a:prstGeom>
+          <a:solidFill xmlns:a="http://schemas.openxmlformats.org/drawingml/2006/main">
+            <a:srgbClr val="FFFFFF"/>
+          </a:solidFill>
+          <a:ln xmlns:a="http://schemas.openxmlformats.org/drawingml/2006/main" w="29300">
+            <a:solidFill>
+              <a:srgbClr val="DDE5E7"/>
+            </a:solidFill>
+            <a:prstDash val="solid"/>
+          </a:ln>
+        </p:spPr>
+      </p:sp>
+      <p:sp>
+        <p:nvSpPr>
+          <p:cNvPr id="98" name="dataset-kicker">
+            <a:extLst xmlns:a="http://schemas.openxmlformats.org/drawingml/2006/main">
+              <a:ext uri="{FF2B5EF4-FFF2-40B4-BE49-F238E27FC236}">
+                <a16:creationId xmlns:a16="http://schemas.microsoft.com/office/drawing/2014/main" id="{ED16777C-A7D4-4B56-BA40-AE63BCA56AE7}"/>
+              </a:ext>
+            </a:extLst>
+          </p:cNvPr>
+          <p:cNvSpPr>
+            <a:spLocks xmlns:a="http://schemas.openxmlformats.org/drawingml/2006/main" noGrp="1"/>
+          </p:cNvSpPr>
+          <p:nvPr/>
+        </p:nvSpPr>
+        <p:spPr>
+          <a:xfrm xmlns:a="http://schemas.openxmlformats.org/drawingml/2006/main">
+            <a:off x="1640793" y="14911134"/>
+            <a:ext cx="4492646" cy="414198"/>
+          </a:xfrm>
+          <a:prstGeom xmlns:a="http://schemas.openxmlformats.org/drawingml/2006/main" prst="rect">
+            <a:avLst/>
+          </a:prstGeom>
+          <a:noFill xmlns:a="http://schemas.openxmlformats.org/drawingml/2006/main"/>
+          <a:ln xmlns:a="http://schemas.openxmlformats.org/drawingml/2006/main" w="0">
+            <a:noFill/>
+            <a:prstDash val="solid"/>
+          </a:ln>
+        </p:spPr>
+        <p:txBody>
+          <a:bodyPr xmlns:a="http://schemas.openxmlformats.org/drawingml/2006/main"/>
+          <a:lstStyle xmlns:a="http://schemas.openxmlformats.org/drawingml/2006/main"/>
+          <a:p xmlns:a="http://schemas.openxmlformats.org/drawingml/2006/main">
+            <a:pPr>
+              <a:defRPr sz="2230" b="1">
+                <a:solidFill>
+                  <a:srgbClr val="3E5C78"/>
+                </a:solidFill>
+              </a:defRPr>
+            </a:pPr>
+            <a:r>
+              <a:rPr sz="2230" b="1">
+                <a:solidFill>
+                  <a:srgbClr val="3E5C78"/>
+                </a:solidFill>
+              </a:rPr>
+              <a:t>FOUR SYNTHETIC COHORTS</a:t>
+            </a:r>
+          </a:p>
+        </p:txBody>
+      </p:sp>
+      <p:sp>
+        <p:nvSpPr>
+          <p:cNvPr id="99" name="dataset-lead">
+            <a:extLst xmlns:a="http://schemas.openxmlformats.org/drawingml/2006/main">
+              <a:ext uri="{FF2B5EF4-FFF2-40B4-BE49-F238E27FC236}">
+                <a16:creationId xmlns:a16="http://schemas.microsoft.com/office/drawing/2014/main" id="{564E0063-FEFA-46FA-BC29-A222EFF6601A}"/>
+              </a:ext>
+            </a:extLst>
+          </p:cNvPr>
+          <p:cNvSpPr>
+            <a:spLocks xmlns:a="http://schemas.openxmlformats.org/drawingml/2006/main" noGrp="1"/>
+          </p:cNvSpPr>
+          <p:nvPr/>
+        </p:nvSpPr>
+        <p:spPr>
+          <a:xfrm xmlns:a="http://schemas.openxmlformats.org/drawingml/2006/main">
+            <a:off x="1640793" y="15480657"/>
+            <a:ext cx="11368348" cy="559168"/>
           </a:xfrm>
           <a:prstGeom xmlns:a="http://schemas.openxmlformats.org/drawingml/2006/main" prst="rect">
             <a:avLst/>
@@ -4250,513 +4784,29 @@
                   <a:srgbClr val="293F55"/>
                 </a:solidFill>
               </a:rPr>
-              <a:t>Fixed seed generated 1,240 profiles</a:t>
+              <a:t>Four deterministic synthetic cohorts</a:t>
             </a:r>
           </a:p>
         </p:txBody>
       </p:sp>
       <p:sp>
         <p:nvSpPr>
-          <p:cNvPr id="88" name="pipeline-2-number-bg">
-            <a:extLst xmlns:a="http://schemas.openxmlformats.org/drawingml/2006/main">
-              <a:ext uri="{FF2B5EF4-FFF2-40B4-BE49-F238E27FC236}">
-                <a16:creationId xmlns:a16="http://schemas.microsoft.com/office/drawing/2014/main" id="{86CB2F4F-5DA7-4574-A26A-945828B77826}"/>
-              </a:ext>
-            </a:extLst>
-          </p:cNvPr>
-          <p:cNvSpPr>
-            <a:spLocks xmlns:a="http://schemas.openxmlformats.org/drawingml/2006/main" noGrp="1"/>
-          </p:cNvSpPr>
-          <p:nvPr/>
-        </p:nvSpPr>
-        <p:spPr>
-          <a:xfrm xmlns:a="http://schemas.openxmlformats.org/drawingml/2006/main">
-            <a:off x="1367327" y="11846068"/>
-            <a:ext cx="605531" cy="642007"/>
-          </a:xfrm>
-          <a:prstGeom xmlns:a="http://schemas.openxmlformats.org/drawingml/2006/main" prst="roundRect">
-            <a:avLst>
-              <a:gd name="adj" fmla="val 12584"/>
-            </a:avLst>
-          </a:prstGeom>
-          <a:solidFill xmlns:a="http://schemas.openxmlformats.org/drawingml/2006/main">
-            <a:srgbClr val="E5BC6C"/>
-          </a:solidFill>
-          <a:ln xmlns:a="http://schemas.openxmlformats.org/drawingml/2006/main" w="0">
-            <a:noFill/>
-            <a:prstDash val="solid"/>
-          </a:ln>
-        </p:spPr>
-      </p:sp>
-      <p:sp>
-        <p:nvSpPr>
-          <p:cNvPr id="89" name="pipeline-2-number">
-            <a:extLst xmlns:a="http://schemas.openxmlformats.org/drawingml/2006/main">
-              <a:ext uri="{FF2B5EF4-FFF2-40B4-BE49-F238E27FC236}">
-                <a16:creationId xmlns:a16="http://schemas.microsoft.com/office/drawing/2014/main" id="{443B91B1-2E62-4C1A-A3C4-BAFF28BA9BAA}"/>
-              </a:ext>
-            </a:extLst>
-          </p:cNvPr>
-          <p:cNvSpPr>
-            <a:spLocks xmlns:a="http://schemas.openxmlformats.org/drawingml/2006/main" noGrp="1"/>
-          </p:cNvSpPr>
-          <p:nvPr/>
-        </p:nvSpPr>
-        <p:spPr>
-          <a:xfrm xmlns:a="http://schemas.openxmlformats.org/drawingml/2006/main">
-            <a:off x="1367327" y="11918553"/>
-            <a:ext cx="605531" cy="476328"/>
-          </a:xfrm>
-          <a:prstGeom xmlns:a="http://schemas.openxmlformats.org/drawingml/2006/main" prst="rect">
-            <a:avLst/>
-          </a:prstGeom>
-          <a:noFill xmlns:a="http://schemas.openxmlformats.org/drawingml/2006/main"/>
-          <a:ln xmlns:a="http://schemas.openxmlformats.org/drawingml/2006/main" w="0">
-            <a:noFill/>
-            <a:prstDash val="solid"/>
-          </a:ln>
-        </p:spPr>
-        <p:txBody>
-          <a:bodyPr xmlns:a="http://schemas.openxmlformats.org/drawingml/2006/main"/>
-          <a:lstStyle xmlns:a="http://schemas.openxmlformats.org/drawingml/2006/main"/>
-          <a:p xmlns:a="http://schemas.openxmlformats.org/drawingml/2006/main">
-            <a:pPr algn="ctr">
-              <a:defRPr sz="2384" b="1">
-                <a:solidFill>
-                  <a:srgbClr val="293F55"/>
-                </a:solidFill>
-              </a:defRPr>
-            </a:pPr>
-            <a:r>
-              <a:rPr sz="2384" b="1">
-                <a:solidFill>
-                  <a:srgbClr val="293F55"/>
-                </a:solidFill>
-              </a:rPr>
-              <a:t>2</a:t>
-            </a:r>
-          </a:p>
-        </p:txBody>
-      </p:sp>
-      <p:sp>
-        <p:nvSpPr>
-          <p:cNvPr id="90" name="pipeline-2-text">
-            <a:extLst xmlns:a="http://schemas.openxmlformats.org/drawingml/2006/main">
-              <a:ext uri="{FF2B5EF4-FFF2-40B4-BE49-F238E27FC236}">
-                <a16:creationId xmlns:a16="http://schemas.microsoft.com/office/drawing/2014/main" id="{4B5912B6-CA4D-4A01-BC17-AD41A1C2D6D2}"/>
-              </a:ext>
-            </a:extLst>
-          </p:cNvPr>
-          <p:cNvSpPr>
-            <a:spLocks xmlns:a="http://schemas.openxmlformats.org/drawingml/2006/main" noGrp="1"/>
-          </p:cNvSpPr>
-          <p:nvPr/>
-        </p:nvSpPr>
-        <p:spPr>
-          <a:xfrm xmlns:a="http://schemas.openxmlformats.org/drawingml/2006/main">
-            <a:off x="2168190" y="11887488"/>
-            <a:ext cx="11114416" cy="600587"/>
-          </a:xfrm>
-          <a:prstGeom xmlns:a="http://schemas.openxmlformats.org/drawingml/2006/main" prst="rect">
-            <a:avLst/>
-          </a:prstGeom>
-          <a:noFill xmlns:a="http://schemas.openxmlformats.org/drawingml/2006/main"/>
-          <a:ln xmlns:a="http://schemas.openxmlformats.org/drawingml/2006/main" w="0">
-            <a:noFill/>
-            <a:prstDash val="solid"/>
-          </a:ln>
-        </p:spPr>
-        <p:txBody>
-          <a:bodyPr xmlns:a="http://schemas.openxmlformats.org/drawingml/2006/main"/>
-          <a:lstStyle xmlns:a="http://schemas.openxmlformats.org/drawingml/2006/main"/>
-          <a:p xmlns:a="http://schemas.openxmlformats.org/drawingml/2006/main">
-            <a:pPr>
-              <a:defRPr sz="2922" b="1">
-                <a:solidFill>
-                  <a:srgbClr val="293F55"/>
-                </a:solidFill>
-              </a:defRPr>
-            </a:pPr>
-            <a:r>
-              <a:rPr sz="2922" b="1">
-                <a:solidFill>
-                  <a:srgbClr val="293F55"/>
-                </a:solidFill>
-              </a:rPr>
-              <a:t>480 anonymous transcript-like features</a:t>
-            </a:r>
-          </a:p>
-        </p:txBody>
-      </p:sp>
-      <p:sp>
-        <p:nvSpPr>
-          <p:cNvPr id="91" name="pipeline-3-number-bg">
-            <a:extLst xmlns:a="http://schemas.openxmlformats.org/drawingml/2006/main">
-              <a:ext uri="{FF2B5EF4-FFF2-40B4-BE49-F238E27FC236}">
-                <a16:creationId xmlns:a16="http://schemas.microsoft.com/office/drawing/2014/main" id="{0AE22AD8-533E-44FC-96DF-11B6944CE9F6}"/>
-              </a:ext>
-            </a:extLst>
-          </p:cNvPr>
-          <p:cNvSpPr>
-            <a:spLocks xmlns:a="http://schemas.openxmlformats.org/drawingml/2006/main" noGrp="1"/>
-          </p:cNvSpPr>
-          <p:nvPr/>
-        </p:nvSpPr>
-        <p:spPr>
-          <a:xfrm xmlns:a="http://schemas.openxmlformats.org/drawingml/2006/main">
-            <a:off x="1367327" y="12674464"/>
-            <a:ext cx="605531" cy="642007"/>
-          </a:xfrm>
-          <a:prstGeom xmlns:a="http://schemas.openxmlformats.org/drawingml/2006/main" prst="roundRect">
-            <a:avLst>
-              <a:gd name="adj" fmla="val 12584"/>
-            </a:avLst>
-          </a:prstGeom>
-          <a:solidFill xmlns:a="http://schemas.openxmlformats.org/drawingml/2006/main">
-            <a:srgbClr val="E5BC6C"/>
-          </a:solidFill>
-          <a:ln xmlns:a="http://schemas.openxmlformats.org/drawingml/2006/main" w="0">
-            <a:noFill/>
-            <a:prstDash val="solid"/>
-          </a:ln>
-        </p:spPr>
-      </p:sp>
-      <p:sp>
-        <p:nvSpPr>
-          <p:cNvPr id="92" name="pipeline-3-number">
-            <a:extLst xmlns:a="http://schemas.openxmlformats.org/drawingml/2006/main">
-              <a:ext uri="{FF2B5EF4-FFF2-40B4-BE49-F238E27FC236}">
-                <a16:creationId xmlns:a16="http://schemas.microsoft.com/office/drawing/2014/main" id="{72FF3CF7-475E-4188-967E-5B00024C5B53}"/>
-              </a:ext>
-            </a:extLst>
-          </p:cNvPr>
-          <p:cNvSpPr>
-            <a:spLocks xmlns:a="http://schemas.openxmlformats.org/drawingml/2006/main" noGrp="1"/>
-          </p:cNvSpPr>
-          <p:nvPr/>
-        </p:nvSpPr>
-        <p:spPr>
-          <a:xfrm xmlns:a="http://schemas.openxmlformats.org/drawingml/2006/main">
-            <a:off x="1367327" y="12746949"/>
-            <a:ext cx="605531" cy="476328"/>
-          </a:xfrm>
-          <a:prstGeom xmlns:a="http://schemas.openxmlformats.org/drawingml/2006/main" prst="rect">
-            <a:avLst/>
-          </a:prstGeom>
-          <a:noFill xmlns:a="http://schemas.openxmlformats.org/drawingml/2006/main"/>
-          <a:ln xmlns:a="http://schemas.openxmlformats.org/drawingml/2006/main" w="0">
-            <a:noFill/>
-            <a:prstDash val="solid"/>
-          </a:ln>
-        </p:spPr>
-        <p:txBody>
-          <a:bodyPr xmlns:a="http://schemas.openxmlformats.org/drawingml/2006/main"/>
-          <a:lstStyle xmlns:a="http://schemas.openxmlformats.org/drawingml/2006/main"/>
-          <a:p xmlns:a="http://schemas.openxmlformats.org/drawingml/2006/main">
-            <a:pPr algn="ctr">
-              <a:defRPr sz="2384" b="1">
-                <a:solidFill>
-                  <a:srgbClr val="293F55"/>
-                </a:solidFill>
-              </a:defRPr>
-            </a:pPr>
-            <a:r>
-              <a:rPr sz="2384" b="1">
-                <a:solidFill>
-                  <a:srgbClr val="293F55"/>
-                </a:solidFill>
-              </a:rPr>
-              <a:t>3</a:t>
-            </a:r>
-          </a:p>
-        </p:txBody>
-      </p:sp>
-      <p:sp>
-        <p:nvSpPr>
-          <p:cNvPr id="93" name="pipeline-3-text">
-            <a:extLst xmlns:a="http://schemas.openxmlformats.org/drawingml/2006/main">
-              <a:ext uri="{FF2B5EF4-FFF2-40B4-BE49-F238E27FC236}">
-                <a16:creationId xmlns:a16="http://schemas.microsoft.com/office/drawing/2014/main" id="{66FA13AE-E5CF-4C32-935D-E001C6A50D88}"/>
-              </a:ext>
-            </a:extLst>
-          </p:cNvPr>
-          <p:cNvSpPr>
-            <a:spLocks xmlns:a="http://schemas.openxmlformats.org/drawingml/2006/main" noGrp="1"/>
-          </p:cNvSpPr>
-          <p:nvPr/>
-        </p:nvSpPr>
-        <p:spPr>
-          <a:xfrm xmlns:a="http://schemas.openxmlformats.org/drawingml/2006/main">
-            <a:off x="2168190" y="12715884"/>
-            <a:ext cx="11114416" cy="600587"/>
-          </a:xfrm>
-          <a:prstGeom xmlns:a="http://schemas.openxmlformats.org/drawingml/2006/main" prst="rect">
-            <a:avLst/>
-          </a:prstGeom>
-          <a:noFill xmlns:a="http://schemas.openxmlformats.org/drawingml/2006/main"/>
-          <a:ln xmlns:a="http://schemas.openxmlformats.org/drawingml/2006/main" w="0">
-            <a:noFill/>
-            <a:prstDash val="solid"/>
-          </a:ln>
-        </p:spPr>
-        <p:txBody>
-          <a:bodyPr xmlns:a="http://schemas.openxmlformats.org/drawingml/2006/main"/>
-          <a:lstStyle xmlns:a="http://schemas.openxmlformats.org/drawingml/2006/main"/>
-          <a:p xmlns:a="http://schemas.openxmlformats.org/drawingml/2006/main">
-            <a:pPr>
-              <a:defRPr sz="2922" b="1">
-                <a:solidFill>
-                  <a:srgbClr val="293F55"/>
-                </a:solidFill>
-              </a:defRPr>
-            </a:pPr>
-            <a:r>
-              <a:rPr sz="2922" b="1">
-                <a:solidFill>
-                  <a:srgbClr val="293F55"/>
-                </a:solidFill>
-              </a:rPr>
-              <a:t>Nested elastic-net selection</a:t>
-            </a:r>
-          </a:p>
-        </p:txBody>
-      </p:sp>
-      <p:sp>
-        <p:nvSpPr>
-          <p:cNvPr id="94" name="pipeline-4-number-bg">
-            <a:extLst xmlns:a="http://schemas.openxmlformats.org/drawingml/2006/main">
-              <a:ext uri="{FF2B5EF4-FFF2-40B4-BE49-F238E27FC236}">
-                <a16:creationId xmlns:a16="http://schemas.microsoft.com/office/drawing/2014/main" id="{7E1ABE1F-F524-4A4E-A6B9-F4BA4D75ADEC}"/>
-              </a:ext>
-            </a:extLst>
-          </p:cNvPr>
-          <p:cNvSpPr>
-            <a:spLocks xmlns:a="http://schemas.openxmlformats.org/drawingml/2006/main" noGrp="1"/>
-          </p:cNvSpPr>
-          <p:nvPr/>
-        </p:nvSpPr>
-        <p:spPr>
-          <a:xfrm xmlns:a="http://schemas.openxmlformats.org/drawingml/2006/main">
-            <a:off x="1367327" y="13502861"/>
-            <a:ext cx="605531" cy="642007"/>
-          </a:xfrm>
-          <a:prstGeom xmlns:a="http://schemas.openxmlformats.org/drawingml/2006/main" prst="roundRect">
-            <a:avLst>
-              <a:gd name="adj" fmla="val 12584"/>
-            </a:avLst>
-          </a:prstGeom>
-          <a:solidFill xmlns:a="http://schemas.openxmlformats.org/drawingml/2006/main">
-            <a:srgbClr val="E5BC6C"/>
-          </a:solidFill>
-          <a:ln xmlns:a="http://schemas.openxmlformats.org/drawingml/2006/main" w="0">
-            <a:noFill/>
-            <a:prstDash val="solid"/>
-          </a:ln>
-        </p:spPr>
-      </p:sp>
-      <p:sp>
-        <p:nvSpPr>
-          <p:cNvPr id="95" name="pipeline-4-number">
-            <a:extLst xmlns:a="http://schemas.openxmlformats.org/drawingml/2006/main">
-              <a:ext uri="{FF2B5EF4-FFF2-40B4-BE49-F238E27FC236}">
-                <a16:creationId xmlns:a16="http://schemas.microsoft.com/office/drawing/2014/main" id="{DCA041C1-55B9-479A-8C19-6C4DAF663F6F}"/>
-              </a:ext>
-            </a:extLst>
-          </p:cNvPr>
-          <p:cNvSpPr>
-            <a:spLocks xmlns:a="http://schemas.openxmlformats.org/drawingml/2006/main" noGrp="1"/>
-          </p:cNvSpPr>
-          <p:nvPr/>
-        </p:nvSpPr>
-        <p:spPr>
-          <a:xfrm xmlns:a="http://schemas.openxmlformats.org/drawingml/2006/main">
-            <a:off x="1367327" y="13575345"/>
-            <a:ext cx="605531" cy="476328"/>
-          </a:xfrm>
-          <a:prstGeom xmlns:a="http://schemas.openxmlformats.org/drawingml/2006/main" prst="rect">
-            <a:avLst/>
-          </a:prstGeom>
-          <a:noFill xmlns:a="http://schemas.openxmlformats.org/drawingml/2006/main"/>
-          <a:ln xmlns:a="http://schemas.openxmlformats.org/drawingml/2006/main" w="0">
-            <a:noFill/>
-            <a:prstDash val="solid"/>
-          </a:ln>
-        </p:spPr>
-        <p:txBody>
-          <a:bodyPr xmlns:a="http://schemas.openxmlformats.org/drawingml/2006/main"/>
-          <a:lstStyle xmlns:a="http://schemas.openxmlformats.org/drawingml/2006/main"/>
-          <a:p xmlns:a="http://schemas.openxmlformats.org/drawingml/2006/main">
-            <a:pPr algn="ctr">
-              <a:defRPr sz="2384" b="1">
-                <a:solidFill>
-                  <a:srgbClr val="293F55"/>
-                </a:solidFill>
-              </a:defRPr>
-            </a:pPr>
-            <a:r>
-              <a:rPr sz="2384" b="1">
-                <a:solidFill>
-                  <a:srgbClr val="293F55"/>
-                </a:solidFill>
-              </a:rPr>
-              <a:t>4</a:t>
-            </a:r>
-          </a:p>
-        </p:txBody>
-      </p:sp>
-      <p:sp>
-        <p:nvSpPr>
-          <p:cNvPr id="96" name="pipeline-4-text">
-            <a:extLst xmlns:a="http://schemas.openxmlformats.org/drawingml/2006/main">
-              <a:ext uri="{FF2B5EF4-FFF2-40B4-BE49-F238E27FC236}">
-                <a16:creationId xmlns:a16="http://schemas.microsoft.com/office/drawing/2014/main" id="{3740F172-013E-46AF-8324-C93726CBBE9F}"/>
-              </a:ext>
-            </a:extLst>
-          </p:cNvPr>
-          <p:cNvSpPr>
-            <a:spLocks xmlns:a="http://schemas.openxmlformats.org/drawingml/2006/main" noGrp="1"/>
-          </p:cNvSpPr>
-          <p:nvPr/>
-        </p:nvSpPr>
-        <p:spPr>
-          <a:xfrm xmlns:a="http://schemas.openxmlformats.org/drawingml/2006/main">
-            <a:off x="2168190" y="13544280"/>
-            <a:ext cx="11114416" cy="600587"/>
-          </a:xfrm>
-          <a:prstGeom xmlns:a="http://schemas.openxmlformats.org/drawingml/2006/main" prst="rect">
-            <a:avLst/>
-          </a:prstGeom>
-          <a:noFill xmlns:a="http://schemas.openxmlformats.org/drawingml/2006/main"/>
-          <a:ln xmlns:a="http://schemas.openxmlformats.org/drawingml/2006/main" w="0">
-            <a:noFill/>
-            <a:prstDash val="solid"/>
-          </a:ln>
-        </p:spPr>
-        <p:txBody>
-          <a:bodyPr xmlns:a="http://schemas.openxmlformats.org/drawingml/2006/main"/>
-          <a:lstStyle xmlns:a="http://schemas.openxmlformats.org/drawingml/2006/main"/>
-          <a:p xmlns:a="http://schemas.openxmlformats.org/drawingml/2006/main">
-            <a:pPr>
-              <a:defRPr sz="2922" b="1">
-                <a:solidFill>
-                  <a:srgbClr val="293F55"/>
-                </a:solidFill>
-              </a:defRPr>
-            </a:pPr>
-            <a:r>
-              <a:rPr sz="2922" b="1">
-                <a:solidFill>
-                  <a:srgbClr val="293F55"/>
-                </a:solidFill>
-              </a:rPr>
-              <a:t>12-feature score and shift testing</a:t>
-            </a:r>
-          </a:p>
-        </p:txBody>
-      </p:sp>
-      <p:sp>
-        <p:nvSpPr>
-          <p:cNvPr id="97" name="dataset-panel">
-            <a:extLst xmlns:a="http://schemas.openxmlformats.org/drawingml/2006/main">
-              <a:ext uri="{FF2B5EF4-FFF2-40B4-BE49-F238E27FC236}">
-                <a16:creationId xmlns:a16="http://schemas.microsoft.com/office/drawing/2014/main" id="{439D0DD0-310B-4D8E-B837-B69C4EE72DFE}"/>
-              </a:ext>
-            </a:extLst>
-          </p:cNvPr>
-          <p:cNvSpPr>
-            <a:spLocks xmlns:a="http://schemas.openxmlformats.org/drawingml/2006/main" noGrp="1"/>
-          </p:cNvSpPr>
-          <p:nvPr/>
-        </p:nvSpPr>
-        <p:spPr>
-          <a:xfrm xmlns:a="http://schemas.openxmlformats.org/drawingml/2006/main">
-            <a:off x="1367327" y="14600486"/>
-            <a:ext cx="11915279" cy="3727784"/>
-          </a:xfrm>
-          <a:prstGeom xmlns:a="http://schemas.openxmlformats.org/drawingml/2006/main" prst="roundRect">
-            <a:avLst>
-              <a:gd name="adj" fmla="val 3066"/>
-            </a:avLst>
-          </a:prstGeom>
-          <a:solidFill xmlns:a="http://schemas.openxmlformats.org/drawingml/2006/main">
-            <a:srgbClr val="FFFFFF"/>
-          </a:solidFill>
-          <a:ln xmlns:a="http://schemas.openxmlformats.org/drawingml/2006/main" w="29300">
-            <a:solidFill>
-              <a:srgbClr val="DDE5E7"/>
-            </a:solidFill>
-            <a:prstDash val="solid"/>
-          </a:ln>
-        </p:spPr>
-      </p:sp>
-      <p:sp>
-        <p:nvSpPr>
-          <p:cNvPr id="98" name="dataset-kicker">
-            <a:extLst xmlns:a="http://schemas.openxmlformats.org/drawingml/2006/main">
-              <a:ext uri="{FF2B5EF4-FFF2-40B4-BE49-F238E27FC236}">
-                <a16:creationId xmlns:a16="http://schemas.microsoft.com/office/drawing/2014/main" id="{6DB4D789-8229-488E-B1E0-70D01595E660}"/>
-              </a:ext>
-            </a:extLst>
-          </p:cNvPr>
-          <p:cNvSpPr>
-            <a:spLocks xmlns:a="http://schemas.openxmlformats.org/drawingml/2006/main" noGrp="1"/>
-          </p:cNvSpPr>
-          <p:nvPr/>
-        </p:nvSpPr>
-        <p:spPr>
-          <a:xfrm xmlns:a="http://schemas.openxmlformats.org/drawingml/2006/main">
-            <a:off x="1640793" y="14911134"/>
-            <a:ext cx="4492646" cy="414198"/>
-          </a:xfrm>
-          <a:prstGeom xmlns:a="http://schemas.openxmlformats.org/drawingml/2006/main" prst="rect">
-            <a:avLst/>
-          </a:prstGeom>
-          <a:noFill xmlns:a="http://schemas.openxmlformats.org/drawingml/2006/main"/>
-          <a:ln xmlns:a="http://schemas.openxmlformats.org/drawingml/2006/main" w="0">
-            <a:noFill/>
-            <a:prstDash val="solid"/>
-          </a:ln>
-        </p:spPr>
-        <p:txBody>
-          <a:bodyPr xmlns:a="http://schemas.openxmlformats.org/drawingml/2006/main"/>
-          <a:lstStyle xmlns:a="http://schemas.openxmlformats.org/drawingml/2006/main"/>
-          <a:p xmlns:a="http://schemas.openxmlformats.org/drawingml/2006/main">
-            <a:pPr>
-              <a:defRPr sz="2230" b="1">
-                <a:solidFill>
-                  <a:srgbClr val="3E5C78"/>
-                </a:solidFill>
-              </a:defRPr>
-            </a:pPr>
-            <a:r>
-              <a:rPr sz="2230" b="1">
-                <a:solidFill>
-                  <a:srgbClr val="3E5C78"/>
-                </a:solidFill>
-              </a:rPr>
-              <a:t>FOUR SYNTHETIC COHORTS</a:t>
-            </a:r>
-          </a:p>
-        </p:txBody>
-      </p:sp>
-      <p:sp>
-        <p:nvSpPr>
-          <p:cNvPr id="99" name="datasets">
-            <a:extLst xmlns:a="http://schemas.openxmlformats.org/drawingml/2006/main">
-              <a:ext uri="{FF2B5EF4-FFF2-40B4-BE49-F238E27FC236}">
-                <a16:creationId xmlns:a16="http://schemas.microsoft.com/office/drawing/2014/main" id="{E67985CA-3493-4E7C-B4B3-CFFD34D126D2}"/>
-              </a:ext>
-            </a:extLst>
-          </p:cNvPr>
-          <p:cNvSpPr>
-            <a:spLocks xmlns:a="http://schemas.openxmlformats.org/drawingml/2006/main" noGrp="1"/>
-          </p:cNvSpPr>
-          <p:nvPr/>
-        </p:nvSpPr>
-        <p:spPr>
-          <a:xfrm xmlns:a="http://schemas.openxmlformats.org/drawingml/2006/main">
-            <a:off x="1640793" y="15480657"/>
-            <a:ext cx="11368348" cy="2381640"/>
+          <p:cNvPr id="100" name="datasets">
+            <a:extLst xmlns:a="http://schemas.openxmlformats.org/drawingml/2006/main">
+              <a:ext uri="{FF2B5EF4-FFF2-40B4-BE49-F238E27FC236}">
+                <a16:creationId xmlns:a16="http://schemas.microsoft.com/office/drawing/2014/main" id="{FE2365D5-7C6C-4F08-AC80-A60CA65D2881}"/>
+              </a:ext>
+            </a:extLst>
+          </p:cNvPr>
+          <p:cNvSpPr>
+            <a:spLocks xmlns:a="http://schemas.openxmlformats.org/drawingml/2006/main" noGrp="1"/>
+          </p:cNvSpPr>
+          <p:nvPr/>
+        </p:nvSpPr>
+        <p:spPr>
+          <a:xfrm xmlns:a="http://schemas.openxmlformats.org/drawingml/2006/main">
+            <a:off x="1640793" y="16112309"/>
+            <a:ext cx="11368348" cy="1605018"/>
           </a:xfrm>
           <a:prstGeom xmlns:a="http://schemas.openxmlformats.org/drawingml/2006/main" prst="rect">
             <a:avLst/>
@@ -4784,7 +4834,7 @@
                   <a:srgbClr val="293F55"/>
                 </a:solidFill>
               </a:rPr>
-              <a:t>Discovery n=620 · Internal validation n=310</a:t>
+              <a:t>• Discovery n=620 · Internal validation n=310</a:t>
             </a:r>
           </a:p>
           <a:p xmlns:a="http://schemas.openxmlformats.org/drawingml/2006/main">
@@ -4801,7 +4851,7 @@
                   <a:srgbClr val="293F55"/>
                 </a:solidFill>
               </a:rPr>
-              <a:t>External simulation A n=186 · External simulation B n=124</a:t>
+              <a:t>• External A n=186 · External B n=124</a:t>
             </a:r>
           </a:p>
           <a:p xmlns:a="http://schemas.openxmlformats.org/drawingml/2006/main">
@@ -4818,17 +4868,17 @@
                   <a:srgbClr val="293F55"/>
                 </a:solidFill>
               </a:rPr>
-              <a:t>All values are authored fixtures; no participant, specimen, institution, registry or external dataset exists.</a:t>
+              <a:t>• No participants, specimens or external datasets</a:t>
             </a:r>
           </a:p>
         </p:txBody>
       </p:sp>
       <p:sp>
         <p:nvSpPr>
-          <p:cNvPr id="100" name="dataset-evidence">
-            <a:extLst xmlns:a="http://schemas.openxmlformats.org/drawingml/2006/main">
-              <a:ext uri="{FF2B5EF4-FFF2-40B4-BE49-F238E27FC236}">
-                <a16:creationId xmlns:a16="http://schemas.microsoft.com/office/drawing/2014/main" id="{4A688BC7-9156-4E7B-9770-D7723ED862DA}"/>
+          <p:cNvPr id="101" name="dataset-evidence">
+            <a:extLst xmlns:a="http://schemas.openxmlformats.org/drawingml/2006/main">
+              <a:ext uri="{FF2B5EF4-FFF2-40B4-BE49-F238E27FC236}">
+                <a16:creationId xmlns:a16="http://schemas.microsoft.com/office/drawing/2014/main" id="{64EF8C78-2D08-4435-99F0-0E2E27DA1006}"/>
               </a:ext>
             </a:extLst>
           </p:cNvPr>
@@ -4856,14 +4906,14 @@
           <a:lstStyle xmlns:a="http://schemas.openxmlformats.org/drawingml/2006/main"/>
           <a:p xmlns:a="http://schemas.openxmlformats.org/drawingml/2006/main">
             <a:pPr>
-              <a:defRPr sz="1923" i="1">
+              <a:defRPr sz="1923">
                 <a:solidFill>
                   <a:srgbClr val="487AA1"/>
                 </a:solidFill>
               </a:defRPr>
             </a:pPr>
             <a:r>
-              <a:rPr sz="1923" i="1">
+              <a:rPr sz="1923">
                 <a:solidFill>
                   <a:srgbClr val="487AA1"/>
                 </a:solidFill>
@@ -4875,10 +4925,10 @@
       </p:sp>
       <p:sp>
         <p:nvSpPr>
-          <p:cNvPr id="101" name="figure-one-heading-title">
-            <a:extLst xmlns:a="http://schemas.openxmlformats.org/drawingml/2006/main">
-              <a:ext uri="{FF2B5EF4-FFF2-40B4-BE49-F238E27FC236}">
-                <a16:creationId xmlns:a16="http://schemas.microsoft.com/office/drawing/2014/main" id="{780BE44D-0FF3-463A-B5E7-5D34AC8B148B}"/>
+          <p:cNvPr id="102" name="figure-one-heading-title">
+            <a:extLst xmlns:a="http://schemas.openxmlformats.org/drawingml/2006/main">
+              <a:ext uri="{FF2B5EF4-FFF2-40B4-BE49-F238E27FC236}">
+                <a16:creationId xmlns:a16="http://schemas.microsoft.com/office/drawing/2014/main" id="{D60D2329-EC32-418D-83D2-A939D22CD19E}"/>
               </a:ext>
             </a:extLst>
           </p:cNvPr>
@@ -4925,10 +4975,10 @@
       </p:sp>
       <p:sp>
         <p:nvSpPr>
-          <p:cNvPr id="102" name="figure-one-heading-rule">
-            <a:extLst xmlns:a="http://schemas.openxmlformats.org/drawingml/2006/main">
-              <a:ext uri="{FF2B5EF4-FFF2-40B4-BE49-F238E27FC236}">
-                <a16:creationId xmlns:a16="http://schemas.microsoft.com/office/drawing/2014/main" id="{12CCE4D9-A51B-4C95-8B6F-6EFF8A5B0422}"/>
+          <p:cNvPr id="103" name="figure-one-heading-rule">
+            <a:extLst xmlns:a="http://schemas.openxmlformats.org/drawingml/2006/main">
+              <a:ext uri="{FF2B5EF4-FFF2-40B4-BE49-F238E27FC236}">
+                <a16:creationId xmlns:a16="http://schemas.microsoft.com/office/drawing/2014/main" id="{AED3F7BB-3147-46FE-968F-71DC6ED5BDD9}"/>
               </a:ext>
             </a:extLst>
           </p:cNvPr>
@@ -4958,10 +5008,10 @@
       </p:sp>
       <p:sp>
         <p:nvSpPr>
-          <p:cNvPr id="103" name="figure-one-frame">
-            <a:extLst xmlns:a="http://schemas.openxmlformats.org/drawingml/2006/main">
-              <a:ext uri="{FF2B5EF4-FFF2-40B4-BE49-F238E27FC236}">
-                <a16:creationId xmlns:a16="http://schemas.microsoft.com/office/drawing/2014/main" id="{E042F454-F485-4315-8404-56E6DBA114B0}"/>
+          <p:cNvPr id="104" name="figure-one-frame">
+            <a:extLst xmlns:a="http://schemas.openxmlformats.org/drawingml/2006/main">
+              <a:ext uri="{FF2B5EF4-FFF2-40B4-BE49-F238E27FC236}">
+                <a16:creationId xmlns:a16="http://schemas.microsoft.com/office/drawing/2014/main" id="{4DB861D5-1DC7-4AE5-928E-7900C2C1498D}"/>
               </a:ext>
             </a:extLst>
           </p:cNvPr>
@@ -4993,17 +5043,17 @@
       </p:sp>
       <p:pic>
         <p:nvPicPr>
-          <p:cNvPr id="286" name=""/>
+          <p:cNvPr id="289" name=""/>
           <p:cNvPicPr>
             <a:picLocks xmlns:a="http://schemas.openxmlformats.org/drawingml/2006/main" noChangeAspect="1"/>
           </p:cNvPicPr>
           <p:nvPr/>
         </p:nvPicPr>
         <p:blipFill>
-          <a:blip xmlns:r="http://schemas.openxmlformats.org/officeDocument/2006/relationships" xmlns:a="http://schemas.openxmlformats.org/drawingml/2006/main" r:embed="R57359ee687d24694">
+          <a:blip xmlns:r="http://schemas.openxmlformats.org/officeDocument/2006/relationships" xmlns:a="http://schemas.openxmlformats.org/drawingml/2006/main" r:embed="R4c697f8506614021">
             <a:extLst>
               <a:ext uri="{96DAC541-7B7A-43D3-8B79-37D633B846F1}">
-                <asvg:svgBlip xmlns:asvg="http://schemas.microsoft.com/office/drawing/2016/SVG/main" r:embed="Rdaa9baafe7a740f2"/>
+                <asvg:svgBlip xmlns:asvg="http://schemas.microsoft.com/office/drawing/2016/SVG/main" r:embed="R9aec24b44e6f4396"/>
               </a:ext>
             </a:extLst>
           </a:blip>
@@ -5021,10 +5071,10 @@
       </p:pic>
       <p:sp>
         <p:nvSpPr>
-          <p:cNvPr id="105" name="figure-one-caption">
-            <a:extLst xmlns:a="http://schemas.openxmlformats.org/drawingml/2006/main">
-              <a:ext uri="{FF2B5EF4-FFF2-40B4-BE49-F238E27FC236}">
-                <a16:creationId xmlns:a16="http://schemas.microsoft.com/office/drawing/2014/main" id="{75B3DAD7-0D49-4C0C-B1A1-029237D64BBF}"/>
+          <p:cNvPr id="106" name="figure-one-caption">
+            <a:extLst xmlns:a="http://schemas.openxmlformats.org/drawingml/2006/main">
+              <a:ext uri="{FF2B5EF4-FFF2-40B4-BE49-F238E27FC236}">
+                <a16:creationId xmlns:a16="http://schemas.microsoft.com/office/drawing/2014/main" id="{78E5B254-41B3-4858-BAA5-AB5A7B43164D}"/>
               </a:ext>
             </a:extLst>
           </p:cNvPr>
@@ -5036,7 +5086,7 @@
         <p:spPr>
           <a:xfrm xmlns:a="http://schemas.openxmlformats.org/drawingml/2006/main">
             <a:off x="1601726" y="29853334"/>
-            <a:ext cx="11446481" cy="434908"/>
+            <a:ext cx="11446481" cy="341713"/>
           </a:xfrm>
           <a:prstGeom xmlns:a="http://schemas.openxmlformats.org/drawingml/2006/main" prst="rect">
             <a:avLst/>
@@ -5071,21 +5121,21 @@
       </p:sp>
       <p:sp>
         <p:nvSpPr>
-          <p:cNvPr id="106" name="figure-one-source">
-            <a:extLst xmlns:a="http://schemas.openxmlformats.org/drawingml/2006/main">
-              <a:ext uri="{FF2B5EF4-FFF2-40B4-BE49-F238E27FC236}">
-                <a16:creationId xmlns:a16="http://schemas.microsoft.com/office/drawing/2014/main" id="{FE063288-10E2-4DB9-9B5D-082D9DF5789E}"/>
-              </a:ext>
-            </a:extLst>
-          </p:cNvPr>
-          <p:cNvSpPr>
-            <a:spLocks xmlns:a="http://schemas.openxmlformats.org/drawingml/2006/main" noGrp="1"/>
-          </p:cNvSpPr>
-          <p:nvPr/>
-        </p:nvSpPr>
-        <p:spPr>
-          <a:xfrm xmlns:a="http://schemas.openxmlformats.org/drawingml/2006/main">
-            <a:off x="1601726" y="30195047"/>
+          <p:cNvPr id="107" name="figure-one-source">
+            <a:extLst xmlns:a="http://schemas.openxmlformats.org/drawingml/2006/main">
+              <a:ext uri="{FF2B5EF4-FFF2-40B4-BE49-F238E27FC236}">
+                <a16:creationId xmlns:a16="http://schemas.microsoft.com/office/drawing/2014/main" id="{446E60F0-CEE7-45F7-B8DA-316CAB36E21F}"/>
+              </a:ext>
+            </a:extLst>
+          </p:cNvPr>
+          <p:cNvSpPr>
+            <a:spLocks xmlns:a="http://schemas.openxmlformats.org/drawingml/2006/main" noGrp="1"/>
+          </p:cNvSpPr>
+          <p:nvPr/>
+        </p:nvSpPr>
+        <p:spPr>
+          <a:xfrm xmlns:a="http://schemas.openxmlformats.org/drawingml/2006/main">
+            <a:off x="1601726" y="30205402"/>
             <a:ext cx="11446481" cy="393488"/>
           </a:xfrm>
           <a:prstGeom xmlns:a="http://schemas.openxmlformats.org/drawingml/2006/main" prst="rect">
@@ -5102,14 +5152,14 @@
           <a:lstStyle xmlns:a="http://schemas.openxmlformats.org/drawingml/2006/main"/>
           <a:p xmlns:a="http://schemas.openxmlformats.org/drawingml/2006/main">
             <a:pPr>
-              <a:defRPr sz="1923" i="1">
+              <a:defRPr sz="1923">
                 <a:solidFill>
                   <a:srgbClr val="487AA1"/>
                 </a:solidFill>
               </a:defRPr>
             </a:pPr>
             <a:r>
-              <a:rPr sz="1923" i="1">
+              <a:rPr sz="1923">
                 <a:solidFill>
                   <a:srgbClr val="487AA1"/>
                 </a:solidFill>
@@ -5121,10 +5171,10 @@
       </p:sp>
       <p:sp>
         <p:nvSpPr>
-          <p:cNvPr id="107" name="central-takeaway">
-            <a:extLst xmlns:a="http://schemas.openxmlformats.org/drawingml/2006/main">
-              <a:ext uri="{FF2B5EF4-FFF2-40B4-BE49-F238E27FC236}">
-                <a16:creationId xmlns:a16="http://schemas.microsoft.com/office/drawing/2014/main" id="{40C69402-1B3B-4ECD-A44C-43C810334CE5}"/>
+          <p:cNvPr id="108" name="central-takeaway">
+            <a:extLst xmlns:a="http://schemas.openxmlformats.org/drawingml/2006/main">
+              <a:ext uri="{FF2B5EF4-FFF2-40B4-BE49-F238E27FC236}">
+                <a16:creationId xmlns:a16="http://schemas.microsoft.com/office/drawing/2014/main" id="{8A810CD1-3F85-47F6-AE55-3A63F1D20B2D}"/>
               </a:ext>
             </a:extLst>
           </p:cNvPr>
@@ -5154,10 +5204,10 @@
       </p:sp>
       <p:sp>
         <p:nvSpPr>
-          <p:cNvPr id="108" name="takeaway-cape-gradient-1">
-            <a:extLst xmlns:a="http://schemas.openxmlformats.org/drawingml/2006/main">
-              <a:ext uri="{FF2B5EF4-FFF2-40B4-BE49-F238E27FC236}">
-                <a16:creationId xmlns:a16="http://schemas.microsoft.com/office/drawing/2014/main" id="{B9A7BA90-CF65-40CB-B977-77C61A35CA29}"/>
+          <p:cNvPr id="109" name="takeaway-cape-gradient-1">
+            <a:extLst xmlns:a="http://schemas.openxmlformats.org/drawingml/2006/main">
+              <a:ext uri="{FF2B5EF4-FFF2-40B4-BE49-F238E27FC236}">
+                <a16:creationId xmlns:a16="http://schemas.microsoft.com/office/drawing/2014/main" id="{DB2DAEE7-5F17-461D-B532-FB59AE6BA7AE}"/>
               </a:ext>
             </a:extLst>
           </p:cNvPr>
@@ -5187,10 +5237,10 @@
       </p:sp>
       <p:sp>
         <p:nvSpPr>
-          <p:cNvPr id="109" name="takeaway-cape-gradient-2">
-            <a:extLst xmlns:a="http://schemas.openxmlformats.org/drawingml/2006/main">
-              <a:ext uri="{FF2B5EF4-FFF2-40B4-BE49-F238E27FC236}">
-                <a16:creationId xmlns:a16="http://schemas.microsoft.com/office/drawing/2014/main" id="{1BE0DAB0-AB7E-48A6-95A4-86D71E036FC5}"/>
+          <p:cNvPr id="110" name="takeaway-cape-gradient-2">
+            <a:extLst xmlns:a="http://schemas.openxmlformats.org/drawingml/2006/main">
+              <a:ext uri="{FF2B5EF4-FFF2-40B4-BE49-F238E27FC236}">
+                <a16:creationId xmlns:a16="http://schemas.microsoft.com/office/drawing/2014/main" id="{0AE4C28B-ADBF-4A7F-95C0-FD5C55123489}"/>
               </a:ext>
             </a:extLst>
           </p:cNvPr>
@@ -5220,10 +5270,10 @@
       </p:sp>
       <p:sp>
         <p:nvSpPr>
-          <p:cNvPr id="110" name="takeaway-cape-gradient-3">
-            <a:extLst xmlns:a="http://schemas.openxmlformats.org/drawingml/2006/main">
-              <a:ext uri="{FF2B5EF4-FFF2-40B4-BE49-F238E27FC236}">
-                <a16:creationId xmlns:a16="http://schemas.microsoft.com/office/drawing/2014/main" id="{6D249515-BD30-4E59-9B3C-AE32C70E64C9}"/>
+          <p:cNvPr id="111" name="takeaway-cape-gradient-3">
+            <a:extLst xmlns:a="http://schemas.openxmlformats.org/drawingml/2006/main">
+              <a:ext uri="{FF2B5EF4-FFF2-40B4-BE49-F238E27FC236}">
+                <a16:creationId xmlns:a16="http://schemas.microsoft.com/office/drawing/2014/main" id="{E954376E-B94F-422F-9D23-F6F079A59111}"/>
               </a:ext>
             </a:extLst>
           </p:cNvPr>
@@ -5253,10 +5303,10 @@
       </p:sp>
       <p:sp>
         <p:nvSpPr>
-          <p:cNvPr id="111" name="takeaway-cape-gradient-4">
-            <a:extLst xmlns:a="http://schemas.openxmlformats.org/drawingml/2006/main">
-              <a:ext uri="{FF2B5EF4-FFF2-40B4-BE49-F238E27FC236}">
-                <a16:creationId xmlns:a16="http://schemas.microsoft.com/office/drawing/2014/main" id="{ACB2DC3D-250D-4E79-B118-A3A7AE6546A4}"/>
+          <p:cNvPr id="112" name="takeaway-cape-gradient-4">
+            <a:extLst xmlns:a="http://schemas.openxmlformats.org/drawingml/2006/main">
+              <a:ext uri="{FF2B5EF4-FFF2-40B4-BE49-F238E27FC236}">
+                <a16:creationId xmlns:a16="http://schemas.microsoft.com/office/drawing/2014/main" id="{CE14D012-D96F-45EA-A9BD-D1692CA634A2}"/>
               </a:ext>
             </a:extLst>
           </p:cNvPr>
@@ -5286,10 +5336,10 @@
       </p:sp>
       <p:sp>
         <p:nvSpPr>
-          <p:cNvPr id="112" name="takeaway-cape-gradient-5">
-            <a:extLst xmlns:a="http://schemas.openxmlformats.org/drawingml/2006/main">
-              <a:ext uri="{FF2B5EF4-FFF2-40B4-BE49-F238E27FC236}">
-                <a16:creationId xmlns:a16="http://schemas.microsoft.com/office/drawing/2014/main" id="{E5F40FD0-6947-49C6-AE09-1F22017C28BA}"/>
+          <p:cNvPr id="113" name="takeaway-cape-gradient-5">
+            <a:extLst xmlns:a="http://schemas.openxmlformats.org/drawingml/2006/main">
+              <a:ext uri="{FF2B5EF4-FFF2-40B4-BE49-F238E27FC236}">
+                <a16:creationId xmlns:a16="http://schemas.microsoft.com/office/drawing/2014/main" id="{BF8A6236-1EEC-48CC-B756-60A5A58DD2E3}"/>
               </a:ext>
             </a:extLst>
           </p:cNvPr>
@@ -5319,10 +5369,10 @@
       </p:sp>
       <p:sp>
         <p:nvSpPr>
-          <p:cNvPr id="113" name="takeaway-cape-gradient-6">
-            <a:extLst xmlns:a="http://schemas.openxmlformats.org/drawingml/2006/main">
-              <a:ext uri="{FF2B5EF4-FFF2-40B4-BE49-F238E27FC236}">
-                <a16:creationId xmlns:a16="http://schemas.microsoft.com/office/drawing/2014/main" id="{EBD7CC99-CBCE-42AB-83D0-00014E9048B5}"/>
+          <p:cNvPr id="114" name="takeaway-cape-gradient-6">
+            <a:extLst xmlns:a="http://schemas.openxmlformats.org/drawingml/2006/main">
+              <a:ext uri="{FF2B5EF4-FFF2-40B4-BE49-F238E27FC236}">
+                <a16:creationId xmlns:a16="http://schemas.microsoft.com/office/drawing/2014/main" id="{1B15302A-E593-47A6-BA69-12E1D149CBE7}"/>
               </a:ext>
             </a:extLst>
           </p:cNvPr>
@@ -5352,10 +5402,10 @@
       </p:sp>
       <p:sp>
         <p:nvSpPr>
-          <p:cNvPr id="114" name="takeaway-cape-gradient-7">
-            <a:extLst xmlns:a="http://schemas.openxmlformats.org/drawingml/2006/main">
-              <a:ext uri="{FF2B5EF4-FFF2-40B4-BE49-F238E27FC236}">
-                <a16:creationId xmlns:a16="http://schemas.microsoft.com/office/drawing/2014/main" id="{0E65CBAC-430F-485F-A7D8-BEDEF9D108FF}"/>
+          <p:cNvPr id="115" name="takeaway-cape-gradient-7">
+            <a:extLst xmlns:a="http://schemas.openxmlformats.org/drawingml/2006/main">
+              <a:ext uri="{FF2B5EF4-FFF2-40B4-BE49-F238E27FC236}">
+                <a16:creationId xmlns:a16="http://schemas.microsoft.com/office/drawing/2014/main" id="{CB559FC3-8A94-459C-875C-E378EDD1B1D9}"/>
               </a:ext>
             </a:extLst>
           </p:cNvPr>
@@ -5385,10 +5435,10 @@
       </p:sp>
       <p:sp>
         <p:nvSpPr>
-          <p:cNvPr id="115" name="takeaway-cape-gradient-8">
-            <a:extLst xmlns:a="http://schemas.openxmlformats.org/drawingml/2006/main">
-              <a:ext uri="{FF2B5EF4-FFF2-40B4-BE49-F238E27FC236}">
-                <a16:creationId xmlns:a16="http://schemas.microsoft.com/office/drawing/2014/main" id="{8A5E7B40-4541-4DAC-9539-F8B76872408C}"/>
+          <p:cNvPr id="116" name="takeaway-cape-gradient-8">
+            <a:extLst xmlns:a="http://schemas.openxmlformats.org/drawingml/2006/main">
+              <a:ext uri="{FF2B5EF4-FFF2-40B4-BE49-F238E27FC236}">
+                <a16:creationId xmlns:a16="http://schemas.microsoft.com/office/drawing/2014/main" id="{32BACD7C-BA1E-474C-9DFE-811C35D099B1}"/>
               </a:ext>
             </a:extLst>
           </p:cNvPr>
@@ -5418,10 +5468,10 @@
       </p:sp>
       <p:sp>
         <p:nvSpPr>
-          <p:cNvPr id="116" name="takeaway-cape-gradient-9">
-            <a:extLst xmlns:a="http://schemas.openxmlformats.org/drawingml/2006/main">
-              <a:ext uri="{FF2B5EF4-FFF2-40B4-BE49-F238E27FC236}">
-                <a16:creationId xmlns:a16="http://schemas.microsoft.com/office/drawing/2014/main" id="{3D121E39-3F01-4B5F-BF87-0127022E895C}"/>
+          <p:cNvPr id="117" name="takeaway-cape-gradient-9">
+            <a:extLst xmlns:a="http://schemas.openxmlformats.org/drawingml/2006/main">
+              <a:ext uri="{FF2B5EF4-FFF2-40B4-BE49-F238E27FC236}">
+                <a16:creationId xmlns:a16="http://schemas.microsoft.com/office/drawing/2014/main" id="{6DC8332C-7833-4220-8D97-784DAAEB1155}"/>
               </a:ext>
             </a:extLst>
           </p:cNvPr>
@@ -5451,10 +5501,10 @@
       </p:sp>
       <p:sp>
         <p:nvSpPr>
-          <p:cNvPr id="117" name="takeaway-cape-gradient-10">
-            <a:extLst xmlns:a="http://schemas.openxmlformats.org/drawingml/2006/main">
-              <a:ext uri="{FF2B5EF4-FFF2-40B4-BE49-F238E27FC236}">
-                <a16:creationId xmlns:a16="http://schemas.microsoft.com/office/drawing/2014/main" id="{2B3FA3F1-3F59-444C-BCBB-E54224C91A10}"/>
+          <p:cNvPr id="118" name="takeaway-cape-gradient-10">
+            <a:extLst xmlns:a="http://schemas.openxmlformats.org/drawingml/2006/main">
+              <a:ext uri="{FF2B5EF4-FFF2-40B4-BE49-F238E27FC236}">
+                <a16:creationId xmlns:a16="http://schemas.microsoft.com/office/drawing/2014/main" id="{EAD3A555-03EF-4967-B101-F7116CAF20E8}"/>
               </a:ext>
             </a:extLst>
           </p:cNvPr>
@@ -5484,10 +5534,10 @@
       </p:sp>
       <p:sp>
         <p:nvSpPr>
-          <p:cNvPr id="118" name="takeaway-cape-gradient-11">
-            <a:extLst xmlns:a="http://schemas.openxmlformats.org/drawingml/2006/main">
-              <a:ext uri="{FF2B5EF4-FFF2-40B4-BE49-F238E27FC236}">
-                <a16:creationId xmlns:a16="http://schemas.microsoft.com/office/drawing/2014/main" id="{1667834F-7D40-45C4-8165-38FEA2A80315}"/>
+          <p:cNvPr id="119" name="takeaway-cape-gradient-11">
+            <a:extLst xmlns:a="http://schemas.openxmlformats.org/drawingml/2006/main">
+              <a:ext uri="{FF2B5EF4-FFF2-40B4-BE49-F238E27FC236}">
+                <a16:creationId xmlns:a16="http://schemas.microsoft.com/office/drawing/2014/main" id="{58032E8E-8650-4F59-909B-7DECB6C21909}"/>
               </a:ext>
             </a:extLst>
           </p:cNvPr>
@@ -5517,10 +5567,10 @@
       </p:sp>
       <p:sp>
         <p:nvSpPr>
-          <p:cNvPr id="119" name="takeaway-cape-gradient-12">
-            <a:extLst xmlns:a="http://schemas.openxmlformats.org/drawingml/2006/main">
-              <a:ext uri="{FF2B5EF4-FFF2-40B4-BE49-F238E27FC236}">
-                <a16:creationId xmlns:a16="http://schemas.microsoft.com/office/drawing/2014/main" id="{B8FF7280-49C4-4C18-B62A-5484AD035D19}"/>
+          <p:cNvPr id="120" name="takeaway-cape-gradient-12">
+            <a:extLst xmlns:a="http://schemas.openxmlformats.org/drawingml/2006/main">
+              <a:ext uri="{FF2B5EF4-FFF2-40B4-BE49-F238E27FC236}">
+                <a16:creationId xmlns:a16="http://schemas.microsoft.com/office/drawing/2014/main" id="{D4068B1C-662D-4E2A-AC2D-D38B1B8868C4}"/>
               </a:ext>
             </a:extLst>
           </p:cNvPr>
@@ -5550,10 +5600,10 @@
       </p:sp>
       <p:sp>
         <p:nvSpPr>
-          <p:cNvPr id="120" name="takeaway-cape-gradient-13">
-            <a:extLst xmlns:a="http://schemas.openxmlformats.org/drawingml/2006/main">
-              <a:ext uri="{FF2B5EF4-FFF2-40B4-BE49-F238E27FC236}">
-                <a16:creationId xmlns:a16="http://schemas.microsoft.com/office/drawing/2014/main" id="{5BFF4D9B-4D1C-4E7F-BD2F-E48FD458D9D9}"/>
+          <p:cNvPr id="121" name="takeaway-cape-gradient-13">
+            <a:extLst xmlns:a="http://schemas.openxmlformats.org/drawingml/2006/main">
+              <a:ext uri="{FF2B5EF4-FFF2-40B4-BE49-F238E27FC236}">
+                <a16:creationId xmlns:a16="http://schemas.microsoft.com/office/drawing/2014/main" id="{2F460A2E-5D0A-45B1-A642-9AF315A07AD8}"/>
               </a:ext>
             </a:extLst>
           </p:cNvPr>
@@ -5583,10 +5633,10 @@
       </p:sp>
       <p:sp>
         <p:nvSpPr>
-          <p:cNvPr id="121" name="takeaway-cape-gradient-14">
-            <a:extLst xmlns:a="http://schemas.openxmlformats.org/drawingml/2006/main">
-              <a:ext uri="{FF2B5EF4-FFF2-40B4-BE49-F238E27FC236}">
-                <a16:creationId xmlns:a16="http://schemas.microsoft.com/office/drawing/2014/main" id="{A18F5BED-2586-4686-8409-3080FBD5EB8D}"/>
+          <p:cNvPr id="122" name="takeaway-cape-gradient-14">
+            <a:extLst xmlns:a="http://schemas.openxmlformats.org/drawingml/2006/main">
+              <a:ext uri="{FF2B5EF4-FFF2-40B4-BE49-F238E27FC236}">
+                <a16:creationId xmlns:a16="http://schemas.microsoft.com/office/drawing/2014/main" id="{17DD6C70-BFE3-445F-A918-26349C0097CD}"/>
               </a:ext>
             </a:extLst>
           </p:cNvPr>
@@ -5616,10 +5666,10 @@
       </p:sp>
       <p:sp>
         <p:nvSpPr>
-          <p:cNvPr id="122" name="takeaway-cape-gradient-15">
-            <a:extLst xmlns:a="http://schemas.openxmlformats.org/drawingml/2006/main">
-              <a:ext uri="{FF2B5EF4-FFF2-40B4-BE49-F238E27FC236}">
-                <a16:creationId xmlns:a16="http://schemas.microsoft.com/office/drawing/2014/main" id="{1F0FDF09-D5DA-4A10-8AC1-EB189842289D}"/>
+          <p:cNvPr id="123" name="takeaway-cape-gradient-15">
+            <a:extLst xmlns:a="http://schemas.openxmlformats.org/drawingml/2006/main">
+              <a:ext uri="{FF2B5EF4-FFF2-40B4-BE49-F238E27FC236}">
+                <a16:creationId xmlns:a16="http://schemas.microsoft.com/office/drawing/2014/main" id="{7B5D8744-CDCE-42A0-A192-6D2E90A11C69}"/>
               </a:ext>
             </a:extLst>
           </p:cNvPr>
@@ -5649,10 +5699,10 @@
       </p:sp>
       <p:sp>
         <p:nvSpPr>
-          <p:cNvPr id="123" name="takeaway-cape-gradient-16">
-            <a:extLst xmlns:a="http://schemas.openxmlformats.org/drawingml/2006/main">
-              <a:ext uri="{FF2B5EF4-FFF2-40B4-BE49-F238E27FC236}">
-                <a16:creationId xmlns:a16="http://schemas.microsoft.com/office/drawing/2014/main" id="{1F12A1ED-4808-45FC-AAA8-FFDC1814A508}"/>
+          <p:cNvPr id="124" name="takeaway-cape-gradient-16">
+            <a:extLst xmlns:a="http://schemas.openxmlformats.org/drawingml/2006/main">
+              <a:ext uri="{FF2B5EF4-FFF2-40B4-BE49-F238E27FC236}">
+                <a16:creationId xmlns:a16="http://schemas.microsoft.com/office/drawing/2014/main" id="{B748CB42-BF4F-4387-A8D5-373FAC649325}"/>
               </a:ext>
             </a:extLst>
           </p:cNvPr>
@@ -5682,10 +5732,10 @@
       </p:sp>
       <p:sp>
         <p:nvSpPr>
-          <p:cNvPr id="124" name="takeaway-cape-gradient-17">
-            <a:extLst xmlns:a="http://schemas.openxmlformats.org/drawingml/2006/main">
-              <a:ext uri="{FF2B5EF4-FFF2-40B4-BE49-F238E27FC236}">
-                <a16:creationId xmlns:a16="http://schemas.microsoft.com/office/drawing/2014/main" id="{A0957B97-EE0B-4BB2-B1DC-EBFDDA2A6609}"/>
+          <p:cNvPr id="125" name="takeaway-cape-gradient-17">
+            <a:extLst xmlns:a="http://schemas.openxmlformats.org/drawingml/2006/main">
+              <a:ext uri="{FF2B5EF4-FFF2-40B4-BE49-F238E27FC236}">
+                <a16:creationId xmlns:a16="http://schemas.microsoft.com/office/drawing/2014/main" id="{84AA8D0F-5D1C-4E9C-877F-33DDE70D79BE}"/>
               </a:ext>
             </a:extLst>
           </p:cNvPr>
@@ -5715,10 +5765,10 @@
       </p:sp>
       <p:sp>
         <p:nvSpPr>
-          <p:cNvPr id="125" name="takeaway-cape-gradient-18">
-            <a:extLst xmlns:a="http://schemas.openxmlformats.org/drawingml/2006/main">
-              <a:ext uri="{FF2B5EF4-FFF2-40B4-BE49-F238E27FC236}">
-                <a16:creationId xmlns:a16="http://schemas.microsoft.com/office/drawing/2014/main" id="{F358202F-9932-46A6-8209-5CC4DAE6E3D1}"/>
+          <p:cNvPr id="126" name="takeaway-cape-gradient-18">
+            <a:extLst xmlns:a="http://schemas.openxmlformats.org/drawingml/2006/main">
+              <a:ext uri="{FF2B5EF4-FFF2-40B4-BE49-F238E27FC236}">
+                <a16:creationId xmlns:a16="http://schemas.microsoft.com/office/drawing/2014/main" id="{2D09447C-44AA-415B-B8AD-A9726D8DCF9D}"/>
               </a:ext>
             </a:extLst>
           </p:cNvPr>
@@ -5748,10 +5798,10 @@
       </p:sp>
       <p:sp>
         <p:nvSpPr>
-          <p:cNvPr id="126" name="takeaway-cape-gradient-19">
-            <a:extLst xmlns:a="http://schemas.openxmlformats.org/drawingml/2006/main">
-              <a:ext uri="{FF2B5EF4-FFF2-40B4-BE49-F238E27FC236}">
-                <a16:creationId xmlns:a16="http://schemas.microsoft.com/office/drawing/2014/main" id="{50696012-5D7A-4817-BDCC-38DFAA8BF516}"/>
+          <p:cNvPr id="127" name="takeaway-cape-gradient-19">
+            <a:extLst xmlns:a="http://schemas.openxmlformats.org/drawingml/2006/main">
+              <a:ext uri="{FF2B5EF4-FFF2-40B4-BE49-F238E27FC236}">
+                <a16:creationId xmlns:a16="http://schemas.microsoft.com/office/drawing/2014/main" id="{BBC7EBA4-7E4F-460B-AAAF-EB67840A4C24}"/>
               </a:ext>
             </a:extLst>
           </p:cNvPr>
@@ -5781,10 +5831,10 @@
       </p:sp>
       <p:sp>
         <p:nvSpPr>
-          <p:cNvPr id="127" name="takeaway-cape-gradient-20">
-            <a:extLst xmlns:a="http://schemas.openxmlformats.org/drawingml/2006/main">
-              <a:ext uri="{FF2B5EF4-FFF2-40B4-BE49-F238E27FC236}">
-                <a16:creationId xmlns:a16="http://schemas.microsoft.com/office/drawing/2014/main" id="{5A4FFF8A-316B-4109-AA1E-EEA9B0346DFB}"/>
+          <p:cNvPr id="128" name="takeaway-cape-gradient-20">
+            <a:extLst xmlns:a="http://schemas.openxmlformats.org/drawingml/2006/main">
+              <a:ext uri="{FF2B5EF4-FFF2-40B4-BE49-F238E27FC236}">
+                <a16:creationId xmlns:a16="http://schemas.microsoft.com/office/drawing/2014/main" id="{C36ECA0A-098E-4189-83B3-60F910F877F5}"/>
               </a:ext>
             </a:extLst>
           </p:cNvPr>
@@ -5814,10 +5864,10 @@
       </p:sp>
       <p:sp>
         <p:nvSpPr>
-          <p:cNvPr id="128" name="takeaway-cape-gradient-21">
-            <a:extLst xmlns:a="http://schemas.openxmlformats.org/drawingml/2006/main">
-              <a:ext uri="{FF2B5EF4-FFF2-40B4-BE49-F238E27FC236}">
-                <a16:creationId xmlns:a16="http://schemas.microsoft.com/office/drawing/2014/main" id="{00901352-5440-4355-A83F-BD2104359C70}"/>
+          <p:cNvPr id="129" name="takeaway-cape-gradient-21">
+            <a:extLst xmlns:a="http://schemas.openxmlformats.org/drawingml/2006/main">
+              <a:ext uri="{FF2B5EF4-FFF2-40B4-BE49-F238E27FC236}">
+                <a16:creationId xmlns:a16="http://schemas.microsoft.com/office/drawing/2014/main" id="{901EDA86-F654-4BE6-AE0E-F831004D592F}"/>
               </a:ext>
             </a:extLst>
           </p:cNvPr>
@@ -5847,10 +5897,10 @@
       </p:sp>
       <p:sp>
         <p:nvSpPr>
-          <p:cNvPr id="129" name="takeaway-cape-gradient-22">
-            <a:extLst xmlns:a="http://schemas.openxmlformats.org/drawingml/2006/main">
-              <a:ext uri="{FF2B5EF4-FFF2-40B4-BE49-F238E27FC236}">
-                <a16:creationId xmlns:a16="http://schemas.microsoft.com/office/drawing/2014/main" id="{FD0AF04C-06D3-48C9-84F7-612B878D82B1}"/>
+          <p:cNvPr id="130" name="takeaway-cape-gradient-22">
+            <a:extLst xmlns:a="http://schemas.openxmlformats.org/drawingml/2006/main">
+              <a:ext uri="{FF2B5EF4-FFF2-40B4-BE49-F238E27FC236}">
+                <a16:creationId xmlns:a16="http://schemas.microsoft.com/office/drawing/2014/main" id="{F091716A-AAA1-451C-8F19-170157937339}"/>
               </a:ext>
             </a:extLst>
           </p:cNvPr>
@@ -5880,10 +5930,10 @@
       </p:sp>
       <p:sp>
         <p:nvSpPr>
-          <p:cNvPr id="130" name="takeaway-cape-gradient-23">
-            <a:extLst xmlns:a="http://schemas.openxmlformats.org/drawingml/2006/main">
-              <a:ext uri="{FF2B5EF4-FFF2-40B4-BE49-F238E27FC236}">
-                <a16:creationId xmlns:a16="http://schemas.microsoft.com/office/drawing/2014/main" id="{ED7710E3-AE6E-4BD6-8E15-70A87E0BCBCE}"/>
+          <p:cNvPr id="131" name="takeaway-cape-gradient-23">
+            <a:extLst xmlns:a="http://schemas.openxmlformats.org/drawingml/2006/main">
+              <a:ext uri="{FF2B5EF4-FFF2-40B4-BE49-F238E27FC236}">
+                <a16:creationId xmlns:a16="http://schemas.microsoft.com/office/drawing/2014/main" id="{23F558A4-30A4-4BB4-A506-DB671B7FC371}"/>
               </a:ext>
             </a:extLst>
           </p:cNvPr>
@@ -5913,10 +5963,10 @@
       </p:sp>
       <p:sp>
         <p:nvSpPr>
-          <p:cNvPr id="131" name="takeaway-cape-gradient-24">
-            <a:extLst xmlns:a="http://schemas.openxmlformats.org/drawingml/2006/main">
-              <a:ext uri="{FF2B5EF4-FFF2-40B4-BE49-F238E27FC236}">
-                <a16:creationId xmlns:a16="http://schemas.microsoft.com/office/drawing/2014/main" id="{87A0B71A-1D05-49C3-A82D-96CC8EC4DA96}"/>
+          <p:cNvPr id="132" name="takeaway-cape-gradient-24">
+            <a:extLst xmlns:a="http://schemas.openxmlformats.org/drawingml/2006/main">
+              <a:ext uri="{FF2B5EF4-FFF2-40B4-BE49-F238E27FC236}">
+                <a16:creationId xmlns:a16="http://schemas.microsoft.com/office/drawing/2014/main" id="{DBBAA715-27FB-4F0C-9E97-30B32582351D}"/>
               </a:ext>
             </a:extLst>
           </p:cNvPr>
@@ -5946,10 +5996,10 @@
       </p:sp>
       <p:sp>
         <p:nvSpPr>
-          <p:cNvPr id="132" name="takeaway-cape-gradient-25">
-            <a:extLst xmlns:a="http://schemas.openxmlformats.org/drawingml/2006/main">
-              <a:ext uri="{FF2B5EF4-FFF2-40B4-BE49-F238E27FC236}">
-                <a16:creationId xmlns:a16="http://schemas.microsoft.com/office/drawing/2014/main" id="{00A32034-D90F-4468-9B09-626917BA1BC1}"/>
+          <p:cNvPr id="133" name="takeaway-cape-gradient-25">
+            <a:extLst xmlns:a="http://schemas.openxmlformats.org/drawingml/2006/main">
+              <a:ext uri="{FF2B5EF4-FFF2-40B4-BE49-F238E27FC236}">
+                <a16:creationId xmlns:a16="http://schemas.microsoft.com/office/drawing/2014/main" id="{3F8A4BA3-4B37-44FC-978F-FFCC02803852}"/>
               </a:ext>
             </a:extLst>
           </p:cNvPr>
@@ -5979,10 +6029,10 @@
       </p:sp>
       <p:sp>
         <p:nvSpPr>
-          <p:cNvPr id="133" name="takeaway-cape-gradient-26">
-            <a:extLst xmlns:a="http://schemas.openxmlformats.org/drawingml/2006/main">
-              <a:ext uri="{FF2B5EF4-FFF2-40B4-BE49-F238E27FC236}">
-                <a16:creationId xmlns:a16="http://schemas.microsoft.com/office/drawing/2014/main" id="{3C9F5EB5-5B27-483C-84C7-3DBEB197ED47}"/>
+          <p:cNvPr id="134" name="takeaway-cape-gradient-26">
+            <a:extLst xmlns:a="http://schemas.openxmlformats.org/drawingml/2006/main">
+              <a:ext uri="{FF2B5EF4-FFF2-40B4-BE49-F238E27FC236}">
+                <a16:creationId xmlns:a16="http://schemas.microsoft.com/office/drawing/2014/main" id="{41481A61-D1F2-4D9C-90A0-B3A26D11CD0B}"/>
               </a:ext>
             </a:extLst>
           </p:cNvPr>
@@ -6012,10 +6062,10 @@
       </p:sp>
       <p:sp>
         <p:nvSpPr>
-          <p:cNvPr id="134" name="takeaway-cape-gradient-27">
-            <a:extLst xmlns:a="http://schemas.openxmlformats.org/drawingml/2006/main">
-              <a:ext uri="{FF2B5EF4-FFF2-40B4-BE49-F238E27FC236}">
-                <a16:creationId xmlns:a16="http://schemas.microsoft.com/office/drawing/2014/main" id="{4548BB1B-CC4A-4D37-BE52-FC2602257A3A}"/>
+          <p:cNvPr id="135" name="takeaway-cape-gradient-27">
+            <a:extLst xmlns:a="http://schemas.openxmlformats.org/drawingml/2006/main">
+              <a:ext uri="{FF2B5EF4-FFF2-40B4-BE49-F238E27FC236}">
+                <a16:creationId xmlns:a16="http://schemas.microsoft.com/office/drawing/2014/main" id="{B62B35F3-8614-4D3E-BF5B-DA98720C2433}"/>
               </a:ext>
             </a:extLst>
           </p:cNvPr>
@@ -6045,10 +6095,10 @@
       </p:sp>
       <p:sp>
         <p:nvSpPr>
-          <p:cNvPr id="135" name="takeaway-cape-gradient-28">
-            <a:extLst xmlns:a="http://schemas.openxmlformats.org/drawingml/2006/main">
-              <a:ext uri="{FF2B5EF4-FFF2-40B4-BE49-F238E27FC236}">
-                <a16:creationId xmlns:a16="http://schemas.microsoft.com/office/drawing/2014/main" id="{7075CF74-9448-4AA9-97D6-0BDF0EE15C04}"/>
+          <p:cNvPr id="136" name="takeaway-cape-gradient-28">
+            <a:extLst xmlns:a="http://schemas.openxmlformats.org/drawingml/2006/main">
+              <a:ext uri="{FF2B5EF4-FFF2-40B4-BE49-F238E27FC236}">
+                <a16:creationId xmlns:a16="http://schemas.microsoft.com/office/drawing/2014/main" id="{14AD6C67-01A8-44FF-AEF3-94A63FF85B1A}"/>
               </a:ext>
             </a:extLst>
           </p:cNvPr>
@@ -6078,10 +6128,10 @@
       </p:sp>
       <p:sp>
         <p:nvSpPr>
-          <p:cNvPr id="136" name="takeaway-cape-gradient-29">
-            <a:extLst xmlns:a="http://schemas.openxmlformats.org/drawingml/2006/main">
-              <a:ext uri="{FF2B5EF4-FFF2-40B4-BE49-F238E27FC236}">
-                <a16:creationId xmlns:a16="http://schemas.microsoft.com/office/drawing/2014/main" id="{BC61115C-939E-4761-A5D6-A44E9D6DC998}"/>
+          <p:cNvPr id="137" name="takeaway-cape-gradient-29">
+            <a:extLst xmlns:a="http://schemas.openxmlformats.org/drawingml/2006/main">
+              <a:ext uri="{FF2B5EF4-FFF2-40B4-BE49-F238E27FC236}">
+                <a16:creationId xmlns:a16="http://schemas.microsoft.com/office/drawing/2014/main" id="{EA2DAA6C-7F08-4D27-88D1-D8D9BED781EF}"/>
               </a:ext>
             </a:extLst>
           </p:cNvPr>
@@ -6111,10 +6161,10 @@
       </p:sp>
       <p:sp>
         <p:nvSpPr>
-          <p:cNvPr id="137" name="takeaway-cape-gradient-30">
-            <a:extLst xmlns:a="http://schemas.openxmlformats.org/drawingml/2006/main">
-              <a:ext uri="{FF2B5EF4-FFF2-40B4-BE49-F238E27FC236}">
-                <a16:creationId xmlns:a16="http://schemas.microsoft.com/office/drawing/2014/main" id="{62914CE1-53EC-40C8-8A2B-7EE8B22A94FA}"/>
+          <p:cNvPr id="138" name="takeaway-cape-gradient-30">
+            <a:extLst xmlns:a="http://schemas.openxmlformats.org/drawingml/2006/main">
+              <a:ext uri="{FF2B5EF4-FFF2-40B4-BE49-F238E27FC236}">
+                <a16:creationId xmlns:a16="http://schemas.microsoft.com/office/drawing/2014/main" id="{67A466A9-A358-4A28-9E3D-D911AE14A96C}"/>
               </a:ext>
             </a:extLst>
           </p:cNvPr>
@@ -6144,10 +6194,10 @@
       </p:sp>
       <p:sp>
         <p:nvSpPr>
-          <p:cNvPr id="138" name="takeaway-cape-gradient-31">
-            <a:extLst xmlns:a="http://schemas.openxmlformats.org/drawingml/2006/main">
-              <a:ext uri="{FF2B5EF4-FFF2-40B4-BE49-F238E27FC236}">
-                <a16:creationId xmlns:a16="http://schemas.microsoft.com/office/drawing/2014/main" id="{368D0B06-5C88-4CE9-967D-81E0ECD96681}"/>
+          <p:cNvPr id="139" name="takeaway-cape-gradient-31">
+            <a:extLst xmlns:a="http://schemas.openxmlformats.org/drawingml/2006/main">
+              <a:ext uri="{FF2B5EF4-FFF2-40B4-BE49-F238E27FC236}">
+                <a16:creationId xmlns:a16="http://schemas.microsoft.com/office/drawing/2014/main" id="{D63AABAC-B754-49CF-87F0-65DB5371320E}"/>
               </a:ext>
             </a:extLst>
           </p:cNvPr>
@@ -6177,10 +6227,10 @@
       </p:sp>
       <p:sp>
         <p:nvSpPr>
-          <p:cNvPr id="139" name="takeaway-cape-gradient-32">
-            <a:extLst xmlns:a="http://schemas.openxmlformats.org/drawingml/2006/main">
-              <a:ext uri="{FF2B5EF4-FFF2-40B4-BE49-F238E27FC236}">
-                <a16:creationId xmlns:a16="http://schemas.microsoft.com/office/drawing/2014/main" id="{78C79ED0-43F5-465E-8F93-CAA36852908A}"/>
+          <p:cNvPr id="140" name="takeaway-cape-gradient-32">
+            <a:extLst xmlns:a="http://schemas.openxmlformats.org/drawingml/2006/main">
+              <a:ext uri="{FF2B5EF4-FFF2-40B4-BE49-F238E27FC236}">
+                <a16:creationId xmlns:a16="http://schemas.microsoft.com/office/drawing/2014/main" id="{D1326E4F-2FAE-4126-A988-BCB243B53CD6}"/>
               </a:ext>
             </a:extLst>
           </p:cNvPr>
@@ -6210,10 +6260,10 @@
       </p:sp>
       <p:sp>
         <p:nvSpPr>
-          <p:cNvPr id="140" name="central-takeaway-title">
-            <a:extLst xmlns:a="http://schemas.openxmlformats.org/drawingml/2006/main">
-              <a:ext uri="{FF2B5EF4-FFF2-40B4-BE49-F238E27FC236}">
-                <a16:creationId xmlns:a16="http://schemas.microsoft.com/office/drawing/2014/main" id="{E4E9857B-FEDD-471D-911C-2D60E5BCD889}"/>
+          <p:cNvPr id="141" name="central-takeaway-title">
+            <a:extLst xmlns:a="http://schemas.openxmlformats.org/drawingml/2006/main">
+              <a:ext uri="{FF2B5EF4-FFF2-40B4-BE49-F238E27FC236}">
+                <a16:creationId xmlns:a16="http://schemas.microsoft.com/office/drawing/2014/main" id="{7D7BD7CA-050B-4615-A958-6D1DAB11B917}"/>
               </a:ext>
             </a:extLst>
           </p:cNvPr>
@@ -6253,17 +6303,17 @@
                   <a:srgbClr val="293F55"/>
                 </a:solidFill>
               </a:rPr>
-              <a:t>External simulations retained C-indices of 0.75 and 0.74</a:t>
+              <a:t>External C-indices remained 0.75 and 0.74</a:t>
             </a:r>
           </a:p>
         </p:txBody>
       </p:sp>
       <p:sp>
         <p:nvSpPr>
-          <p:cNvPr id="141" name="central-takeaway-subtitle">
-            <a:extLst xmlns:a="http://schemas.openxmlformats.org/drawingml/2006/main">
-              <a:ext uri="{FF2B5EF4-FFF2-40B4-BE49-F238E27FC236}">
-                <a16:creationId xmlns:a16="http://schemas.microsoft.com/office/drawing/2014/main" id="{2FB18563-4A67-4BAB-A640-E1C4B7919749}"/>
+          <p:cNvPr id="142" name="central-takeaway-subtitle">
+            <a:extLst xmlns:a="http://schemas.openxmlformats.org/drawingml/2006/main">
+              <a:ext uri="{FF2B5EF4-FFF2-40B4-BE49-F238E27FC236}">
+                <a16:creationId xmlns:a16="http://schemas.microsoft.com/office/drawing/2014/main" id="{5B33DA0E-9D4B-4431-BEED-7101F216A377}"/>
               </a:ext>
             </a:extLst>
           </p:cNvPr>
@@ -6310,10 +6360,10 @@
       </p:sp>
       <p:sp>
         <p:nvSpPr>
-          <p:cNvPr id="142" name="takeaway-evidence">
-            <a:extLst xmlns:a="http://schemas.openxmlformats.org/drawingml/2006/main">
-              <a:ext uri="{FF2B5EF4-FFF2-40B4-BE49-F238E27FC236}">
-                <a16:creationId xmlns:a16="http://schemas.microsoft.com/office/drawing/2014/main" id="{B8CECA79-A76C-402D-96EB-1BCF39FE635B}"/>
+          <p:cNvPr id="143" name="takeaway-evidence">
+            <a:extLst xmlns:a="http://schemas.openxmlformats.org/drawingml/2006/main">
+              <a:ext uri="{FF2B5EF4-FFF2-40B4-BE49-F238E27FC236}">
+                <a16:creationId xmlns:a16="http://schemas.microsoft.com/office/drawing/2014/main" id="{1247BB90-DD5F-46AB-9766-38138379D04D}"/>
               </a:ext>
             </a:extLst>
           </p:cNvPr>
@@ -6341,14 +6391,14 @@
           <a:lstStyle xmlns:a="http://schemas.openxmlformats.org/drawingml/2006/main"/>
           <a:p xmlns:a="http://schemas.openxmlformats.org/drawingml/2006/main">
             <a:pPr>
-              <a:defRPr sz="1923" i="1">
+              <a:defRPr sz="1923">
                 <a:solidFill>
                   <a:srgbClr val="487AA1"/>
                 </a:solidFill>
               </a:defRPr>
             </a:pPr>
             <a:r>
-              <a:rPr sz="1923" i="1">
+              <a:rPr sz="1923">
                 <a:solidFill>
                   <a:srgbClr val="487AA1"/>
                 </a:solidFill>
@@ -6360,10 +6410,10 @@
       </p:sp>
       <p:sp>
         <p:nvSpPr>
-          <p:cNvPr id="143" name="figure-two-heading-title">
-            <a:extLst xmlns:a="http://schemas.openxmlformats.org/drawingml/2006/main">
-              <a:ext uri="{FF2B5EF4-FFF2-40B4-BE49-F238E27FC236}">
-                <a16:creationId xmlns:a16="http://schemas.microsoft.com/office/drawing/2014/main" id="{A313DA0D-FE69-4EE6-9B95-19F560B314C2}"/>
+          <p:cNvPr id="144" name="figure-two-heading-title">
+            <a:extLst xmlns:a="http://schemas.openxmlformats.org/drawingml/2006/main">
+              <a:ext uri="{FF2B5EF4-FFF2-40B4-BE49-F238E27FC236}">
+                <a16:creationId xmlns:a16="http://schemas.microsoft.com/office/drawing/2014/main" id="{4B3BF115-9A55-4546-B590-B20E6F0F4671}"/>
               </a:ext>
             </a:extLst>
           </p:cNvPr>
@@ -6410,10 +6460,10 @@
       </p:sp>
       <p:sp>
         <p:nvSpPr>
-          <p:cNvPr id="144" name="figure-two-heading-rule">
-            <a:extLst xmlns:a="http://schemas.openxmlformats.org/drawingml/2006/main">
-              <a:ext uri="{FF2B5EF4-FFF2-40B4-BE49-F238E27FC236}">
-                <a16:creationId xmlns:a16="http://schemas.microsoft.com/office/drawing/2014/main" id="{F2016D1A-8E7D-43EC-8C40-467400D24DB6}"/>
+          <p:cNvPr id="145" name="figure-two-heading-rule">
+            <a:extLst xmlns:a="http://schemas.openxmlformats.org/drawingml/2006/main">
+              <a:ext uri="{FF2B5EF4-FFF2-40B4-BE49-F238E27FC236}">
+                <a16:creationId xmlns:a16="http://schemas.microsoft.com/office/drawing/2014/main" id="{365CE749-D096-4049-B35A-3E2A1459054A}"/>
               </a:ext>
             </a:extLst>
           </p:cNvPr>
@@ -6443,10 +6493,10 @@
       </p:sp>
       <p:sp>
         <p:nvSpPr>
-          <p:cNvPr id="145" name="figure-two-frame">
-            <a:extLst xmlns:a="http://schemas.openxmlformats.org/drawingml/2006/main">
-              <a:ext uri="{FF2B5EF4-FFF2-40B4-BE49-F238E27FC236}">
-                <a16:creationId xmlns:a16="http://schemas.microsoft.com/office/drawing/2014/main" id="{91A62861-E2E3-4044-8CE8-A1B5FD001DB4}"/>
+          <p:cNvPr id="146" name="figure-two-frame">
+            <a:extLst xmlns:a="http://schemas.openxmlformats.org/drawingml/2006/main">
+              <a:ext uri="{FF2B5EF4-FFF2-40B4-BE49-F238E27FC236}">
+                <a16:creationId xmlns:a16="http://schemas.microsoft.com/office/drawing/2014/main" id="{52B990D0-5B42-42CD-8845-F8F8DD9449E5}"/>
               </a:ext>
             </a:extLst>
           </p:cNvPr>
@@ -6478,17 +6528,17 @@
       </p:sp>
       <p:pic>
         <p:nvPicPr>
-          <p:cNvPr id="328" name=""/>
+          <p:cNvPr id="331" name=""/>
           <p:cNvPicPr>
             <a:picLocks xmlns:a="http://schemas.openxmlformats.org/drawingml/2006/main" noChangeAspect="1"/>
           </p:cNvPicPr>
           <p:nvPr/>
         </p:nvPicPr>
         <p:blipFill>
-          <a:blip xmlns:r="http://schemas.openxmlformats.org/officeDocument/2006/relationships" xmlns:a="http://schemas.openxmlformats.org/drawingml/2006/main" r:embed="R7dfcfbaa680e401d">
+          <a:blip xmlns:r="http://schemas.openxmlformats.org/officeDocument/2006/relationships" xmlns:a="http://schemas.openxmlformats.org/drawingml/2006/main" r:embed="R7055edd2b6ab4d1f">
             <a:extLst>
               <a:ext uri="{96DAC541-7B7A-43D3-8B79-37D633B846F1}">
-                <asvg:svgBlip xmlns:asvg="http://schemas.microsoft.com/office/drawing/2016/SVG/main" r:embed="R0bce24d9bb634c62"/>
+                <asvg:svgBlip xmlns:asvg="http://schemas.microsoft.com/office/drawing/2016/SVG/main" r:embed="R52053fe2e6e14ac7"/>
               </a:ext>
             </a:extLst>
           </a:blip>
@@ -6506,10 +6556,10 @@
       </p:pic>
       <p:sp>
         <p:nvSpPr>
-          <p:cNvPr id="147" name="figure-two-caption">
-            <a:extLst xmlns:a="http://schemas.openxmlformats.org/drawingml/2006/main">
-              <a:ext uri="{FF2B5EF4-FFF2-40B4-BE49-F238E27FC236}">
-                <a16:creationId xmlns:a16="http://schemas.microsoft.com/office/drawing/2014/main" id="{ACD367ED-8923-404F-B3B4-45A06C9A1F57}"/>
+          <p:cNvPr id="148" name="figure-two-caption">
+            <a:extLst xmlns:a="http://schemas.openxmlformats.org/drawingml/2006/main">
+              <a:ext uri="{FF2B5EF4-FFF2-40B4-BE49-F238E27FC236}">
+                <a16:creationId xmlns:a16="http://schemas.microsoft.com/office/drawing/2014/main" id="{5C4734A5-A6F2-43FC-AA8E-5BA33ACC7D3B}"/>
               </a:ext>
             </a:extLst>
           </p:cNvPr>
@@ -6521,7 +6571,7 @@
         <p:spPr>
           <a:xfrm xmlns:a="http://schemas.openxmlformats.org/drawingml/2006/main">
             <a:off x="14103002" y="23381487"/>
-            <a:ext cx="13546305" cy="434908"/>
+            <a:ext cx="13546305" cy="341713"/>
           </a:xfrm>
           <a:prstGeom xmlns:a="http://schemas.openxmlformats.org/drawingml/2006/main" prst="rect">
             <a:avLst/>
@@ -6556,21 +6606,21 @@
       </p:sp>
       <p:sp>
         <p:nvSpPr>
-          <p:cNvPr id="148" name="figure-two-source">
-            <a:extLst xmlns:a="http://schemas.openxmlformats.org/drawingml/2006/main">
-              <a:ext uri="{FF2B5EF4-FFF2-40B4-BE49-F238E27FC236}">
-                <a16:creationId xmlns:a16="http://schemas.microsoft.com/office/drawing/2014/main" id="{6816F7A9-39EB-4728-9826-67F52F23B6E9}"/>
-              </a:ext>
-            </a:extLst>
-          </p:cNvPr>
-          <p:cNvSpPr>
-            <a:spLocks xmlns:a="http://schemas.openxmlformats.org/drawingml/2006/main" noGrp="1"/>
-          </p:cNvSpPr>
-          <p:nvPr/>
-        </p:nvSpPr>
-        <p:spPr>
-          <a:xfrm xmlns:a="http://schemas.openxmlformats.org/drawingml/2006/main">
-            <a:off x="14103002" y="23723201"/>
+          <p:cNvPr id="149" name="figure-two-source">
+            <a:extLst xmlns:a="http://schemas.openxmlformats.org/drawingml/2006/main">
+              <a:ext uri="{FF2B5EF4-FFF2-40B4-BE49-F238E27FC236}">
+                <a16:creationId xmlns:a16="http://schemas.microsoft.com/office/drawing/2014/main" id="{3A0682A8-447B-4781-B07F-645CA809F776}"/>
+              </a:ext>
+            </a:extLst>
+          </p:cNvPr>
+          <p:cNvSpPr>
+            <a:spLocks xmlns:a="http://schemas.openxmlformats.org/drawingml/2006/main" noGrp="1"/>
+          </p:cNvSpPr>
+          <p:nvPr/>
+        </p:nvSpPr>
+        <p:spPr>
+          <a:xfrm xmlns:a="http://schemas.openxmlformats.org/drawingml/2006/main">
+            <a:off x="14103002" y="23733555"/>
             <a:ext cx="13546305" cy="393488"/>
           </a:xfrm>
           <a:prstGeom xmlns:a="http://schemas.openxmlformats.org/drawingml/2006/main" prst="rect">
@@ -6587,14 +6637,14 @@
           <a:lstStyle xmlns:a="http://schemas.openxmlformats.org/drawingml/2006/main"/>
           <a:p xmlns:a="http://schemas.openxmlformats.org/drawingml/2006/main">
             <a:pPr>
-              <a:defRPr sz="1923" i="1">
+              <a:defRPr sz="1923">
                 <a:solidFill>
                   <a:srgbClr val="487AA1"/>
                 </a:solidFill>
               </a:defRPr>
             </a:pPr>
             <a:r>
-              <a:rPr sz="1923" i="1">
+              <a:rPr sz="1923">
                 <a:solidFill>
                   <a:srgbClr val="487AA1"/>
                 </a:solidFill>
@@ -6606,10 +6656,10 @@
       </p:sp>
       <p:sp>
         <p:nvSpPr>
-          <p:cNvPr id="149" name="validation-heading-title">
-            <a:extLst xmlns:a="http://schemas.openxmlformats.org/drawingml/2006/main">
-              <a:ext uri="{FF2B5EF4-FFF2-40B4-BE49-F238E27FC236}">
-                <a16:creationId xmlns:a16="http://schemas.microsoft.com/office/drawing/2014/main" id="{3AB405DE-E08B-4215-A6CC-025433598C0D}"/>
+          <p:cNvPr id="150" name="validation-heading-title">
+            <a:extLst xmlns:a="http://schemas.openxmlformats.org/drawingml/2006/main">
+              <a:ext uri="{FF2B5EF4-FFF2-40B4-BE49-F238E27FC236}">
+                <a16:creationId xmlns:a16="http://schemas.microsoft.com/office/drawing/2014/main" id="{2ED1A7FC-BCDE-4F52-8935-88F2635129C7}"/>
               </a:ext>
             </a:extLst>
           </p:cNvPr>
@@ -6656,10 +6706,10 @@
       </p:sp>
       <p:sp>
         <p:nvSpPr>
-          <p:cNvPr id="150" name="validation-heading-rule">
-            <a:extLst xmlns:a="http://schemas.openxmlformats.org/drawingml/2006/main">
-              <a:ext uri="{FF2B5EF4-FFF2-40B4-BE49-F238E27FC236}">
-                <a16:creationId xmlns:a16="http://schemas.microsoft.com/office/drawing/2014/main" id="{819E2423-C20A-494B-9520-EA3CAC5A2A93}"/>
+          <p:cNvPr id="151" name="validation-heading-rule">
+            <a:extLst xmlns:a="http://schemas.openxmlformats.org/drawingml/2006/main">
+              <a:ext uri="{FF2B5EF4-FFF2-40B4-BE49-F238E27FC236}">
+                <a16:creationId xmlns:a16="http://schemas.microsoft.com/office/drawing/2014/main" id="{68B8B789-BCF3-45AA-B4BC-862EF1B14E3B}"/>
               </a:ext>
             </a:extLst>
           </p:cNvPr>
@@ -6689,10 +6739,10 @@
       </p:sp>
       <p:sp>
         <p:nvSpPr>
-          <p:cNvPr id="151" name="validation-panel">
-            <a:extLst xmlns:a="http://schemas.openxmlformats.org/drawingml/2006/main">
-              <a:ext uri="{FF2B5EF4-FFF2-40B4-BE49-F238E27FC236}">
-                <a16:creationId xmlns:a16="http://schemas.microsoft.com/office/drawing/2014/main" id="{71F7DF57-A1CA-44DC-9BED-ED9DF0DB25BF}"/>
+          <p:cNvPr id="152" name="validation-panel">
+            <a:extLst xmlns:a="http://schemas.openxmlformats.org/drawingml/2006/main">
+              <a:ext uri="{FF2B5EF4-FFF2-40B4-BE49-F238E27FC236}">
+                <a16:creationId xmlns:a16="http://schemas.microsoft.com/office/drawing/2014/main" id="{F631F594-6958-4632-B6B9-F1759DC2F649}"/>
               </a:ext>
             </a:extLst>
           </p:cNvPr>
@@ -6724,10 +6774,10 @@
       </p:sp>
       <p:sp>
         <p:nvSpPr>
-          <p:cNvPr id="152" name="validation">
-            <a:extLst xmlns:a="http://schemas.openxmlformats.org/drawingml/2006/main">
-              <a:ext uri="{FF2B5EF4-FFF2-40B4-BE49-F238E27FC236}">
-                <a16:creationId xmlns:a16="http://schemas.microsoft.com/office/drawing/2014/main" id="{5AF59059-14B3-4852-A60B-E2B372CF03F5}"/>
+          <p:cNvPr id="153" name="validation">
+            <a:extLst xmlns:a="http://schemas.openxmlformats.org/drawingml/2006/main">
+              <a:ext uri="{FF2B5EF4-FFF2-40B4-BE49-F238E27FC236}">
+                <a16:creationId xmlns:a16="http://schemas.microsoft.com/office/drawing/2014/main" id="{42D7F164-B1F1-4D3C-9E27-559A7849BFF9}"/>
               </a:ext>
             </a:extLst>
           </p:cNvPr>
@@ -6825,10 +6875,10 @@
       </p:sp>
       <p:sp>
         <p:nvSpPr>
-          <p:cNvPr id="153" name="validation-evidence">
-            <a:extLst xmlns:a="http://schemas.openxmlformats.org/drawingml/2006/main">
-              <a:ext uri="{FF2B5EF4-FFF2-40B4-BE49-F238E27FC236}">
-                <a16:creationId xmlns:a16="http://schemas.microsoft.com/office/drawing/2014/main" id="{17C7B1C9-52F2-4F05-8D1A-58955D91ADD2}"/>
+          <p:cNvPr id="154" name="validation-evidence">
+            <a:extLst xmlns:a="http://schemas.openxmlformats.org/drawingml/2006/main">
+              <a:ext uri="{FF2B5EF4-FFF2-40B4-BE49-F238E27FC236}">
+                <a16:creationId xmlns:a16="http://schemas.microsoft.com/office/drawing/2014/main" id="{452BC24A-3282-4912-9219-0301F42B8823}"/>
               </a:ext>
             </a:extLst>
           </p:cNvPr>
@@ -6856,14 +6906,14 @@
           <a:lstStyle xmlns:a="http://schemas.openxmlformats.org/drawingml/2006/main"/>
           <a:p xmlns:a="http://schemas.openxmlformats.org/drawingml/2006/main">
             <a:pPr>
-              <a:defRPr sz="1923" i="1">
+              <a:defRPr sz="1923">
                 <a:solidFill>
                   <a:srgbClr val="487AA1"/>
                 </a:solidFill>
               </a:defRPr>
             </a:pPr>
             <a:r>
-              <a:rPr sz="1923" i="1">
+              <a:rPr sz="1923">
                 <a:solidFill>
                   <a:srgbClr val="487AA1"/>
                 </a:solidFill>
@@ -6875,10 +6925,10 @@
       </p:sp>
       <p:sp>
         <p:nvSpPr>
-          <p:cNvPr id="154" name="performance-strip">
-            <a:extLst xmlns:a="http://schemas.openxmlformats.org/drawingml/2006/main">
-              <a:ext uri="{FF2B5EF4-FFF2-40B4-BE49-F238E27FC236}">
-                <a16:creationId xmlns:a16="http://schemas.microsoft.com/office/drawing/2014/main" id="{9596A3F3-AA89-4B61-A608-46A2B1C597EA}"/>
+          <p:cNvPr id="155" name="performance-strip">
+            <a:extLst xmlns:a="http://schemas.openxmlformats.org/drawingml/2006/main">
+              <a:ext uri="{FF2B5EF4-FFF2-40B4-BE49-F238E27FC236}">
+                <a16:creationId xmlns:a16="http://schemas.microsoft.com/office/drawing/2014/main" id="{B32029A8-1C23-4FC1-AE87-4382EA3A1474}"/>
               </a:ext>
             </a:extLst>
           </p:cNvPr>
@@ -6908,10 +6958,10 @@
       </p:sp>
       <p:sp>
         <p:nvSpPr>
-          <p:cNvPr id="155" name="performance-strip-text">
-            <a:extLst xmlns:a="http://schemas.openxmlformats.org/drawingml/2006/main">
-              <a:ext uri="{FF2B5EF4-FFF2-40B4-BE49-F238E27FC236}">
-                <a16:creationId xmlns:a16="http://schemas.microsoft.com/office/drawing/2014/main" id="{CC0F2FF7-28B9-4A0D-919E-94FDCD9F2477}"/>
+          <p:cNvPr id="156" name="performance-strip-text">
+            <a:extLst xmlns:a="http://schemas.openxmlformats.org/drawingml/2006/main">
+              <a:ext uri="{FF2B5EF4-FFF2-40B4-BE49-F238E27FC236}">
+                <a16:creationId xmlns:a16="http://schemas.microsoft.com/office/drawing/2014/main" id="{3ED7DE8B-CE1D-4B6D-A810-85E200E693B4}"/>
               </a:ext>
             </a:extLst>
           </p:cNvPr>
@@ -6951,17 +7001,17 @@
                   <a:srgbClr val="FFFFFF"/>
                 </a:solidFill>
               </a:rPr>
-              <a:t>AURORA-12 vs baseline C-index · Discovery 0.78 vs 0.68 · Internal 0.76 vs 0.67 · External A 0.75 vs 0.66 · External B 0.74 vs 0.65</a:t>
+              <a:t>External validation retained discrimination: C-index 0.75 / 0.74</a:t>
             </a:r>
           </a:p>
         </p:txBody>
       </p:sp>
       <p:sp>
         <p:nvSpPr>
-          <p:cNvPr id="156" name="biology-heading-title">
-            <a:extLst xmlns:a="http://schemas.openxmlformats.org/drawingml/2006/main">
-              <a:ext uri="{FF2B5EF4-FFF2-40B4-BE49-F238E27FC236}">
-                <a16:creationId xmlns:a16="http://schemas.microsoft.com/office/drawing/2014/main" id="{DFE336D6-A99D-44E9-8A01-6B6509393593}"/>
+          <p:cNvPr id="157" name="biology-heading-title">
+            <a:extLst xmlns:a="http://schemas.openxmlformats.org/drawingml/2006/main">
+              <a:ext uri="{FF2B5EF4-FFF2-40B4-BE49-F238E27FC236}">
+                <a16:creationId xmlns:a16="http://schemas.microsoft.com/office/drawing/2014/main" id="{24A35D63-73DC-4720-BC32-DF0E65487C86}"/>
               </a:ext>
             </a:extLst>
           </p:cNvPr>
@@ -7008,10 +7058,10 @@
       </p:sp>
       <p:sp>
         <p:nvSpPr>
-          <p:cNvPr id="157" name="biology-heading-rule">
-            <a:extLst xmlns:a="http://schemas.openxmlformats.org/drawingml/2006/main">
-              <a:ext uri="{FF2B5EF4-FFF2-40B4-BE49-F238E27FC236}">
-                <a16:creationId xmlns:a16="http://schemas.microsoft.com/office/drawing/2014/main" id="{063F54CF-AD5A-476C-AC86-71D75DDD8E90}"/>
+          <p:cNvPr id="158" name="biology-heading-rule">
+            <a:extLst xmlns:a="http://schemas.openxmlformats.org/drawingml/2006/main">
+              <a:ext uri="{FF2B5EF4-FFF2-40B4-BE49-F238E27FC236}">
+                <a16:creationId xmlns:a16="http://schemas.microsoft.com/office/drawing/2014/main" id="{1EE2DB8C-DDF5-4487-9791-83723DDD2813}"/>
               </a:ext>
             </a:extLst>
           </p:cNvPr>
@@ -7041,10 +7091,10 @@
       </p:sp>
       <p:sp>
         <p:nvSpPr>
-          <p:cNvPr id="158" name="biology-1-value">
-            <a:extLst xmlns:a="http://schemas.openxmlformats.org/drawingml/2006/main">
-              <a:ext uri="{FF2B5EF4-FFF2-40B4-BE49-F238E27FC236}">
-                <a16:creationId xmlns:a16="http://schemas.microsoft.com/office/drawing/2014/main" id="{3C6A302B-A458-40D7-B5D3-04B18547889E}"/>
+          <p:cNvPr id="159" name="biology-1-value">
+            <a:extLst xmlns:a="http://schemas.openxmlformats.org/drawingml/2006/main">
+              <a:ext uri="{FF2B5EF4-FFF2-40B4-BE49-F238E27FC236}">
+                <a16:creationId xmlns:a16="http://schemas.microsoft.com/office/drawing/2014/main" id="{165BDAB7-19D6-4868-8A68-F4D41D4B2F4B}"/>
               </a:ext>
             </a:extLst>
           </p:cNvPr>
@@ -7091,21 +7141,21 @@
       </p:sp>
       <p:sp>
         <p:nvSpPr>
-          <p:cNvPr id="159" name="biology-1-label">
-            <a:extLst xmlns:a="http://schemas.openxmlformats.org/drawingml/2006/main">
-              <a:ext uri="{FF2B5EF4-FFF2-40B4-BE49-F238E27FC236}">
-                <a16:creationId xmlns:a16="http://schemas.microsoft.com/office/drawing/2014/main" id="{C9340562-D9F1-40CB-A174-77C8C963B305}"/>
-              </a:ext>
-            </a:extLst>
-          </p:cNvPr>
-          <p:cNvSpPr>
-            <a:spLocks xmlns:a="http://schemas.openxmlformats.org/drawingml/2006/main" noGrp="1"/>
-          </p:cNvSpPr>
-          <p:nvPr/>
-        </p:nvSpPr>
-        <p:spPr>
-          <a:xfrm xmlns:a="http://schemas.openxmlformats.org/drawingml/2006/main">
-            <a:off x="28469704" y="7994025"/>
+          <p:cNvPr id="160" name="biology-1-label">
+            <a:extLst xmlns:a="http://schemas.openxmlformats.org/drawingml/2006/main">
+              <a:ext uri="{FF2B5EF4-FFF2-40B4-BE49-F238E27FC236}">
+                <a16:creationId xmlns:a16="http://schemas.microsoft.com/office/drawing/2014/main" id="{E2FF9BDB-B9FE-4EF3-8D2A-E74AE6D14758}"/>
+              </a:ext>
+            </a:extLst>
+          </p:cNvPr>
+          <p:cNvSpPr>
+            <a:spLocks xmlns:a="http://schemas.openxmlformats.org/drawingml/2006/main" noGrp="1"/>
+          </p:cNvSpPr>
+          <p:nvPr/>
+        </p:nvSpPr>
+        <p:spPr>
+          <a:xfrm xmlns:a="http://schemas.openxmlformats.org/drawingml/2006/main">
+            <a:off x="28469704" y="7952605"/>
             <a:ext cx="4101981" cy="911236"/>
           </a:xfrm>
           <a:prstGeom xmlns:a="http://schemas.openxmlformats.org/drawingml/2006/main" prst="rect">
@@ -7141,10 +7191,10 @@
       </p:sp>
       <p:sp>
         <p:nvSpPr>
-          <p:cNvPr id="160" name="biology-2-value">
-            <a:extLst xmlns:a="http://schemas.openxmlformats.org/drawingml/2006/main">
-              <a:ext uri="{FF2B5EF4-FFF2-40B4-BE49-F238E27FC236}">
-                <a16:creationId xmlns:a16="http://schemas.microsoft.com/office/drawing/2014/main" id="{F067AC94-E0D2-42E1-971C-F8CC598758BD}"/>
+          <p:cNvPr id="161" name="biology-2-value">
+            <a:extLst xmlns:a="http://schemas.openxmlformats.org/drawingml/2006/main">
+              <a:ext uri="{FF2B5EF4-FFF2-40B4-BE49-F238E27FC236}">
+                <a16:creationId xmlns:a16="http://schemas.microsoft.com/office/drawing/2014/main" id="{3F76532C-3331-4029-820E-2D9B42DF5370}"/>
               </a:ext>
             </a:extLst>
           </p:cNvPr>
@@ -7172,14 +7222,14 @@
           <a:lstStyle xmlns:a="http://schemas.openxmlformats.org/drawingml/2006/main"/>
           <a:p xmlns:a="http://schemas.openxmlformats.org/drawingml/2006/main">
             <a:pPr>
-              <a:defRPr sz="4691" b="1">
+              <a:defRPr sz="5229" b="1">
                 <a:solidFill>
                   <a:srgbClr val="487AA1"/>
                 </a:solidFill>
               </a:defRPr>
             </a:pPr>
             <a:r>
-              <a:rPr sz="4691" b="1">
+              <a:rPr sz="5229" b="1">
                 <a:solidFill>
                   <a:srgbClr val="487AA1"/>
                 </a:solidFill>
@@ -7191,21 +7241,21 @@
       </p:sp>
       <p:sp>
         <p:nvSpPr>
-          <p:cNvPr id="161" name="biology-2-label">
-            <a:extLst xmlns:a="http://schemas.openxmlformats.org/drawingml/2006/main">
-              <a:ext uri="{FF2B5EF4-FFF2-40B4-BE49-F238E27FC236}">
-                <a16:creationId xmlns:a16="http://schemas.microsoft.com/office/drawing/2014/main" id="{AC4EF75C-EE2B-4D78-978C-C607A6735306}"/>
-              </a:ext>
-            </a:extLst>
-          </p:cNvPr>
-          <p:cNvSpPr>
-            <a:spLocks xmlns:a="http://schemas.openxmlformats.org/drawingml/2006/main" noGrp="1"/>
-          </p:cNvSpPr>
-          <p:nvPr/>
-        </p:nvSpPr>
-        <p:spPr>
-          <a:xfrm xmlns:a="http://schemas.openxmlformats.org/drawingml/2006/main">
-            <a:off x="33108849" y="7994025"/>
+          <p:cNvPr id="162" name="biology-2-label">
+            <a:extLst xmlns:a="http://schemas.openxmlformats.org/drawingml/2006/main">
+              <a:ext uri="{FF2B5EF4-FFF2-40B4-BE49-F238E27FC236}">
+                <a16:creationId xmlns:a16="http://schemas.microsoft.com/office/drawing/2014/main" id="{C5C3E02B-8ED9-4FEB-80EE-B88BC7C32922}"/>
+              </a:ext>
+            </a:extLst>
+          </p:cNvPr>
+          <p:cNvSpPr>
+            <a:spLocks xmlns:a="http://schemas.openxmlformats.org/drawingml/2006/main" noGrp="1"/>
+          </p:cNvSpPr>
+          <p:nvPr/>
+        </p:nvSpPr>
+        <p:spPr>
+          <a:xfrm xmlns:a="http://schemas.openxmlformats.org/drawingml/2006/main">
+            <a:off x="33108849" y="7952605"/>
             <a:ext cx="4101981" cy="911236"/>
           </a:xfrm>
           <a:prstGeom xmlns:a="http://schemas.openxmlformats.org/drawingml/2006/main" prst="rect">
@@ -7241,10 +7291,10 @@
       </p:sp>
       <p:sp>
         <p:nvSpPr>
-          <p:cNvPr id="162" name="biology-3-value">
-            <a:extLst xmlns:a="http://schemas.openxmlformats.org/drawingml/2006/main">
-              <a:ext uri="{FF2B5EF4-FFF2-40B4-BE49-F238E27FC236}">
-                <a16:creationId xmlns:a16="http://schemas.microsoft.com/office/drawing/2014/main" id="{297A2B1D-2E93-4837-9551-7DDF1747606B}"/>
+          <p:cNvPr id="163" name="biology-3-value">
+            <a:extLst xmlns:a="http://schemas.openxmlformats.org/drawingml/2006/main">
+              <a:ext uri="{FF2B5EF4-FFF2-40B4-BE49-F238E27FC236}">
+                <a16:creationId xmlns:a16="http://schemas.microsoft.com/office/drawing/2014/main" id="{0F061753-F71D-4A9D-9B75-584D03C92058}"/>
               </a:ext>
             </a:extLst>
           </p:cNvPr>
@@ -7272,14 +7322,14 @@
           <a:lstStyle xmlns:a="http://schemas.openxmlformats.org/drawingml/2006/main"/>
           <a:p xmlns:a="http://schemas.openxmlformats.org/drawingml/2006/main">
             <a:pPr>
-              <a:defRPr sz="3999" b="1">
+              <a:defRPr sz="4230" b="1">
                 <a:solidFill>
                   <a:srgbClr val="E5BC6C"/>
                 </a:solidFill>
               </a:defRPr>
             </a:pPr>
             <a:r>
-              <a:rPr sz="3999" b="1">
+              <a:rPr sz="4230" b="1">
                 <a:solidFill>
                   <a:srgbClr val="E5BC6C"/>
                 </a:solidFill>
@@ -7291,21 +7341,21 @@
       </p:sp>
       <p:sp>
         <p:nvSpPr>
-          <p:cNvPr id="163" name="biology-3-label">
-            <a:extLst xmlns:a="http://schemas.openxmlformats.org/drawingml/2006/main">
-              <a:ext uri="{FF2B5EF4-FFF2-40B4-BE49-F238E27FC236}">
-                <a16:creationId xmlns:a16="http://schemas.microsoft.com/office/drawing/2014/main" id="{D052C56E-D30B-44EE-96B5-C8BCBA02401C}"/>
-              </a:ext>
-            </a:extLst>
-          </p:cNvPr>
-          <p:cNvSpPr>
-            <a:spLocks xmlns:a="http://schemas.openxmlformats.org/drawingml/2006/main" noGrp="1"/>
-          </p:cNvSpPr>
-          <p:nvPr/>
-        </p:nvSpPr>
-        <p:spPr>
-          <a:xfrm xmlns:a="http://schemas.openxmlformats.org/drawingml/2006/main">
-            <a:off x="37747995" y="7994025"/>
+          <p:cNvPr id="164" name="biology-3-label">
+            <a:extLst xmlns:a="http://schemas.openxmlformats.org/drawingml/2006/main">
+              <a:ext uri="{FF2B5EF4-FFF2-40B4-BE49-F238E27FC236}">
+                <a16:creationId xmlns:a16="http://schemas.microsoft.com/office/drawing/2014/main" id="{46EB6F48-80CD-4742-B49F-A570DBB2E974}"/>
+              </a:ext>
+            </a:extLst>
+          </p:cNvPr>
+          <p:cNvSpPr>
+            <a:spLocks xmlns:a="http://schemas.openxmlformats.org/drawingml/2006/main" noGrp="1"/>
+          </p:cNvSpPr>
+          <p:nvPr/>
+        </p:nvSpPr>
+        <p:spPr>
+          <a:xfrm xmlns:a="http://schemas.openxmlformats.org/drawingml/2006/main">
+            <a:off x="37747995" y="7952605"/>
             <a:ext cx="4101981" cy="911236"/>
           </a:xfrm>
           <a:prstGeom xmlns:a="http://schemas.openxmlformats.org/drawingml/2006/main" prst="rect">
@@ -7341,10 +7391,10 @@
       </p:sp>
       <p:sp>
         <p:nvSpPr>
-          <p:cNvPr id="164" name="biology-evidence">
-            <a:extLst xmlns:a="http://schemas.openxmlformats.org/drawingml/2006/main">
-              <a:ext uri="{FF2B5EF4-FFF2-40B4-BE49-F238E27FC236}">
-                <a16:creationId xmlns:a16="http://schemas.microsoft.com/office/drawing/2014/main" id="{5BF8412D-0521-43CE-8AEB-58DE13655B01}"/>
+          <p:cNvPr id="165" name="biology-evidence">
+            <a:extLst xmlns:a="http://schemas.openxmlformats.org/drawingml/2006/main">
+              <a:ext uri="{FF2B5EF4-FFF2-40B4-BE49-F238E27FC236}">
+                <a16:creationId xmlns:a16="http://schemas.microsoft.com/office/drawing/2014/main" id="{F166C340-6911-4998-AFCD-C55E7D8329B4}"/>
               </a:ext>
             </a:extLst>
           </p:cNvPr>
@@ -7372,14 +7422,14 @@
           <a:lstStyle xmlns:a="http://schemas.openxmlformats.org/drawingml/2006/main"/>
           <a:p xmlns:a="http://schemas.openxmlformats.org/drawingml/2006/main">
             <a:pPr>
-              <a:defRPr sz="1923" i="1">
+              <a:defRPr sz="1923">
                 <a:solidFill>
                   <a:srgbClr val="487AA1"/>
                 </a:solidFill>
               </a:defRPr>
             </a:pPr>
             <a:r>
-              <a:rPr sz="1923" i="1">
+              <a:rPr sz="1923">
                 <a:solidFill>
                   <a:srgbClr val="487AA1"/>
                 </a:solidFill>
@@ -7391,10 +7441,10 @@
       </p:sp>
       <p:sp>
         <p:nvSpPr>
-          <p:cNvPr id="165" name="figure-three-frame">
-            <a:extLst xmlns:a="http://schemas.openxmlformats.org/drawingml/2006/main">
-              <a:ext uri="{FF2B5EF4-FFF2-40B4-BE49-F238E27FC236}">
-                <a16:creationId xmlns:a16="http://schemas.microsoft.com/office/drawing/2014/main" id="{E34162B2-5D45-4365-8F2C-156174D52338}"/>
+          <p:cNvPr id="166" name="figure-three-frame">
+            <a:extLst xmlns:a="http://schemas.openxmlformats.org/drawingml/2006/main">
+              <a:ext uri="{FF2B5EF4-FFF2-40B4-BE49-F238E27FC236}">
+                <a16:creationId xmlns:a16="http://schemas.microsoft.com/office/drawing/2014/main" id="{018253E0-A0C9-47E4-8AF7-A83A1435E9C9}"/>
               </a:ext>
             </a:extLst>
           </p:cNvPr>
@@ -7426,17 +7476,17 @@
       </p:sp>
       <p:pic>
         <p:nvPicPr>
-          <p:cNvPr id="348" name=""/>
+          <p:cNvPr id="351" name=""/>
           <p:cNvPicPr>
             <a:picLocks xmlns:a="http://schemas.openxmlformats.org/drawingml/2006/main" noChangeAspect="1"/>
           </p:cNvPicPr>
           <p:nvPr/>
         </p:nvPicPr>
         <p:blipFill>
-          <a:blip xmlns:r="http://schemas.openxmlformats.org/officeDocument/2006/relationships" xmlns:a="http://schemas.openxmlformats.org/drawingml/2006/main" r:embed="R8dd62cb475d04c92">
+          <a:blip xmlns:r="http://schemas.openxmlformats.org/officeDocument/2006/relationships" xmlns:a="http://schemas.openxmlformats.org/drawingml/2006/main" r:embed="R3b1173c973e04bd2">
             <a:extLst>
               <a:ext uri="{96DAC541-7B7A-43D3-8B79-37D633B846F1}">
-                <asvg:svgBlip xmlns:asvg="http://schemas.microsoft.com/office/drawing/2016/SVG/main" r:embed="Red4afc0a5093463e"/>
+                <asvg:svgBlip xmlns:asvg="http://schemas.microsoft.com/office/drawing/2016/SVG/main" r:embed="R4ac69e3926ad4013"/>
               </a:ext>
             </a:extLst>
           </a:blip>
@@ -7454,10 +7504,10 @@
       </p:pic>
       <p:sp>
         <p:nvSpPr>
-          <p:cNvPr id="167" name="figure-three-caption">
-            <a:extLst xmlns:a="http://schemas.openxmlformats.org/drawingml/2006/main">
-              <a:ext uri="{FF2B5EF4-FFF2-40B4-BE49-F238E27FC236}">
-                <a16:creationId xmlns:a16="http://schemas.microsoft.com/office/drawing/2014/main" id="{BD665F25-6728-435C-A88C-10FB347EB5D1}"/>
+          <p:cNvPr id="168" name="figure-three-caption">
+            <a:extLst xmlns:a="http://schemas.openxmlformats.org/drawingml/2006/main">
+              <a:ext uri="{FF2B5EF4-FFF2-40B4-BE49-F238E27FC236}">
+                <a16:creationId xmlns:a16="http://schemas.microsoft.com/office/drawing/2014/main" id="{DA8A9831-A4FF-4860-B58B-DA239298E69B}"/>
               </a:ext>
             </a:extLst>
           </p:cNvPr>
@@ -7469,7 +7519,7 @@
         <p:spPr>
           <a:xfrm xmlns:a="http://schemas.openxmlformats.org/drawingml/2006/main">
             <a:off x="28704103" y="16702541"/>
-            <a:ext cx="13585371" cy="434908"/>
+            <a:ext cx="13585371" cy="341713"/>
           </a:xfrm>
           <a:prstGeom xmlns:a="http://schemas.openxmlformats.org/drawingml/2006/main" prst="rect">
             <a:avLst/>
@@ -7504,21 +7554,21 @@
       </p:sp>
       <p:sp>
         <p:nvSpPr>
-          <p:cNvPr id="168" name="figure-three-source">
-            <a:extLst xmlns:a="http://schemas.openxmlformats.org/drawingml/2006/main">
-              <a:ext uri="{FF2B5EF4-FFF2-40B4-BE49-F238E27FC236}">
-                <a16:creationId xmlns:a16="http://schemas.microsoft.com/office/drawing/2014/main" id="{315B7383-F2EC-4FB7-B1EB-B5AB4635F67E}"/>
-              </a:ext>
-            </a:extLst>
-          </p:cNvPr>
-          <p:cNvSpPr>
-            <a:spLocks xmlns:a="http://schemas.openxmlformats.org/drawingml/2006/main" noGrp="1"/>
-          </p:cNvSpPr>
-          <p:nvPr/>
-        </p:nvSpPr>
-        <p:spPr>
-          <a:xfrm xmlns:a="http://schemas.openxmlformats.org/drawingml/2006/main">
-            <a:off x="28704103" y="17044255"/>
+          <p:cNvPr id="169" name="figure-three-source">
+            <a:extLst xmlns:a="http://schemas.openxmlformats.org/drawingml/2006/main">
+              <a:ext uri="{FF2B5EF4-FFF2-40B4-BE49-F238E27FC236}">
+                <a16:creationId xmlns:a16="http://schemas.microsoft.com/office/drawing/2014/main" id="{FAB955FF-02BD-4B5E-8EE0-5855A9863B08}"/>
+              </a:ext>
+            </a:extLst>
+          </p:cNvPr>
+          <p:cNvSpPr>
+            <a:spLocks xmlns:a="http://schemas.openxmlformats.org/drawingml/2006/main" noGrp="1"/>
+          </p:cNvSpPr>
+          <p:nvPr/>
+        </p:nvSpPr>
+        <p:spPr>
+          <a:xfrm xmlns:a="http://schemas.openxmlformats.org/drawingml/2006/main">
+            <a:off x="28704103" y="17054610"/>
             <a:ext cx="13585371" cy="393488"/>
           </a:xfrm>
           <a:prstGeom xmlns:a="http://schemas.openxmlformats.org/drawingml/2006/main" prst="rect">
@@ -7535,14 +7585,14 @@
           <a:lstStyle xmlns:a="http://schemas.openxmlformats.org/drawingml/2006/main"/>
           <a:p xmlns:a="http://schemas.openxmlformats.org/drawingml/2006/main">
             <a:pPr>
-              <a:defRPr sz="1923" i="1">
+              <a:defRPr sz="1923">
                 <a:solidFill>
                   <a:srgbClr val="487AA1"/>
                 </a:solidFill>
               </a:defRPr>
             </a:pPr>
             <a:r>
-              <a:rPr sz="1923" i="1">
+              <a:rPr sz="1923">
                 <a:solidFill>
                   <a:srgbClr val="487AA1"/>
                 </a:solidFill>
@@ -7554,10 +7604,10 @@
       </p:sp>
       <p:sp>
         <p:nvSpPr>
-          <p:cNvPr id="169" name="validation-visual-heading-title">
-            <a:extLst xmlns:a="http://schemas.openxmlformats.org/drawingml/2006/main">
-              <a:ext uri="{FF2B5EF4-FFF2-40B4-BE49-F238E27FC236}">
-                <a16:creationId xmlns:a16="http://schemas.microsoft.com/office/drawing/2014/main" id="{6CFFEFB8-279A-46AB-9F5A-CC813F4D9064}"/>
+          <p:cNvPr id="170" name="validation-visual-heading-title">
+            <a:extLst xmlns:a="http://schemas.openxmlformats.org/drawingml/2006/main">
+              <a:ext uri="{FF2B5EF4-FFF2-40B4-BE49-F238E27FC236}">
+                <a16:creationId xmlns:a16="http://schemas.microsoft.com/office/drawing/2014/main" id="{A24E48CA-4F8F-4914-8EF1-986BDAB31921}"/>
               </a:ext>
             </a:extLst>
           </p:cNvPr>
@@ -7604,10 +7654,10 @@
       </p:sp>
       <p:sp>
         <p:nvSpPr>
-          <p:cNvPr id="170" name="validation-visual-heading-rule">
-            <a:extLst xmlns:a="http://schemas.openxmlformats.org/drawingml/2006/main">
-              <a:ext uri="{FF2B5EF4-FFF2-40B4-BE49-F238E27FC236}">
-                <a16:creationId xmlns:a16="http://schemas.microsoft.com/office/drawing/2014/main" id="{F9B2008F-8DE3-44C8-BD92-4654C01B1192}"/>
+          <p:cNvPr id="171" name="validation-visual-heading-rule">
+            <a:extLst xmlns:a="http://schemas.openxmlformats.org/drawingml/2006/main">
+              <a:ext uri="{FF2B5EF4-FFF2-40B4-BE49-F238E27FC236}">
+                <a16:creationId xmlns:a16="http://schemas.microsoft.com/office/drawing/2014/main" id="{F1670663-38EF-4BE7-9ECA-6DAD962147FB}"/>
               </a:ext>
             </a:extLst>
           </p:cNvPr>
@@ -7637,10 +7687,10 @@
       </p:sp>
       <p:sp>
         <p:nvSpPr>
-          <p:cNvPr id="171" name="figure-four-frame">
-            <a:extLst xmlns:a="http://schemas.openxmlformats.org/drawingml/2006/main">
-              <a:ext uri="{FF2B5EF4-FFF2-40B4-BE49-F238E27FC236}">
-                <a16:creationId xmlns:a16="http://schemas.microsoft.com/office/drawing/2014/main" id="{71343D5C-E2D2-4107-9EAB-31E0A0449BF9}"/>
+          <p:cNvPr id="172" name="figure-four-frame">
+            <a:extLst xmlns:a="http://schemas.openxmlformats.org/drawingml/2006/main">
+              <a:ext uri="{FF2B5EF4-FFF2-40B4-BE49-F238E27FC236}">
+                <a16:creationId xmlns:a16="http://schemas.microsoft.com/office/drawing/2014/main" id="{DF4696BC-FEA8-4628-BDB1-846A285D70F8}"/>
               </a:ext>
             </a:extLst>
           </p:cNvPr>
@@ -7672,17 +7722,17 @@
       </p:sp>
       <p:pic>
         <p:nvPicPr>
-          <p:cNvPr id="354" name=""/>
+          <p:cNvPr id="357" name=""/>
           <p:cNvPicPr>
             <a:picLocks xmlns:a="http://schemas.openxmlformats.org/drawingml/2006/main" noChangeAspect="1"/>
           </p:cNvPicPr>
           <p:nvPr/>
         </p:nvPicPr>
         <p:blipFill>
-          <a:blip xmlns:r="http://schemas.openxmlformats.org/officeDocument/2006/relationships" xmlns:a="http://schemas.openxmlformats.org/drawingml/2006/main" r:embed="R56a01167b0cd48d2">
+          <a:blip xmlns:r="http://schemas.openxmlformats.org/officeDocument/2006/relationships" xmlns:a="http://schemas.openxmlformats.org/drawingml/2006/main" r:embed="Rb0dfd1f03d1a472e">
             <a:extLst>
               <a:ext uri="{96DAC541-7B7A-43D3-8B79-37D633B846F1}">
-                <asvg:svgBlip xmlns:asvg="http://schemas.microsoft.com/office/drawing/2016/SVG/main" r:embed="R67dd161e3e214039"/>
+                <asvg:svgBlip xmlns:asvg="http://schemas.microsoft.com/office/drawing/2016/SVG/main" r:embed="Rd217372cbbb74f16"/>
               </a:ext>
             </a:extLst>
           </a:blip>
@@ -7700,10 +7750,10 @@
       </p:pic>
       <p:sp>
         <p:nvSpPr>
-          <p:cNvPr id="173" name="figure-four-caption">
-            <a:extLst xmlns:a="http://schemas.openxmlformats.org/drawingml/2006/main">
-              <a:ext uri="{FF2B5EF4-FFF2-40B4-BE49-F238E27FC236}">
-                <a16:creationId xmlns:a16="http://schemas.microsoft.com/office/drawing/2014/main" id="{6C3A31DE-77BE-4D38-9D8A-8F344C374F14}"/>
+          <p:cNvPr id="174" name="figure-four-caption">
+            <a:extLst xmlns:a="http://schemas.openxmlformats.org/drawingml/2006/main">
+              <a:ext uri="{FF2B5EF4-FFF2-40B4-BE49-F238E27FC236}">
+                <a16:creationId xmlns:a16="http://schemas.microsoft.com/office/drawing/2014/main" id="{6D45E772-B45C-45D7-B8C7-B60ED5D94914}"/>
               </a:ext>
             </a:extLst>
           </p:cNvPr>
@@ -7715,7 +7765,7 @@
         <p:spPr>
           <a:xfrm xmlns:a="http://schemas.openxmlformats.org/drawingml/2006/main">
             <a:off x="28704103" y="25918451"/>
-            <a:ext cx="13585371" cy="434908"/>
+            <a:ext cx="13585371" cy="341713"/>
           </a:xfrm>
           <a:prstGeom xmlns:a="http://schemas.openxmlformats.org/drawingml/2006/main" prst="rect">
             <a:avLst/>
@@ -7750,21 +7800,21 @@
       </p:sp>
       <p:sp>
         <p:nvSpPr>
-          <p:cNvPr id="174" name="figure-four-source">
-            <a:extLst xmlns:a="http://schemas.openxmlformats.org/drawingml/2006/main">
-              <a:ext uri="{FF2B5EF4-FFF2-40B4-BE49-F238E27FC236}">
-                <a16:creationId xmlns:a16="http://schemas.microsoft.com/office/drawing/2014/main" id="{AC326D04-D8BF-4043-9ACF-9CF23EB97C49}"/>
-              </a:ext>
-            </a:extLst>
-          </p:cNvPr>
-          <p:cNvSpPr>
-            <a:spLocks xmlns:a="http://schemas.openxmlformats.org/drawingml/2006/main" noGrp="1"/>
-          </p:cNvSpPr>
-          <p:nvPr/>
-        </p:nvSpPr>
-        <p:spPr>
-          <a:xfrm xmlns:a="http://schemas.openxmlformats.org/drawingml/2006/main">
-            <a:off x="28704103" y="26260164"/>
+          <p:cNvPr id="175" name="figure-four-source">
+            <a:extLst xmlns:a="http://schemas.openxmlformats.org/drawingml/2006/main">
+              <a:ext uri="{FF2B5EF4-FFF2-40B4-BE49-F238E27FC236}">
+                <a16:creationId xmlns:a16="http://schemas.microsoft.com/office/drawing/2014/main" id="{EBD7B6A7-2249-4C90-82D2-F95BBFA2FB64}"/>
+              </a:ext>
+            </a:extLst>
+          </p:cNvPr>
+          <p:cNvSpPr>
+            <a:spLocks xmlns:a="http://schemas.openxmlformats.org/drawingml/2006/main" noGrp="1"/>
+          </p:cNvSpPr>
+          <p:nvPr/>
+        </p:nvSpPr>
+        <p:spPr>
+          <a:xfrm xmlns:a="http://schemas.openxmlformats.org/drawingml/2006/main">
+            <a:off x="28704103" y="26270519"/>
             <a:ext cx="13585371" cy="393488"/>
           </a:xfrm>
           <a:prstGeom xmlns:a="http://schemas.openxmlformats.org/drawingml/2006/main" prst="rect">
@@ -7781,14 +7831,14 @@
           <a:lstStyle xmlns:a="http://schemas.openxmlformats.org/drawingml/2006/main"/>
           <a:p xmlns:a="http://schemas.openxmlformats.org/drawingml/2006/main">
             <a:pPr>
-              <a:defRPr sz="1923" i="1">
+              <a:defRPr sz="1923">
                 <a:solidFill>
                   <a:srgbClr val="487AA1"/>
                 </a:solidFill>
               </a:defRPr>
             </a:pPr>
             <a:r>
-              <a:rPr sz="1923" i="1">
+              <a:rPr sz="1923">
                 <a:solidFill>
                   <a:srgbClr val="487AA1"/>
                 </a:solidFill>
@@ -7800,10 +7850,10 @@
       </p:sp>
       <p:sp>
         <p:nvSpPr>
-          <p:cNvPr id="175" name="conclusion-heading-title">
-            <a:extLst xmlns:a="http://schemas.openxmlformats.org/drawingml/2006/main">
-              <a:ext uri="{FF2B5EF4-FFF2-40B4-BE49-F238E27FC236}">
-                <a16:creationId xmlns:a16="http://schemas.microsoft.com/office/drawing/2014/main" id="{82956B00-5B95-4DF1-AB5C-90A7EBE2FAEC}"/>
+          <p:cNvPr id="176" name="conclusion-heading-title">
+            <a:extLst xmlns:a="http://schemas.openxmlformats.org/drawingml/2006/main">
+              <a:ext uri="{FF2B5EF4-FFF2-40B4-BE49-F238E27FC236}">
+                <a16:creationId xmlns:a16="http://schemas.microsoft.com/office/drawing/2014/main" id="{D545FDB9-C52E-48CB-8412-7CFFD657FD5D}"/>
               </a:ext>
             </a:extLst>
           </p:cNvPr>
@@ -7850,10 +7900,10 @@
       </p:sp>
       <p:sp>
         <p:nvSpPr>
-          <p:cNvPr id="176" name="conclusion-heading-rule">
-            <a:extLst xmlns:a="http://schemas.openxmlformats.org/drawingml/2006/main">
-              <a:ext uri="{FF2B5EF4-FFF2-40B4-BE49-F238E27FC236}">
-                <a16:creationId xmlns:a16="http://schemas.microsoft.com/office/drawing/2014/main" id="{006FD4D0-A0A0-4E0A-99EC-9BA3581DABC0}"/>
+          <p:cNvPr id="177" name="conclusion-heading-rule">
+            <a:extLst xmlns:a="http://schemas.openxmlformats.org/drawingml/2006/main">
+              <a:ext uri="{FF2B5EF4-FFF2-40B4-BE49-F238E27FC236}">
+                <a16:creationId xmlns:a16="http://schemas.microsoft.com/office/drawing/2014/main" id="{BAC94C0E-6709-4354-9236-9EB261BBA453}"/>
               </a:ext>
             </a:extLst>
           </p:cNvPr>
@@ -7883,10 +7933,10 @@
       </p:sp>
       <p:sp>
         <p:nvSpPr>
-          <p:cNvPr id="177" name="conclusion-panel">
-            <a:extLst xmlns:a="http://schemas.openxmlformats.org/drawingml/2006/main">
-              <a:ext uri="{FF2B5EF4-FFF2-40B4-BE49-F238E27FC236}">
-                <a16:creationId xmlns:a16="http://schemas.microsoft.com/office/drawing/2014/main" id="{A88B2275-BA6D-4BB5-8FCC-AD29AD0AEC69}"/>
+          <p:cNvPr id="178" name="conclusion-panel">
+            <a:extLst xmlns:a="http://schemas.openxmlformats.org/drawingml/2006/main">
+              <a:ext uri="{FF2B5EF4-FFF2-40B4-BE49-F238E27FC236}">
+                <a16:creationId xmlns:a16="http://schemas.microsoft.com/office/drawing/2014/main" id="{CE5760E0-3269-40A5-9551-DD02E84325B2}"/>
               </a:ext>
             </a:extLst>
           </p:cNvPr>
@@ -7918,10 +7968,10 @@
       </p:sp>
       <p:sp>
         <p:nvSpPr>
-          <p:cNvPr id="178" name="conclusion">
-            <a:extLst xmlns:a="http://schemas.openxmlformats.org/drawingml/2006/main">
-              <a:ext uri="{FF2B5EF4-FFF2-40B4-BE49-F238E27FC236}">
-                <a16:creationId xmlns:a16="http://schemas.microsoft.com/office/drawing/2014/main" id="{A8AD3B02-3F47-47BC-B25A-BC5C2CBD4BF9}"/>
+          <p:cNvPr id="179" name="conclusion-lead">
+            <a:extLst xmlns:a="http://schemas.openxmlformats.org/drawingml/2006/main">
+              <a:ext uri="{FF2B5EF4-FFF2-40B4-BE49-F238E27FC236}">
+                <a16:creationId xmlns:a16="http://schemas.microsoft.com/office/drawing/2014/main" id="{9E62ABEC-3F65-44B9-9380-0F2D455E08B7}"/>
               </a:ext>
             </a:extLst>
           </p:cNvPr>
@@ -7933,7 +7983,57 @@
         <p:spPr>
           <a:xfrm xmlns:a="http://schemas.openxmlformats.org/drawingml/2006/main">
             <a:off x="28801769" y="28455415"/>
-            <a:ext cx="13390039" cy="2381640"/>
+            <a:ext cx="13390039" cy="662717"/>
+          </a:xfrm>
+          <a:prstGeom xmlns:a="http://schemas.openxmlformats.org/drawingml/2006/main" prst="rect">
+            <a:avLst/>
+          </a:prstGeom>
+          <a:noFill xmlns:a="http://schemas.openxmlformats.org/drawingml/2006/main"/>
+          <a:ln xmlns:a="http://schemas.openxmlformats.org/drawingml/2006/main" w="0">
+            <a:noFill/>
+            <a:prstDash val="solid"/>
+          </a:ln>
+        </p:spPr>
+        <p:txBody>
+          <a:bodyPr xmlns:a="http://schemas.openxmlformats.org/drawingml/2006/main"/>
+          <a:lstStyle xmlns:a="http://schemas.openxmlformats.org/drawingml/2006/main"/>
+          <a:p xmlns:a="http://schemas.openxmlformats.org/drawingml/2006/main">
+            <a:pPr>
+              <a:defRPr sz="3076" b="1">
+                <a:solidFill>
+                  <a:srgbClr val="293F55"/>
+                </a:solidFill>
+              </a:defRPr>
+            </a:pPr>
+            <a:r>
+              <a:rPr sz="3076" b="1">
+                <a:solidFill>
+                  <a:srgbClr val="293F55"/>
+                </a:solidFill>
+              </a:rPr>
+              <a:t>A rights-safe methodological test fixture</a:t>
+            </a:r>
+          </a:p>
+        </p:txBody>
+      </p:sp>
+      <p:sp>
+        <p:nvSpPr>
+          <p:cNvPr id="180" name="conclusion">
+            <a:extLst xmlns:a="http://schemas.openxmlformats.org/drawingml/2006/main">
+              <a:ext uri="{FF2B5EF4-FFF2-40B4-BE49-F238E27FC236}">
+                <a16:creationId xmlns:a16="http://schemas.microsoft.com/office/drawing/2014/main" id="{64A78D00-7D3B-49CF-BE8A-B3E59827AD31}"/>
+              </a:ext>
+            </a:extLst>
+          </p:cNvPr>
+          <p:cNvSpPr>
+            <a:spLocks xmlns:a="http://schemas.openxmlformats.org/drawingml/2006/main" noGrp="1"/>
+          </p:cNvSpPr>
+          <p:nvPr/>
+        </p:nvSpPr>
+        <p:spPr>
+          <a:xfrm xmlns:a="http://schemas.openxmlformats.org/drawingml/2006/main">
+            <a:off x="28801769" y="29200971"/>
+            <a:ext cx="13390039" cy="1636083"/>
           </a:xfrm>
           <a:prstGeom xmlns:a="http://schemas.openxmlformats.org/drawingml/2006/main" prst="rect">
             <a:avLst/>
@@ -7961,17 +8061,34 @@
                   <a:srgbClr val="293F55"/>
                 </a:solidFill>
               </a:rPr>
-              <a:t>AURORA-12 is a controlled, rights-safe fixture for testing evidence-linked scientific communication. It supports no inference about real biology, prognosis, treatment or clinical utility. Every number, cohort, feature, author and institution is fictional.</a:t>
+              <a:t>• No biological, prognostic or clinical inference</a:t>
+            </a:r>
+          </a:p>
+          <a:p xmlns:a="http://schemas.openxmlformats.org/drawingml/2006/main">
+            <a:pPr>
+              <a:defRPr sz="2922">
+                <a:solidFill>
+                  <a:srgbClr val="293F55"/>
+                </a:solidFill>
+              </a:defRPr>
+            </a:pPr>
+            <a:r>
+              <a:rPr sz="2922">
+                <a:solidFill>
+                  <a:srgbClr val="293F55"/>
+                </a:solidFill>
+              </a:rPr>
+              <a:t>• All cohorts, values and identities are fictional</a:t>
             </a:r>
           </a:p>
         </p:txBody>
       </p:sp>
       <p:sp>
         <p:nvSpPr>
-          <p:cNvPr id="179" name="conclusion-evidence">
-            <a:extLst xmlns:a="http://schemas.openxmlformats.org/drawingml/2006/main">
-              <a:ext uri="{FF2B5EF4-FFF2-40B4-BE49-F238E27FC236}">
-                <a16:creationId xmlns:a16="http://schemas.microsoft.com/office/drawing/2014/main" id="{3EC9806D-2258-4B3C-9DC4-58037A244EF5}"/>
+          <p:cNvPr id="181" name="conclusion-evidence">
+            <a:extLst xmlns:a="http://schemas.openxmlformats.org/drawingml/2006/main">
+              <a:ext uri="{FF2B5EF4-FFF2-40B4-BE49-F238E27FC236}">
+                <a16:creationId xmlns:a16="http://schemas.microsoft.com/office/drawing/2014/main" id="{A22F958D-6454-459F-AB0A-5D5E431602AF}"/>
               </a:ext>
             </a:extLst>
           </p:cNvPr>
@@ -7999,14 +8116,14 @@
           <a:lstStyle xmlns:a="http://schemas.openxmlformats.org/drawingml/2006/main"/>
           <a:p xmlns:a="http://schemas.openxmlformats.org/drawingml/2006/main">
             <a:pPr>
-              <a:defRPr sz="1923" i="1">
+              <a:defRPr sz="1923">
                 <a:solidFill>
                   <a:srgbClr val="487AA1"/>
                 </a:solidFill>
               </a:defRPr>
             </a:pPr>
             <a:r>
-              <a:rPr sz="1923" i="1">
+              <a:rPr sz="1923">
                 <a:solidFill>
                   <a:srgbClr val="487AA1"/>
                 </a:solidFill>
@@ -8018,10 +8135,10 @@
       </p:sp>
       <p:sp>
         <p:nvSpPr>
-          <p:cNvPr id="180" name="footer-band">
-            <a:extLst xmlns:a="http://schemas.openxmlformats.org/drawingml/2006/main">
-              <a:ext uri="{FF2B5EF4-FFF2-40B4-BE49-F238E27FC236}">
-                <a16:creationId xmlns:a16="http://schemas.microsoft.com/office/drawing/2014/main" id="{EAD25A24-234F-4453-8268-77629B079EE6}"/>
+          <p:cNvPr id="182" name="footer-band">
+            <a:extLst xmlns:a="http://schemas.openxmlformats.org/drawingml/2006/main">
+              <a:ext uri="{FF2B5EF4-FFF2-40B4-BE49-F238E27FC236}">
+                <a16:creationId xmlns:a16="http://schemas.microsoft.com/office/drawing/2014/main" id="{5FF53EAC-F306-4CAC-A57C-CF9FA14BDCFC}"/>
               </a:ext>
             </a:extLst>
           </p:cNvPr>
@@ -8051,10 +8168,10 @@
       </p:sp>
       <p:sp>
         <p:nvSpPr>
-          <p:cNvPr id="181" name="footer-source">
-            <a:extLst xmlns:a="http://schemas.openxmlformats.org/drawingml/2006/main">
-              <a:ext uri="{FF2B5EF4-FFF2-40B4-BE49-F238E27FC236}">
-                <a16:creationId xmlns:a16="http://schemas.microsoft.com/office/drawing/2014/main" id="{7163C572-0ADC-4DBC-82CD-0FB8DD6AF61E}"/>
+          <p:cNvPr id="183" name="footer-source">
+            <a:extLst xmlns:a="http://schemas.openxmlformats.org/drawingml/2006/main">
+              <a:ext uri="{FF2B5EF4-FFF2-40B4-BE49-F238E27FC236}">
+                <a16:creationId xmlns:a16="http://schemas.microsoft.com/office/drawing/2014/main" id="{E0E790D7-FE46-4287-AE81-2A3180FA1B8E}"/>
               </a:ext>
             </a:extLst>
           </p:cNvPr>
@@ -8066,7 +8183,7 @@
         <p:spPr>
           <a:xfrm xmlns:a="http://schemas.openxmlformats.org/drawingml/2006/main">
             <a:off x="1367327" y="32172843"/>
-            <a:ext cx="29299866" cy="434908"/>
+            <a:ext cx="28909202" cy="434908"/>
           </a:xfrm>
           <a:prstGeom xmlns:a="http://schemas.openxmlformats.org/drawingml/2006/main" prst="rect">
             <a:avLst/>
@@ -8101,10 +8218,10 @@
       </p:sp>
       <p:sp>
         <p:nvSpPr>
-          <p:cNvPr id="182" name="footer-status">
-            <a:extLst xmlns:a="http://schemas.openxmlformats.org/drawingml/2006/main">
-              <a:ext uri="{FF2B5EF4-FFF2-40B4-BE49-F238E27FC236}">
-                <a16:creationId xmlns:a16="http://schemas.microsoft.com/office/drawing/2014/main" id="{05F14433-681C-4C6D-909E-39C12967463D}"/>
+          <p:cNvPr id="184" name="footer-status">
+            <a:extLst xmlns:a="http://schemas.openxmlformats.org/drawingml/2006/main">
+              <a:ext uri="{FF2B5EF4-FFF2-40B4-BE49-F238E27FC236}">
+                <a16:creationId xmlns:a16="http://schemas.microsoft.com/office/drawing/2014/main" id="{2F37D169-7F12-4D70-A84A-0914D6EE3A1D}"/>
               </a:ext>
             </a:extLst>
           </p:cNvPr>
@@ -8152,7 +8269,7 @@
     </p:spTree>
     <p:extLst>
       <p:ext uri="{BB962C8B-B14F-4D97-AF65-F5344CB8AC3E}">
-        <p14:creationId xmlns:p14="http://schemas.microsoft.com/office/powerpoint/2010/main" val="736923861"/>
+        <p14:creationId xmlns:p14="http://schemas.microsoft.com/office/powerpoint/2010/main" val="184288260"/>
       </p:ext>
     </p:extLst>
   </p:cSld>
